--- a/重构版论文_v4_20260915/汇报用_论文介绍.pptx
+++ b/重构版论文_v4_20260915/汇报用_论文介绍.pptx
@@ -649,7 +649,7 @@
           <a:lstStyle/>
           <a:p>
             <a:r>
-              <a:t>六阶段审计的每一步都有计数与产物记录；外部三个语料是独立原生标签基准；主实验十个种子。特别强调：46 项检查与逐样本预测都公开，审稿时可直接重算。</a:t>
+              <a:t>六阶段审计的每一步都有计数与产物记录；外部三个语料是独立原生标签基准；主实验十个种子。特别强调：49 项检查与逐样本预测都公开，审稿时可直接重算。</a:t>
             </a:r>
           </a:p>
         </p:txBody>
@@ -6672,7 +6672,7 @@
                 </a:solidFill>
                 <a:latin typeface="Microsoft YaHei"/>
               </a:rPr>
-              <a:t>46 项自动检查全绿；722 个逐样本预测公开；仓库带 tag v1.11.0</a:t>
+              <a:t>49 项自动检查全绿；722 个逐样本预测公开；仓库带 tag v1.11.0</a:t>
             </a:r>
           </a:p>
         </p:txBody>
@@ -9605,7 +9605,7 @@
                 </a:solidFill>
                 <a:latin typeface="Microsoft YaHei"/>
               </a:rPr>
-              <a:t>45 项自动检查持续复核这些数字；开放集与代价的每一项都能从公开的逐样本预测重算。</a:t>
+              <a:t>49 项自动检查持续复核这些数字；开放集与代价的每一项都能从公开的逐样本预测重算。</a:t>
             </a:r>
           </a:p>
         </p:txBody>

--- a/重构版论文_v4_20260915/汇报用_论文介绍.pptx
+++ b/重构版论文_v4_20260915/汇报用_论文介绍.pptx
@@ -13,6 +13,10 @@
     <p:sldId id="261" r:id="rId13"/>
     <p:sldId id="262" r:id="rId14"/>
     <p:sldId id="263" r:id="rId15"/>
+    <p:sldId id="264" r:id="rId16"/>
+    <p:sldId id="265" r:id="rId17"/>
+    <p:sldId id="266" r:id="rId18"/>
+    <p:sldId id="267" r:id="rId19"/>
   </p:sldIdLst>
   <p:sldSz cx="12191695" cy="6858000" type="screen4x3"/>
   <p:notesSz cx="6858000" cy="9144000"/>
@@ -534,6 +538,216 @@
 </p:notes>
 </file>
 
+<file path=ppt/notesSlides/notesSlide10.xml><?xml version="1.0" encoding="utf-8"?>
+<p:notes xmlns:a="http://schemas.openxmlformats.org/drawingml/2006/main" xmlns:p="http://schemas.openxmlformats.org/presentationml/2006/main" xmlns:r="http://schemas.openxmlformats.org/officeDocument/2006/relationships">
+  <p:cSld>
+    <p:spTree>
+      <p:nvGrpSpPr>
+        <p:cNvPr id="1" name=""/>
+        <p:cNvGrpSpPr/>
+        <p:nvPr/>
+      </p:nvGrpSpPr>
+      <p:grpSpPr>
+        <a:xfrm>
+          <a:off x="0" y="0"/>
+          <a:ext cx="0" cy="0"/>
+          <a:chOff x="0" y="0"/>
+          <a:chExt cx="0" cy="0"/>
+        </a:xfrm>
+      </p:grpSpPr>
+      <p:sp>
+        <p:nvSpPr>
+          <p:cNvPr id="2" name="Slide Image Placeholder 1"/>
+          <p:cNvSpPr>
+            <a:spLocks noGrp="1"/>
+          </p:cNvSpPr>
+          <p:nvPr>
+            <p:ph type="sldImg" idx="2"/>
+          </p:nvPr>
+        </p:nvSpPr>
+        <p:spPr/>
+      </p:sp>
+      <p:sp>
+        <p:nvSpPr>
+          <p:cNvPr id="3" name="Notes Placeholder 2"/>
+          <p:cNvSpPr>
+            <a:spLocks noGrp="1"/>
+          </p:cNvSpPr>
+          <p:nvPr>
+            <p:ph type="body" idx="3" sz="quarter"/>
+          </p:nvPr>
+        </p:nvSpPr>
+        <p:spPr/>
+        <p:txBody>
+          <a:bodyPr/>
+          <a:lstStyle/>
+          <a:p>
+            <a:r>
+              <a:t>收尾三句：没观测到增益；反转来自稀释；协议影响更大。然后把边界说清楚，再给三个下一步方向。</a:t>
+            </a:r>
+          </a:p>
+        </p:txBody>
+      </p:sp>
+      <p:sp>
+        <p:nvSpPr>
+          <p:cNvPr id="4" name="Slide Number Placeholder 3"/>
+          <p:cNvSpPr>
+            <a:spLocks noGrp="1"/>
+          </p:cNvSpPr>
+          <p:nvPr>
+            <p:ph type="sldNum" idx="5" sz="quarter"/>
+          </p:nvPr>
+        </p:nvSpPr>
+        <p:spPr/>
+      </p:sp>
+    </p:spTree>
+  </p:cSld>
+  <p:clrMapOvr>
+    <a:masterClrMapping/>
+  </p:clrMapOvr>
+</p:notes>
+</file>
+
+<file path=ppt/notesSlides/notesSlide11.xml><?xml version="1.0" encoding="utf-8"?>
+<p:notes xmlns:a="http://schemas.openxmlformats.org/drawingml/2006/main" xmlns:p="http://schemas.openxmlformats.org/presentationml/2006/main" xmlns:r="http://schemas.openxmlformats.org/officeDocument/2006/relationships">
+  <p:cSld>
+    <p:spTree>
+      <p:nvGrpSpPr>
+        <p:cNvPr id="1" name=""/>
+        <p:cNvGrpSpPr/>
+        <p:nvPr/>
+      </p:nvGrpSpPr>
+      <p:grpSpPr>
+        <a:xfrm>
+          <a:off x="0" y="0"/>
+          <a:ext cx="0" cy="0"/>
+          <a:chOff x="0" y="0"/>
+          <a:chExt cx="0" cy="0"/>
+        </a:xfrm>
+      </p:grpSpPr>
+      <p:sp>
+        <p:nvSpPr>
+          <p:cNvPr id="2" name="Slide Image Placeholder 1"/>
+          <p:cNvSpPr>
+            <a:spLocks noGrp="1"/>
+          </p:cNvSpPr>
+          <p:nvPr>
+            <p:ph type="sldImg" idx="2"/>
+          </p:nvPr>
+        </p:nvSpPr>
+        <p:spPr/>
+      </p:sp>
+      <p:sp>
+        <p:nvSpPr>
+          <p:cNvPr id="3" name="Notes Placeholder 2"/>
+          <p:cNvSpPr>
+            <a:spLocks noGrp="1"/>
+          </p:cNvSpPr>
+          <p:nvPr>
+            <p:ph type="body" idx="3" sz="quarter"/>
+          </p:nvPr>
+        </p:nvSpPr>
+        <p:spPr/>
+        <p:txBody>
+          <a:bodyPr/>
+          <a:lstStyle/>
+          <a:p>
+            <a:r>
+              <a:t>这一页不主动讲：老师问到任何数字时翻到这里，逐条念。每条都能在补充材料或公开仓库的逐样本预测里重算。</a:t>
+            </a:r>
+          </a:p>
+        </p:txBody>
+      </p:sp>
+      <p:sp>
+        <p:nvSpPr>
+          <p:cNvPr id="4" name="Slide Number Placeholder 3"/>
+          <p:cNvSpPr>
+            <a:spLocks noGrp="1"/>
+          </p:cNvSpPr>
+          <p:nvPr>
+            <p:ph type="sldNum" idx="5" sz="quarter"/>
+          </p:nvPr>
+        </p:nvSpPr>
+        <p:spPr/>
+      </p:sp>
+    </p:spTree>
+  </p:cSld>
+  <p:clrMapOvr>
+    <a:masterClrMapping/>
+  </p:clrMapOvr>
+</p:notes>
+</file>
+
+<file path=ppt/notesSlides/notesSlide12.xml><?xml version="1.0" encoding="utf-8"?>
+<p:notes xmlns:a="http://schemas.openxmlformats.org/drawingml/2006/main" xmlns:p="http://schemas.openxmlformats.org/presentationml/2006/main" xmlns:r="http://schemas.openxmlformats.org/officeDocument/2006/relationships">
+  <p:cSld>
+    <p:spTree>
+      <p:nvGrpSpPr>
+        <p:cNvPr id="1" name=""/>
+        <p:cNvGrpSpPr/>
+        <p:nvPr/>
+      </p:nvGrpSpPr>
+      <p:grpSpPr>
+        <a:xfrm>
+          <a:off x="0" y="0"/>
+          <a:ext cx="0" cy="0"/>
+          <a:chOff x="0" y="0"/>
+          <a:chExt cx="0" cy="0"/>
+        </a:xfrm>
+      </p:grpSpPr>
+      <p:sp>
+        <p:nvSpPr>
+          <p:cNvPr id="2" name="Slide Image Placeholder 1"/>
+          <p:cNvSpPr>
+            <a:spLocks noGrp="1"/>
+          </p:cNvSpPr>
+          <p:nvPr>
+            <p:ph type="sldImg" idx="2"/>
+          </p:nvPr>
+        </p:nvSpPr>
+        <p:spPr/>
+      </p:sp>
+      <p:sp>
+        <p:nvSpPr>
+          <p:cNvPr id="3" name="Notes Placeholder 2"/>
+          <p:cNvSpPr>
+            <a:spLocks noGrp="1"/>
+          </p:cNvSpPr>
+          <p:nvPr>
+            <p:ph type="body" idx="3" sz="quarter"/>
+          </p:nvPr>
+        </p:nvSpPr>
+        <p:spPr/>
+        <p:txBody>
+          <a:bodyPr/>
+          <a:lstStyle/>
+          <a:p>
+            <a:r>
+              <a:t>这一页只在被问到复现性时使用：四条命令、检查覆盖的四类风险、以及五份可以当场打开的证据文档。</a:t>
+            </a:r>
+          </a:p>
+        </p:txBody>
+      </p:sp>
+      <p:sp>
+        <p:nvSpPr>
+          <p:cNvPr id="4" name="Slide Number Placeholder 3"/>
+          <p:cNvSpPr>
+            <a:spLocks noGrp="1"/>
+          </p:cNvSpPr>
+          <p:nvPr>
+            <p:ph type="sldNum" idx="5" sz="quarter"/>
+          </p:nvPr>
+        </p:nvSpPr>
+        <p:spPr/>
+      </p:sp>
+    </p:spTree>
+  </p:cSld>
+  <p:clrMapOvr>
+    <a:masterClrMapping/>
+  </p:clrMapOvr>
+</p:notes>
+</file>
+
 <file path=ppt/notesSlides/notesSlide2.xml><?xml version="1.0" encoding="utf-8"?>
 <p:notes xmlns:a="http://schemas.openxmlformats.org/drawingml/2006/main" xmlns:p="http://schemas.openxmlformats.org/presentationml/2006/main" xmlns:r="http://schemas.openxmlformats.org/officeDocument/2006/relationships">
   <p:cSld>
@@ -789,7 +1003,7 @@
           <a:lstStyle/>
           <a:p>
             <a:r>
-              <a:t>这三条是独立证据：上界是可证明的、权重结构是可观测的、搜索是穷举的。结论：在本数据结构下继续调门控不会带来判别增益。</a:t>
+              <a:t>这一页回答「你怎么能说没有增益」：先说明不显著不等于等价，再给四组数字——逐种子方向 5:5、TOST 9/10 与 10/10、逐行不一致 6–21 行、效应量 dz −0.396，最后用最小可检测差说明为什么必须做等价检验。</a:t>
             </a:r>
           </a:p>
         </p:txBody>
@@ -859,7 +1073,7 @@
           <a:lstStyle/>
           <a:p>
             <a:r>
-              <a:t>把反转解释清楚是这轮汇报的关键：不是加权把结果弄坏了，而是四路平均把一份落后的特征视图摊进来。三个规模都符合同一个算式。</a:t>
+              <a:t>这三条是独立证据：上界是可证明的、权重结构是可观测的、搜索是穷举的。结论：在本数据结构下继续调门控不会带来判别增益。</a:t>
             </a:r>
           </a:p>
         </p:txBody>
@@ -929,7 +1143,7 @@
           <a:lstStyle/>
           <a:p>
             <a:r>
-              <a:t>这是本文对条件加权最不利的两组证据，主动讲比被问要好。注意不要用「显著变差」的措辞：全语料在 0.01 边界上仍等价。</a:t>
+              <a:t>把反转解释清楚是这轮汇报的关键：不是加权把结果弄坏了，而是四路平均把一份落后的特征视图摊进来。三个规模都符合同一个算式。</a:t>
             </a:r>
           </a:p>
         </p:txBody>
@@ -999,7 +1213,77 @@
           <a:lstStyle/>
           <a:p>
             <a:r>
-              <a:t>收尾三句：没观测到增益；反转来自稀释；协议影响更大。然后把边界说清楚，再给三个下一步方向。</a:t>
+              <a:t>这是本文对条件加权最不利的两组证据，主动讲比被问要好。注意不要用「显著变差」的措辞：全语料在 0.01 边界上仍等价。</a:t>
+            </a:r>
+          </a:p>
+        </p:txBody>
+      </p:sp>
+      <p:sp>
+        <p:nvSpPr>
+          <p:cNvPr id="4" name="Slide Number Placeholder 3"/>
+          <p:cNvSpPr>
+            <a:spLocks noGrp="1"/>
+          </p:cNvSpPr>
+          <p:nvPr>
+            <p:ph type="sldNum" idx="5" sz="quarter"/>
+          </p:nvPr>
+        </p:nvSpPr>
+        <p:spPr/>
+      </p:sp>
+    </p:spTree>
+  </p:cSld>
+  <p:clrMapOvr>
+    <a:masterClrMapping/>
+  </p:clrMapOvr>
+</p:notes>
+</file>
+
+<file path=ppt/notesSlides/notesSlide9.xml><?xml version="1.0" encoding="utf-8"?>
+<p:notes xmlns:a="http://schemas.openxmlformats.org/drawingml/2006/main" xmlns:p="http://schemas.openxmlformats.org/presentationml/2006/main" xmlns:r="http://schemas.openxmlformats.org/officeDocument/2006/relationships">
+  <p:cSld>
+    <p:spTree>
+      <p:nvGrpSpPr>
+        <p:cNvPr id="1" name=""/>
+        <p:cNvGrpSpPr/>
+        <p:nvPr/>
+      </p:nvGrpSpPr>
+      <p:grpSpPr>
+        <a:xfrm>
+          <a:off x="0" y="0"/>
+          <a:ext cx="0" cy="0"/>
+          <a:chOff x="0" y="0"/>
+          <a:chExt cx="0" cy="0"/>
+        </a:xfrm>
+      </p:grpSpPr>
+      <p:sp>
+        <p:nvSpPr>
+          <p:cNvPr id="2" name="Slide Image Placeholder 1"/>
+          <p:cNvSpPr>
+            <a:spLocks noGrp="1"/>
+          </p:cNvSpPr>
+          <p:nvPr>
+            <p:ph type="sldImg" idx="2"/>
+          </p:nvPr>
+        </p:nvSpPr>
+        <p:spPr/>
+      </p:sp>
+      <p:sp>
+        <p:nvSpPr>
+          <p:cNvPr id="3" name="Notes Placeholder 2"/>
+          <p:cNvSpPr>
+            <a:spLocks noGrp="1"/>
+          </p:cNvSpPr>
+          <p:nvPr>
+            <p:ph type="body" idx="3" sz="quarter"/>
+          </p:nvPr>
+        </p:nvSpPr>
+        <p:spPr/>
+        <p:txBody>
+          <a:bodyPr/>
+          <a:lstStyle/>
+          <a:p>
+            <a:r>
+              <a:t>这一页回应两个可能的攻击：结论是不是被某一档类别先验制造出来的、是不是只在 CIC-IDS2017 上成立。平衡控制与三个外部语料给出的方向一致；同时坦白 N-BaIoT 已饱和、文件级差异远大于聚合差异。</a:t>
             </a:r>
           </a:p>
         </p:txBody>
@@ -4685,6 +4969,2197 @@
                 <a:latin typeface="Microsoft YaHei"/>
               </a:rPr>
               <a:t>1</a:t>
+            </a:r>
+          </a:p>
+        </p:txBody>
+      </p:sp>
+    </p:spTree>
+  </p:cSld>
+  <p:clrMapOvr>
+    <a:masterClrMapping/>
+  </p:clrMapOvr>
+</p:sld>
+</file>
+
+<file path=ppt/slides/slide10.xml><?xml version="1.0" encoding="utf-8"?>
+<p:sld xmlns:a="http://schemas.openxmlformats.org/drawingml/2006/main" xmlns:p="http://schemas.openxmlformats.org/presentationml/2006/main" xmlns:r="http://schemas.openxmlformats.org/officeDocument/2006/relationships">
+  <p:cSld>
+    <p:spTree>
+      <p:nvGrpSpPr>
+        <p:cNvPr id="1" name=""/>
+        <p:cNvGrpSpPr/>
+        <p:nvPr/>
+      </p:nvGrpSpPr>
+      <p:grpSpPr/>
+      <p:sp>
+        <p:nvSpPr>
+          <p:cNvPr id="2" name="TextBox 1"/>
+          <p:cNvSpPr txBox="1"/>
+          <p:nvPr/>
+        </p:nvSpPr>
+        <p:spPr>
+          <a:xfrm>
+            <a:off x="548640" y="347472"/>
+            <a:ext cx="10972800" cy="310896"/>
+          </a:xfrm>
+          <a:prstGeom prst="rect">
+            <a:avLst/>
+          </a:prstGeom>
+          <a:noFill/>
+        </p:spPr>
+        <p:txBody>
+          <a:bodyPr wrap="square">
+            <a:spAutoFit/>
+          </a:bodyPr>
+          <a:lstStyle/>
+          <a:p>
+            <a:pPr algn="l">
+              <a:lnSpc>
+                <a:spcPct val="115000"/>
+              </a:lnSpc>
+            </a:pPr>
+            <a:r>
+              <a:rPr sz="1200" b="1">
+                <a:solidFill>
+                  <a:srgbClr val="1F6FEB"/>
+                </a:solidFill>
+                <a:latin typeface="Microsoft YaHei"/>
+              </a:rPr>
+              <a:t>收尾</a:t>
+            </a:r>
+          </a:p>
+        </p:txBody>
+      </p:sp>
+      <p:sp>
+        <p:nvSpPr>
+          <p:cNvPr id="3" name="TextBox 2"/>
+          <p:cNvSpPr txBox="1"/>
+          <p:nvPr/>
+        </p:nvSpPr>
+        <p:spPr>
+          <a:xfrm>
+            <a:off x="548640" y="694944"/>
+            <a:ext cx="11064240" cy="731520"/>
+          </a:xfrm>
+          <a:prstGeom prst="rect">
+            <a:avLst/>
+          </a:prstGeom>
+          <a:noFill/>
+        </p:spPr>
+        <p:txBody>
+          <a:bodyPr wrap="square">
+            <a:spAutoFit/>
+          </a:bodyPr>
+          <a:lstStyle/>
+          <a:p>
+            <a:pPr algn="l">
+              <a:lnSpc>
+                <a:spcPct val="115000"/>
+              </a:lnSpc>
+            </a:pPr>
+            <a:r>
+              <a:rPr sz="2600" b="1">
+                <a:solidFill>
+                  <a:srgbClr val="1F2A37"/>
+                </a:solidFill>
+                <a:latin typeface="Microsoft YaHei"/>
+              </a:rPr>
+              <a:t>结论、边界与下一步</a:t>
+            </a:r>
+          </a:p>
+        </p:txBody>
+      </p:sp>
+      <p:sp>
+        <p:nvSpPr>
+          <p:cNvPr id="4" name="Rectangle 3"/>
+          <p:cNvSpPr/>
+          <p:nvPr/>
+        </p:nvSpPr>
+        <p:spPr>
+          <a:xfrm>
+            <a:off x="548640" y="1463040"/>
+            <a:ext cx="11064240" cy="15240"/>
+          </a:xfrm>
+          <a:prstGeom prst="rect">
+            <a:avLst/>
+          </a:prstGeom>
+          <a:solidFill>
+            <a:srgbClr val="D1D5DB"/>
+          </a:solidFill>
+          <a:ln>
+            <a:noFill/>
+          </a:ln>
+          <a:effectLst/>
+        </p:spPr>
+        <p:style>
+          <a:lnRef idx="1">
+            <a:schemeClr val="accent1"/>
+          </a:lnRef>
+          <a:fillRef idx="3">
+            <a:schemeClr val="accent1"/>
+          </a:fillRef>
+          <a:effectRef idx="2">
+            <a:schemeClr val="accent1"/>
+          </a:effectRef>
+          <a:fontRef idx="minor">
+            <a:schemeClr val="lt1"/>
+          </a:fontRef>
+        </p:style>
+        <p:txBody>
+          <a:bodyPr rtlCol="0" anchor="ctr"/>
+          <a:lstStyle/>
+          <a:p>
+            <a:pPr algn="ctr"/>
+          </a:p>
+        </p:txBody>
+      </p:sp>
+      <p:sp>
+        <p:nvSpPr>
+          <p:cNvPr id="5" name="Rectangle 4"/>
+          <p:cNvSpPr/>
+          <p:nvPr/>
+        </p:nvSpPr>
+        <p:spPr>
+          <a:xfrm>
+            <a:off x="548640" y="1737360"/>
+            <a:ext cx="7223760" cy="2194560"/>
+          </a:xfrm>
+          <a:prstGeom prst="rect">
+            <a:avLst/>
+          </a:prstGeom>
+          <a:solidFill>
+            <a:srgbClr val="F3F5F7"/>
+          </a:solidFill>
+          <a:ln>
+            <a:solidFill>
+              <a:srgbClr val="F3F5F7"/>
+            </a:solidFill>
+          </a:ln>
+          <a:effectLst/>
+        </p:spPr>
+        <p:style>
+          <a:lnRef idx="1">
+            <a:schemeClr val="accent1"/>
+          </a:lnRef>
+          <a:fillRef idx="3">
+            <a:schemeClr val="accent1"/>
+          </a:fillRef>
+          <a:effectRef idx="2">
+            <a:schemeClr val="accent1"/>
+          </a:effectRef>
+          <a:fontRef idx="minor">
+            <a:schemeClr val="lt1"/>
+          </a:fontRef>
+        </p:style>
+        <p:txBody>
+          <a:bodyPr rtlCol="0" anchor="ctr"/>
+          <a:lstStyle/>
+          <a:p>
+            <a:pPr algn="ctr"/>
+          </a:p>
+        </p:txBody>
+      </p:sp>
+      <p:sp>
+        <p:nvSpPr>
+          <p:cNvPr id="6" name="TextBox 5"/>
+          <p:cNvSpPr txBox="1"/>
+          <p:nvPr/>
+        </p:nvSpPr>
+        <p:spPr>
+          <a:xfrm>
+            <a:off x="822960" y="1965960"/>
+            <a:ext cx="6675120" cy="1828800"/>
+          </a:xfrm>
+          <a:prstGeom prst="rect">
+            <a:avLst/>
+          </a:prstGeom>
+          <a:noFill/>
+        </p:spPr>
+        <p:txBody>
+          <a:bodyPr wrap="square">
+            <a:spAutoFit/>
+          </a:bodyPr>
+          <a:lstStyle/>
+          <a:p>
+            <a:pPr algn="l">
+              <a:lnSpc>
+                <a:spcPct val="140000"/>
+              </a:lnSpc>
+            </a:pPr>
+            <a:r>
+              <a:rPr sz="1500" b="0">
+                <a:solidFill>
+                  <a:srgbClr val="1F2A37"/>
+                </a:solidFill>
+                <a:latin typeface="Microsoft YaHei"/>
+              </a:rPr>
+              <a:t>1. 在流特征公开数据上，条件加权相对等权投票**未观测到判别增益**；</a:t>
+            </a:r>
+          </a:p>
+          <a:p>
+            <a:pPr algn="l">
+              <a:lnSpc>
+                <a:spcPct val="140000"/>
+              </a:lnSpc>
+            </a:pPr>
+            <a:r>
+              <a:rPr sz="1500" b="0">
+                <a:solidFill>
+                  <a:srgbClr val="1F2A37"/>
+                </a:solidFill>
+                <a:latin typeface="Microsoft YaHei"/>
+              </a:rPr>
+              <a:t>2. 全语料上的劣势来自成员稀释，可由成员分差直接算出；</a:t>
+            </a:r>
+          </a:p>
+          <a:p>
+            <a:pPr algn="l">
+              <a:lnSpc>
+                <a:spcPct val="140000"/>
+              </a:lnSpc>
+            </a:pPr>
+            <a:r>
+              <a:rPr sz="1500" b="0">
+                <a:solidFill>
+                  <a:srgbClr val="1F2A37"/>
+                </a:solidFill>
+                <a:latin typeface="Microsoft YaHei"/>
+              </a:rPr>
+              <a:t>3. 协议选择（先验 +0.0725、去重顺序 ≤0.0060）比聚合规则差异（0.0005 量级）大一个数量级，模型族差异更大（MLP 落后 0.0916）。</a:t>
+            </a:r>
+          </a:p>
+        </p:txBody>
+      </p:sp>
+      <p:sp>
+        <p:nvSpPr>
+          <p:cNvPr id="7" name="TextBox 6"/>
+          <p:cNvSpPr txBox="1"/>
+          <p:nvPr/>
+        </p:nvSpPr>
+        <p:spPr>
+          <a:xfrm>
+            <a:off x="548640" y="4114800"/>
+            <a:ext cx="7223760" cy="1645920"/>
+          </a:xfrm>
+          <a:prstGeom prst="rect">
+            <a:avLst/>
+          </a:prstGeom>
+          <a:noFill/>
+        </p:spPr>
+        <p:txBody>
+          <a:bodyPr wrap="square">
+            <a:spAutoFit/>
+          </a:bodyPr>
+          <a:lstStyle/>
+          <a:p>
+            <a:pPr algn="l">
+              <a:lnSpc>
+                <a:spcPct val="130000"/>
+              </a:lnSpc>
+            </a:pPr>
+            <a:r>
+              <a:rPr sz="1300" b="0">
+                <a:solidFill>
+                  <a:srgbClr val="6B7280"/>
+                </a:solidFill>
+                <a:latin typeface="Microsoft YaHei"/>
+              </a:rPr>
+              <a:t>边界：四个语料都不是生产流量；文件级实验不是时间外推；开放集只覆盖三个未知族与一个显著性水平；对抗性规避未评估。</a:t>
+            </a:r>
+          </a:p>
+        </p:txBody>
+      </p:sp>
+      <p:sp>
+        <p:nvSpPr>
+          <p:cNvPr id="8" name="Rectangle 7"/>
+          <p:cNvSpPr/>
+          <p:nvPr/>
+        </p:nvSpPr>
+        <p:spPr>
+          <a:xfrm>
+            <a:off x="8092440" y="1737360"/>
+            <a:ext cx="3566160" cy="2194560"/>
+          </a:xfrm>
+          <a:prstGeom prst="rect">
+            <a:avLst/>
+          </a:prstGeom>
+          <a:solidFill>
+            <a:srgbClr val="F3F5F7"/>
+          </a:solidFill>
+          <a:ln>
+            <a:solidFill>
+              <a:srgbClr val="F3F5F7"/>
+            </a:solidFill>
+          </a:ln>
+          <a:effectLst/>
+        </p:spPr>
+        <p:style>
+          <a:lnRef idx="1">
+            <a:schemeClr val="accent1"/>
+          </a:lnRef>
+          <a:fillRef idx="3">
+            <a:schemeClr val="accent1"/>
+          </a:fillRef>
+          <a:effectRef idx="2">
+            <a:schemeClr val="accent1"/>
+          </a:effectRef>
+          <a:fontRef idx="minor">
+            <a:schemeClr val="lt1"/>
+          </a:fontRef>
+        </p:style>
+        <p:txBody>
+          <a:bodyPr rtlCol="0" anchor="ctr"/>
+          <a:lstStyle/>
+          <a:p>
+            <a:pPr algn="ctr"/>
+          </a:p>
+        </p:txBody>
+      </p:sp>
+      <p:sp>
+        <p:nvSpPr>
+          <p:cNvPr id="9" name="TextBox 8"/>
+          <p:cNvSpPr txBox="1"/>
+          <p:nvPr/>
+        </p:nvSpPr>
+        <p:spPr>
+          <a:xfrm>
+            <a:off x="8321040" y="1965960"/>
+            <a:ext cx="3108960" cy="1828800"/>
+          </a:xfrm>
+          <a:prstGeom prst="rect">
+            <a:avLst/>
+          </a:prstGeom>
+          <a:noFill/>
+        </p:spPr>
+        <p:txBody>
+          <a:bodyPr wrap="square">
+            <a:spAutoFit/>
+          </a:bodyPr>
+          <a:lstStyle/>
+          <a:p>
+            <a:pPr algn="l">
+              <a:lnSpc>
+                <a:spcPct val="130000"/>
+              </a:lnSpc>
+            </a:pPr>
+            <a:r>
+              <a:rPr sz="1300" b="0">
+                <a:solidFill>
+                  <a:srgbClr val="1F2A37"/>
+                </a:solidFill>
+                <a:latin typeface="Microsoft YaHei"/>
+              </a:rPr>
+              <a:t>下一步</a:t>
+            </a:r>
+          </a:p>
+          <a:p>
+            <a:pPr algn="l">
+              <a:lnSpc>
+                <a:spcPct val="130000"/>
+              </a:lnSpc>
+            </a:pPr>
+          </a:p>
+          <a:p>
+            <a:pPr algn="l">
+              <a:lnSpc>
+                <a:spcPct val="130000"/>
+              </a:lnSpc>
+            </a:pPr>
+            <a:r>
+              <a:rPr sz="1300" b="0">
+                <a:solidFill>
+                  <a:srgbClr val="1F2A37"/>
+                </a:solidFill>
+                <a:latin typeface="Microsoft YaHei"/>
+              </a:rPr>
+              <a:t>① 显式强制专家去相关的加权机制</a:t>
+            </a:r>
+          </a:p>
+          <a:p>
+            <a:pPr algn="l">
+              <a:lnSpc>
+                <a:spcPct val="130000"/>
+              </a:lnSpc>
+            </a:pPr>
+            <a:r>
+              <a:rPr sz="1300" b="0">
+                <a:solidFill>
+                  <a:srgbClr val="1F2A37"/>
+                </a:solidFill>
+                <a:latin typeface="Microsoft YaHei"/>
+              </a:rPr>
+              <a:t>② 跨时段/跨场景的完整类别协议</a:t>
+            </a:r>
+          </a:p>
+          <a:p>
+            <a:pPr algn="l">
+              <a:lnSpc>
+                <a:spcPct val="130000"/>
+              </a:lnSpc>
+            </a:pPr>
+            <a:r>
+              <a:rPr sz="1300" b="0">
+                <a:solidFill>
+                  <a:srgbClr val="1F2A37"/>
+                </a:solidFill>
+                <a:latin typeface="Microsoft YaHei"/>
+              </a:rPr>
+              <a:t>③ 把报告建议做成可自动检查的清单</a:t>
+            </a:r>
+          </a:p>
+        </p:txBody>
+      </p:sp>
+      <p:sp>
+        <p:nvSpPr>
+          <p:cNvPr id="10" name="TextBox 9"/>
+          <p:cNvSpPr txBox="1"/>
+          <p:nvPr/>
+        </p:nvSpPr>
+        <p:spPr>
+          <a:xfrm>
+            <a:off x="8092440" y="4114800"/>
+            <a:ext cx="3566160" cy="1645920"/>
+          </a:xfrm>
+          <a:prstGeom prst="rect">
+            <a:avLst/>
+          </a:prstGeom>
+          <a:noFill/>
+        </p:spPr>
+        <p:txBody>
+          <a:bodyPr wrap="square">
+            <a:spAutoFit/>
+          </a:bodyPr>
+          <a:lstStyle/>
+          <a:p>
+            <a:pPr algn="l">
+              <a:lnSpc>
+                <a:spcPct val="115000"/>
+              </a:lnSpc>
+            </a:pPr>
+            <a:r>
+              <a:rPr sz="1200" b="0">
+                <a:solidFill>
+                  <a:srgbClr val="6B7280"/>
+                </a:solidFill>
+                <a:latin typeface="Microsoft YaHei"/>
+              </a:rPr>
+              <a:t>材料：论文介绍（两页）· 汇报要点 · 正式稿件（中英）· 补充材料 S01–S30 · 公开仓库 tag v1.11.0</a:t>
+            </a:r>
+          </a:p>
+        </p:txBody>
+      </p:sp>
+      <p:sp>
+        <p:nvSpPr>
+          <p:cNvPr id="11" name="TextBox 10"/>
+          <p:cNvSpPr txBox="1"/>
+          <p:nvPr/>
+        </p:nvSpPr>
+        <p:spPr>
+          <a:xfrm>
+            <a:off x="548640" y="6400800"/>
+            <a:ext cx="8229600" cy="274320"/>
+          </a:xfrm>
+          <a:prstGeom prst="rect">
+            <a:avLst/>
+          </a:prstGeom>
+          <a:noFill/>
+        </p:spPr>
+        <p:txBody>
+          <a:bodyPr wrap="square">
+            <a:spAutoFit/>
+          </a:bodyPr>
+          <a:lstStyle/>
+          <a:p>
+            <a:pPr algn="l">
+              <a:lnSpc>
+                <a:spcPct val="115000"/>
+              </a:lnSpc>
+            </a:pPr>
+            <a:r>
+              <a:rPr sz="1000" b="0">
+                <a:solidFill>
+                  <a:srgbClr val="6B7280"/>
+                </a:solidFill>
+                <a:latin typeface="Microsoft YaHei"/>
+              </a:rPr>
+              <a:t>泄漏受控的条件集成加权研究 · v1.11.0 · 数字均取自发布产物</a:t>
+            </a:r>
+          </a:p>
+        </p:txBody>
+      </p:sp>
+      <p:sp>
+        <p:nvSpPr>
+          <p:cNvPr id="12" name="TextBox 11"/>
+          <p:cNvSpPr txBox="1"/>
+          <p:nvPr/>
+        </p:nvSpPr>
+        <p:spPr>
+          <a:xfrm>
+            <a:off x="11155680" y="6400800"/>
+            <a:ext cx="548640" cy="274320"/>
+          </a:xfrm>
+          <a:prstGeom prst="rect">
+            <a:avLst/>
+          </a:prstGeom>
+          <a:noFill/>
+        </p:spPr>
+        <p:txBody>
+          <a:bodyPr wrap="square">
+            <a:spAutoFit/>
+          </a:bodyPr>
+          <a:lstStyle/>
+          <a:p>
+            <a:pPr algn="r">
+              <a:lnSpc>
+                <a:spcPct val="115000"/>
+              </a:lnSpc>
+            </a:pPr>
+            <a:r>
+              <a:rPr sz="1000" b="0">
+                <a:solidFill>
+                  <a:srgbClr val="6B7280"/>
+                </a:solidFill>
+                <a:latin typeface="Microsoft YaHei"/>
+              </a:rPr>
+              <a:t>10</a:t>
+            </a:r>
+          </a:p>
+        </p:txBody>
+      </p:sp>
+    </p:spTree>
+  </p:cSld>
+  <p:clrMapOvr>
+    <a:masterClrMapping/>
+  </p:clrMapOvr>
+</p:sld>
+</file>
+
+<file path=ppt/slides/slide11.xml><?xml version="1.0" encoding="utf-8"?>
+<p:sld xmlns:a="http://schemas.openxmlformats.org/drawingml/2006/main" xmlns:p="http://schemas.openxmlformats.org/presentationml/2006/main" xmlns:r="http://schemas.openxmlformats.org/officeDocument/2006/relationships">
+  <p:cSld>
+    <p:spTree>
+      <p:nvGrpSpPr>
+        <p:cNvPr id="1" name=""/>
+        <p:cNvGrpSpPr/>
+        <p:nvPr/>
+      </p:nvGrpSpPr>
+      <p:grpSpPr/>
+      <p:sp>
+        <p:nvSpPr>
+          <p:cNvPr id="2" name="TextBox 1"/>
+          <p:cNvSpPr txBox="1"/>
+          <p:nvPr/>
+        </p:nvSpPr>
+        <p:spPr>
+          <a:xfrm>
+            <a:off x="548640" y="347472"/>
+            <a:ext cx="10972800" cy="310896"/>
+          </a:xfrm>
+          <a:prstGeom prst="rect">
+            <a:avLst/>
+          </a:prstGeom>
+          <a:noFill/>
+        </p:spPr>
+        <p:txBody>
+          <a:bodyPr wrap="square">
+            <a:spAutoFit/>
+          </a:bodyPr>
+          <a:lstStyle/>
+          <a:p>
+            <a:pPr algn="l">
+              <a:lnSpc>
+                <a:spcPct val="115000"/>
+              </a:lnSpc>
+            </a:pPr>
+            <a:r>
+              <a:rPr sz="1200" b="1">
+                <a:solidFill>
+                  <a:srgbClr val="1F6FEB"/>
+                </a:solidFill>
+                <a:latin typeface="Microsoft YaHei"/>
+              </a:rPr>
+              <a:t>被追问时直接念</a:t>
+            </a:r>
+          </a:p>
+        </p:txBody>
+      </p:sp>
+      <p:sp>
+        <p:nvSpPr>
+          <p:cNvPr id="3" name="TextBox 2"/>
+          <p:cNvSpPr txBox="1"/>
+          <p:nvPr/>
+        </p:nvSpPr>
+        <p:spPr>
+          <a:xfrm>
+            <a:off x="548640" y="694944"/>
+            <a:ext cx="11064240" cy="731520"/>
+          </a:xfrm>
+          <a:prstGeom prst="rect">
+            <a:avLst/>
+          </a:prstGeom>
+          <a:noFill/>
+        </p:spPr>
+        <p:txBody>
+          <a:bodyPr wrap="square">
+            <a:spAutoFit/>
+          </a:bodyPr>
+          <a:lstStyle/>
+          <a:p>
+            <a:pPr algn="l">
+              <a:lnSpc>
+                <a:spcPct val="115000"/>
+              </a:lnSpc>
+            </a:pPr>
+            <a:r>
+              <a:rPr sz="2600" b="1">
+                <a:solidFill>
+                  <a:srgbClr val="1F2A37"/>
+                </a:solidFill>
+                <a:latin typeface="Microsoft YaHei"/>
+              </a:rPr>
+              <a:t>数字速查（备用页）</a:t>
+            </a:r>
+          </a:p>
+        </p:txBody>
+      </p:sp>
+      <p:sp>
+        <p:nvSpPr>
+          <p:cNvPr id="4" name="Rectangle 3"/>
+          <p:cNvSpPr/>
+          <p:nvPr/>
+        </p:nvSpPr>
+        <p:spPr>
+          <a:xfrm>
+            <a:off x="548640" y="1463040"/>
+            <a:ext cx="11064240" cy="15240"/>
+          </a:xfrm>
+          <a:prstGeom prst="rect">
+            <a:avLst/>
+          </a:prstGeom>
+          <a:solidFill>
+            <a:srgbClr val="D1D5DB"/>
+          </a:solidFill>
+          <a:ln>
+            <a:noFill/>
+          </a:ln>
+          <a:effectLst/>
+        </p:spPr>
+        <p:style>
+          <a:lnRef idx="1">
+            <a:schemeClr val="accent1"/>
+          </a:lnRef>
+          <a:fillRef idx="3">
+            <a:schemeClr val="accent1"/>
+          </a:fillRef>
+          <a:effectRef idx="2">
+            <a:schemeClr val="accent1"/>
+          </a:effectRef>
+          <a:fontRef idx="minor">
+            <a:schemeClr val="lt1"/>
+          </a:fontRef>
+        </p:style>
+        <p:txBody>
+          <a:bodyPr rtlCol="0" anchor="ctr"/>
+          <a:lstStyle/>
+          <a:p>
+            <a:pPr algn="ctr"/>
+          </a:p>
+        </p:txBody>
+      </p:sp>
+      <p:graphicFrame>
+        <p:nvGraphicFramePr>
+          <p:cNvPr id="5" name="Table 4"/>
+          <p:cNvGraphicFramePr>
+            <a:graphicFrameLocks noGrp="1"/>
+          </p:cNvGraphicFramePr>
+          <p:nvPr/>
+        </p:nvGraphicFramePr>
+        <p:xfrm>
+          <a:off x="548640" y="1417320"/>
+          <a:ext cx="5532120" cy="2834640"/>
+        </p:xfrm>
+        <a:graphic>
+          <a:graphicData uri="http://schemas.openxmlformats.org/drawingml/2006/table">
+            <a:tbl>
+              <a:tblPr firstRow="1" bandRow="1">
+                <a:tableStyleId>{5C22544A-7EE6-4342-B048-85BDC9FD1C3A}</a:tableStyleId>
+              </a:tblPr>
+              <a:tblGrid>
+                <a:gridCol w="2331720"/>
+                <a:gridCol w="3200400"/>
+              </a:tblGrid>
+              <a:tr h="283464">
+                <a:tc>
+                  <a:txBody>
+                    <a:bodyPr/>
+                    <a:lstStyle/>
+                    <a:p>
+                      <a:r>
+                        <a:rPr sz="1050" b="1">
+                          <a:solidFill>
+                            <a:srgbClr val="1F2A37"/>
+                          </a:solidFill>
+                          <a:latin typeface="Microsoft YaHei"/>
+                        </a:rPr>
+                        <a:t>项目</a:t>
+                      </a:r>
+                    </a:p>
+                  </a:txBody>
+                  <a:tcPr marL="45720" marR="45720" marT="4572" marB="4572"/>
+                </a:tc>
+                <a:tc>
+                  <a:txBody>
+                    <a:bodyPr/>
+                    <a:lstStyle/>
+                    <a:p>
+                      <a:r>
+                        <a:rPr sz="1050" b="1">
+                          <a:solidFill>
+                            <a:srgbClr val="1F2A37"/>
+                          </a:solidFill>
+                          <a:latin typeface="Microsoft YaHei"/>
+                        </a:rPr>
+                        <a:t>数值</a:t>
+                      </a:r>
+                    </a:p>
+                  </a:txBody>
+                  <a:tcPr marL="45720" marR="45720" marT="4572" marB="4572"/>
+                </a:tc>
+              </a:tr>
+              <a:tr h="283464">
+                <a:tc>
+                  <a:txBody>
+                    <a:bodyPr/>
+                    <a:lstStyle/>
+                    <a:p>
+                      <a:r>
+                        <a:rPr sz="1000" b="0">
+                          <a:solidFill>
+                            <a:srgbClr val="1F2A37"/>
+                          </a:solidFill>
+                          <a:latin typeface="Microsoft YaHei"/>
+                        </a:rPr>
+                        <a:t>原始 → 可映射 → 有效 → 物理有效</a:t>
+                      </a:r>
+                    </a:p>
+                  </a:txBody>
+                  <a:tcPr marL="45720" marR="45720" marT="4572" marB="4572"/>
+                </a:tc>
+                <a:tc>
+                  <a:txBody>
+                    <a:bodyPr/>
+                    <a:lstStyle/>
+                    <a:p>
+                      <a:r>
+                        <a:rPr sz="1000" b="0">
+                          <a:solidFill>
+                            <a:srgbClr val="1F2A37"/>
+                          </a:solidFill>
+                          <a:latin typeface="Microsoft YaHei"/>
+                        </a:rPr>
+                        <a:t>2,830,743 → 2,671,766 → 2,669,025 → 2,668,729</a:t>
+                      </a:r>
+                    </a:p>
+                  </a:txBody>
+                  <a:tcPr marL="45720" marR="45720" marT="4572" marB="4572"/>
+                </a:tc>
+              </a:tr>
+              <a:tr h="283464">
+                <a:tc>
+                  <a:txBody>
+                    <a:bodyPr/>
+                    <a:lstStyle/>
+                    <a:p>
+                      <a:r>
+                        <a:rPr sz="1000" b="0">
+                          <a:solidFill>
+                            <a:srgbClr val="1F2A37"/>
+                          </a:solidFill>
+                          <a:latin typeface="Microsoft YaHei"/>
+                        </a:rPr>
+                        <a:t>三档总体流量</a:t>
+                      </a:r>
+                    </a:p>
+                  </a:txBody>
+                  <a:tcPr marL="45720" marR="45720" marT="4572" marB="4572"/>
+                </a:tc>
+                <a:tc>
+                  <a:txBody>
+                    <a:bodyPr/>
+                    <a:lstStyle/>
+                    <a:p>
+                      <a:r>
+                        <a:rPr sz="1000" b="0">
+                          <a:solidFill>
+                            <a:srgbClr val="1F2A37"/>
+                          </a:solidFill>
+                          <a:latin typeface="Microsoft YaHei"/>
+                        </a:rPr>
+                        <a:t>53 237 / 413 209 / 2 429 503</a:t>
+                      </a:r>
+                    </a:p>
+                  </a:txBody>
+                  <a:tcPr marL="45720" marR="45720" marT="4572" marB="4572"/>
+                </a:tc>
+              </a:tr>
+              <a:tr h="283464">
+                <a:tc>
+                  <a:txBody>
+                    <a:bodyPr/>
+                    <a:lstStyle/>
+                    <a:p>
+                      <a:r>
+                        <a:rPr sz="1000" b="0">
+                          <a:solidFill>
+                            <a:srgbClr val="1F2A37"/>
+                          </a:solidFill>
+                          <a:latin typeface="Microsoft YaHei"/>
+                        </a:rPr>
+                        <a:t>三档平均差（条件加权 − 等权）</a:t>
+                      </a:r>
+                    </a:p>
+                  </a:txBody>
+                  <a:tcPr marL="45720" marR="45720" marT="4572" marB="4572"/>
+                </a:tc>
+                <a:tc>
+                  <a:txBody>
+                    <a:bodyPr/>
+                    <a:lstStyle/>
+                    <a:p>
+                      <a:r>
+                        <a:rPr sz="1000" b="0">
+                          <a:solidFill>
+                            <a:srgbClr val="1F2A37"/>
+                          </a:solidFill>
+                          <a:latin typeface="Microsoft YaHei"/>
+                        </a:rPr>
+                        <a:t>-0.000456 / -0.001137 / -0.005533</a:t>
+                      </a:r>
+                    </a:p>
+                  </a:txBody>
+                  <a:tcPr marL="45720" marR="45720" marT="4572" marB="4572"/>
+                </a:tc>
+              </a:tr>
+              <a:tr h="283464">
+                <a:tc>
+                  <a:txBody>
+                    <a:bodyPr/>
+                    <a:lstStyle/>
+                    <a:p>
+                      <a:r>
+                        <a:rPr sz="1000" b="0">
+                          <a:solidFill>
+                            <a:srgbClr val="1F2A37"/>
+                          </a:solidFill>
+                          <a:latin typeface="Microsoft YaHei"/>
+                        </a:rPr>
+                        <a:t>截断总体区间与 TOST</a:t>
+                      </a:r>
+                    </a:p>
+                  </a:txBody>
+                  <a:tcPr marL="45720" marR="45720" marT="4572" marB="4572"/>
+                </a:tc>
+                <a:tc>
+                  <a:txBody>
+                    <a:bodyPr/>
+                    <a:lstStyle/>
+                    <a:p>
+                      <a:r>
+                        <a:rPr sz="1000" b="0">
+                          <a:solidFill>
+                            <a:srgbClr val="1F2A37"/>
+                          </a:solidFill>
+                          <a:latin typeface="Microsoft YaHei"/>
+                        </a:rPr>
+                        <a:t>种子级 90% [-0.001124, 0.000212]；Bootstrap [-0.004251, 0.003382]；两边界等价</a:t>
+                      </a:r>
+                    </a:p>
+                  </a:txBody>
+                  <a:tcPr marL="45720" marR="45720" marT="4572" marB="4572"/>
+                </a:tc>
+              </a:tr>
+              <a:tr h="283464">
+                <a:tc>
+                  <a:txBody>
+                    <a:bodyPr/>
+                    <a:lstStyle/>
+                    <a:p>
+                      <a:r>
+                        <a:rPr sz="1000" b="0">
+                          <a:solidFill>
+                            <a:srgbClr val="1F2A37"/>
+                          </a:solidFill>
+                          <a:latin typeface="Microsoft YaHei"/>
+                        </a:rPr>
+                        <a:t>逐种子 TOST 等价</a:t>
+                      </a:r>
+                    </a:p>
+                  </a:txBody>
+                  <a:tcPr marL="45720" marR="45720" marT="4572" marB="4572"/>
+                </a:tc>
+                <a:tc>
+                  <a:txBody>
+                    <a:bodyPr/>
+                    <a:lstStyle/>
+                    <a:p>
+                      <a:r>
+                        <a:rPr sz="1000" b="0">
+                          <a:solidFill>
+                            <a:srgbClr val="1F2A37"/>
+                          </a:solidFill>
+                          <a:latin typeface="Microsoft YaHei"/>
+                        </a:rPr>
+                        <a:t>9/10（0.005）、10/10（0.01）</a:t>
+                      </a:r>
+                    </a:p>
+                  </a:txBody>
+                  <a:tcPr marL="45720" marR="45720" marT="4572" marB="4572"/>
+                </a:tc>
+              </a:tr>
+              <a:tr h="283464">
+                <a:tc>
+                  <a:txBody>
+                    <a:bodyPr/>
+                    <a:lstStyle/>
+                    <a:p>
+                      <a:r>
+                        <a:rPr sz="1000" b="0">
+                          <a:solidFill>
+                            <a:srgbClr val="1F2A37"/>
+                          </a:solidFill>
+                          <a:latin typeface="Microsoft YaHei"/>
+                        </a:rPr>
+                        <a:t>逐行不一致 / McNemar p</a:t>
+                      </a:r>
+                    </a:p>
+                  </a:txBody>
+                  <a:tcPr marL="45720" marR="45720" marT="4572" marB="4572"/>
+                </a:tc>
+                <a:tc>
+                  <a:txBody>
+                    <a:bodyPr/>
+                    <a:lstStyle/>
+                    <a:p>
+                      <a:r>
+                        <a:rPr sz="1000" b="0">
+                          <a:solidFill>
+                            <a:srgbClr val="1F2A37"/>
+                          </a:solidFill>
+                          <a:latin typeface="Microsoft YaHei"/>
+                        </a:rPr>
+                        <a:t>6–21 行；p 0.146–1.000</a:t>
+                      </a:r>
+                    </a:p>
+                  </a:txBody>
+                  <a:tcPr marL="45720" marR="45720" marT="4572" marB="4572"/>
+                </a:tc>
+              </a:tr>
+              <a:tr h="283464">
+                <a:tc>
+                  <a:txBody>
+                    <a:bodyPr/>
+                    <a:lstStyle/>
+                    <a:p>
+                      <a:r>
+                        <a:rPr sz="1000" b="0">
+                          <a:solidFill>
+                            <a:srgbClr val="1F2A37"/>
+                          </a:solidFill>
+                          <a:latin typeface="Microsoft YaHei"/>
+                        </a:rPr>
+                        <a:t>效应量 / 最小可检测差</a:t>
+                      </a:r>
+                    </a:p>
+                  </a:txBody>
+                  <a:tcPr marL="45720" marR="45720" marT="4572" marB="4572"/>
+                </a:tc>
+                <a:tc>
+                  <a:txBody>
+                    <a:bodyPr/>
+                    <a:lstStyle/>
+                    <a:p>
+                      <a:r>
+                        <a:rPr sz="1000" b="0">
+                          <a:solidFill>
+                            <a:srgbClr val="1F2A37"/>
+                          </a:solidFill>
+                          <a:latin typeface="Microsoft YaHei"/>
+                        </a:rPr>
+                        <a:t>dz -0.396；0.001146</a:t>
+                      </a:r>
+                    </a:p>
+                  </a:txBody>
+                  <a:tcPr marL="45720" marR="45720" marT="4572" marB="4572"/>
+                </a:tc>
+              </a:tr>
+              <a:tr h="283464">
+                <a:tc>
+                  <a:txBody>
+                    <a:bodyPr/>
+                    <a:lstStyle/>
+                    <a:p>
+                      <a:r>
+                        <a:rPr sz="1000" b="0">
+                          <a:solidFill>
+                            <a:srgbClr val="1F2A37"/>
+                          </a:solidFill>
+                          <a:latin typeface="Microsoft YaHei"/>
+                        </a:rPr>
+                        <a:t>可证不变 / 实际改判</a:t>
+                      </a:r>
+                    </a:p>
+                  </a:txBody>
+                  <a:tcPr marL="45720" marR="45720" marT="4572" marB="4572"/>
+                </a:tc>
+                <a:tc>
+                  <a:txBody>
+                    <a:bodyPr/>
+                    <a:lstStyle/>
+                    <a:p>
+                      <a:r>
+                        <a:rPr sz="1000" b="0">
+                          <a:solidFill>
+                            <a:srgbClr val="1F2A37"/>
+                          </a:solidFill>
+                          <a:latin typeface="Microsoft YaHei"/>
+                        </a:rPr>
+                        <a:t>99.91% / 0 行</a:t>
+                      </a:r>
+                    </a:p>
+                  </a:txBody>
+                  <a:tcPr marL="45720" marR="45720" marT="4572" marB="4572"/>
+                </a:tc>
+              </a:tr>
+              <a:tr h="283464">
+                <a:tc>
+                  <a:txBody>
+                    <a:bodyPr/>
+                    <a:lstStyle/>
+                    <a:p>
+                      <a:r>
+                        <a:rPr sz="1000" b="0">
+                          <a:solidFill>
+                            <a:srgbClr val="1F2A37"/>
+                          </a:solidFill>
+                          <a:latin typeface="Microsoft YaHei"/>
+                        </a:rPr>
+                        <a:t>权重熵 / 门控搜索</a:t>
+                      </a:r>
+                    </a:p>
+                  </a:txBody>
+                  <a:tcPr marL="45720" marR="45720" marT="4572" marB="4572"/>
+                </a:tc>
+                <a:tc>
+                  <a:txBody>
+                    <a:bodyPr/>
+                    <a:lstStyle/>
+                    <a:p>
+                      <a:r>
+                        <a:rPr sz="1000" b="0">
+                          <a:solidFill>
+                            <a:srgbClr val="1F2A37"/>
+                          </a:solidFill>
+                          <a:latin typeface="Microsoft YaHei"/>
+                        </a:rPr>
+                        <a:t>0.99998；108 组 → 6 个验证值</a:t>
+                      </a:r>
+                    </a:p>
+                  </a:txBody>
+                  <a:tcPr marL="45720" marR="45720" marT="4572" marB="4572"/>
+                </a:tc>
+              </a:tr>
+            </a:tbl>
+          </a:graphicData>
+        </a:graphic>
+      </p:graphicFrame>
+      <p:graphicFrame>
+        <p:nvGraphicFramePr>
+          <p:cNvPr id="6" name="Table 5"/>
+          <p:cNvGraphicFramePr>
+            <a:graphicFrameLocks noGrp="1"/>
+          </p:cNvGraphicFramePr>
+          <p:nvPr/>
+        </p:nvGraphicFramePr>
+        <p:xfrm>
+          <a:off x="6355079" y="1417320"/>
+          <a:ext cx="5532120" cy="2834640"/>
+        </p:xfrm>
+        <a:graphic>
+          <a:graphicData uri="http://schemas.openxmlformats.org/drawingml/2006/table">
+            <a:tbl>
+              <a:tblPr firstRow="1" bandRow="1">
+                <a:tableStyleId>{5C22544A-7EE6-4342-B048-85BDC9FD1C3A}</a:tableStyleId>
+              </a:tblPr>
+              <a:tblGrid>
+                <a:gridCol w="2331720"/>
+                <a:gridCol w="3200400"/>
+              </a:tblGrid>
+              <a:tr h="283464">
+                <a:tc>
+                  <a:txBody>
+                    <a:bodyPr/>
+                    <a:lstStyle/>
+                    <a:p>
+                      <a:r>
+                        <a:rPr sz="1050" b="1">
+                          <a:solidFill>
+                            <a:srgbClr val="1F2A37"/>
+                          </a:solidFill>
+                          <a:latin typeface="Microsoft YaHei"/>
+                        </a:rPr>
+                        <a:t>项目</a:t>
+                      </a:r>
+                    </a:p>
+                  </a:txBody>
+                  <a:tcPr marL="45720" marR="45720" marT="4572" marB="4572"/>
+                </a:tc>
+                <a:tc>
+                  <a:txBody>
+                    <a:bodyPr/>
+                    <a:lstStyle/>
+                    <a:p>
+                      <a:r>
+                        <a:rPr sz="1050" b="1">
+                          <a:solidFill>
+                            <a:srgbClr val="1F2A37"/>
+                          </a:solidFill>
+                          <a:latin typeface="Microsoft YaHei"/>
+                        </a:rPr>
+                        <a:t>数值</a:t>
+                      </a:r>
+                    </a:p>
+                  </a:txBody>
+                  <a:tcPr marL="45720" marR="45720" marT="4572" marB="4572"/>
+                </a:tc>
+              </a:tr>
+              <a:tr h="283464">
+                <a:tc>
+                  <a:txBody>
+                    <a:bodyPr/>
+                    <a:lstStyle/>
+                    <a:p>
+                      <a:r>
+                        <a:rPr sz="1000" b="0">
+                          <a:solidFill>
+                            <a:srgbClr val="1F2A37"/>
+                          </a:solidFill>
+                          <a:latin typeface="Microsoft YaHei"/>
+                        </a:rPr>
+                        <a:t>稀释算式（全语料）</a:t>
+                      </a:r>
+                    </a:p>
+                  </a:txBody>
+                  <a:tcPr marL="45720" marR="45720" marT="4572" marB="4572"/>
+                </a:tc>
+                <a:tc>
+                  <a:txBody>
+                    <a:bodyPr/>
+                    <a:lstStyle/>
+                    <a:p>
+                      <a:r>
+                        <a:rPr sz="1000" b="0">
+                          <a:solidFill>
+                            <a:srgbClr val="1F2A37"/>
+                          </a:solidFill>
+                          <a:latin typeface="Microsoft YaHei"/>
+                        </a:rPr>
+                        <a:t>0.021397 ÷ 4 = 0.005349 ≈ -0.005533</a:t>
+                      </a:r>
+                    </a:p>
+                  </a:txBody>
+                  <a:tcPr marL="45720" marR="45720" marT="4572" marB="4572"/>
+                </a:tc>
+              </a:tr>
+              <a:tr h="283464">
+                <a:tc>
+                  <a:txBody>
+                    <a:bodyPr/>
+                    <a:lstStyle/>
+                    <a:p>
+                      <a:r>
+                        <a:rPr sz="1000" b="0">
+                          <a:solidFill>
+                            <a:srgbClr val="1F2A37"/>
+                          </a:solidFill>
+                          <a:latin typeface="Microsoft YaHei"/>
+                        </a:rPr>
+                        <a:t>多样性回归</a:t>
+                      </a:r>
+                    </a:p>
+                  </a:txBody>
+                  <a:tcPr marL="45720" marR="45720" marT="4572" marB="4572"/>
+                </a:tc>
+                <a:tc>
+                  <a:txBody>
+                    <a:bodyPr/>
+                    <a:lstStyle/>
+                    <a:p>
+                      <a:r>
+                        <a:rPr sz="1000" b="0">
+                          <a:solidFill>
+                            <a:srgbClr val="1F2A37"/>
+                          </a:solidFill>
+                          <a:latin typeface="Microsoft YaHei"/>
+                        </a:rPr>
+                        <a:t>斜率 0.0646，r = 0.749</a:t>
+                      </a:r>
+                    </a:p>
+                  </a:txBody>
+                  <a:tcPr marL="45720" marR="45720" marT="4572" marB="4572"/>
+                </a:tc>
+              </a:tr>
+              <a:tr h="283464">
+                <a:tc>
+                  <a:txBody>
+                    <a:bodyPr/>
+                    <a:lstStyle/>
+                    <a:p>
+                      <a:r>
+                        <a:rPr sz="1000" b="0">
+                          <a:solidFill>
+                            <a:srgbClr val="1F2A37"/>
+                          </a:solidFill>
+                          <a:latin typeface="Microsoft YaHei"/>
+                        </a:rPr>
+                        <a:t>类别先验 / 去重顺序</a:t>
+                      </a:r>
+                    </a:p>
+                  </a:txBody>
+                  <a:tcPr marL="45720" marR="45720" marT="4572" marB="4572"/>
+                </a:tc>
+                <a:tc>
+                  <a:txBody>
+                    <a:bodyPr/>
+                    <a:lstStyle/>
+                    <a:p>
+                      <a:r>
+                        <a:rPr sz="1000" b="0">
+                          <a:solidFill>
+                            <a:srgbClr val="1F2A37"/>
+                          </a:solidFill>
+                          <a:latin typeface="Microsoft YaHei"/>
+                        </a:rPr>
+                        <a:t>0.0725 / ≤0.0060</a:t>
+                      </a:r>
+                    </a:p>
+                  </a:txBody>
+                  <a:tcPr marL="45720" marR="45720" marT="4572" marB="4572"/>
+                </a:tc>
+              </a:tr>
+              <a:tr h="283464">
+                <a:tc>
+                  <a:txBody>
+                    <a:bodyPr/>
+                    <a:lstStyle/>
+                    <a:p>
+                      <a:r>
+                        <a:rPr sz="1000" b="0">
+                          <a:solidFill>
+                            <a:srgbClr val="1F2A37"/>
+                          </a:solidFill>
+                          <a:latin typeface="Microsoft YaHei"/>
+                        </a:rPr>
+                        <a:t>训练代价</a:t>
+                      </a:r>
+                    </a:p>
+                  </a:txBody>
+                  <a:tcPr marL="45720" marR="45720" marT="4572" marB="4572"/>
+                </a:tc>
+                <a:tc>
+                  <a:txBody>
+                    <a:bodyPr/>
+                    <a:lstStyle/>
+                    <a:p>
+                      <a:r>
+                        <a:rPr sz="1000" b="0">
+                          <a:solidFill>
+                            <a:srgbClr val="1F2A37"/>
+                          </a:solidFill>
+                          <a:latin typeface="Microsoft YaHei"/>
+                        </a:rPr>
+                        <a:t>截断约 80 倍；全语料 175 倍；体积 4.1 倍</a:t>
+                      </a:r>
+                    </a:p>
+                  </a:txBody>
+                  <a:tcPr marL="45720" marR="45720" marT="4572" marB="4572"/>
+                </a:tc>
+              </a:tr>
+              <a:tr h="283464">
+                <a:tc>
+                  <a:txBody>
+                    <a:bodyPr/>
+                    <a:lstStyle/>
+                    <a:p>
+                      <a:r>
+                        <a:rPr sz="1000" b="0">
+                          <a:solidFill>
+                            <a:srgbClr val="1F2A37"/>
+                          </a:solidFill>
+                          <a:latin typeface="Microsoft YaHei"/>
+                        </a:rPr>
+                        <a:t>吞吐（条件 / 等权）</a:t>
+                      </a:r>
+                    </a:p>
+                  </a:txBody>
+                  <a:tcPr marL="45720" marR="45720" marT="4572" marB="4572"/>
+                </a:tc>
+                <a:tc>
+                  <a:txBody>
+                    <a:bodyPr/>
+                    <a:lstStyle/>
+                    <a:p>
+                      <a:r>
+                        <a:rPr sz="1000" b="0">
+                          <a:solidFill>
+                            <a:srgbClr val="1F2A37"/>
+                          </a:solidFill>
+                          <a:latin typeface="Microsoft YaHei"/>
+                        </a:rPr>
+                        <a:t>43,064 对 200,276 行/秒</a:t>
+                      </a:r>
+                    </a:p>
+                  </a:txBody>
+                  <a:tcPr marL="45720" marR="45720" marT="4572" marB="4572"/>
+                </a:tc>
+              </a:tr>
+              <a:tr h="283464">
+                <a:tc>
+                  <a:txBody>
+                    <a:bodyPr/>
+                    <a:lstStyle/>
+                    <a:p>
+                      <a:r>
+                        <a:rPr sz="1000" b="0">
+                          <a:solidFill>
+                            <a:srgbClr val="1F2A37"/>
+                          </a:solidFill>
+                          <a:latin typeface="Microsoft YaHei"/>
+                        </a:rPr>
+                        <a:t>代价敏感 NEC（1 → 100）</a:t>
+                      </a:r>
+                    </a:p>
+                  </a:txBody>
+                  <a:tcPr marL="45720" marR="45720" marT="4572" marB="4572"/>
+                </a:tc>
+                <a:tc>
+                  <a:txBody>
+                    <a:bodyPr/>
+                    <a:lstStyle/>
+                    <a:p>
+                      <a:r>
+                        <a:rPr sz="1000" b="0">
+                          <a:solidFill>
+                            <a:srgbClr val="1F2A37"/>
+                          </a:solidFill>
+                          <a:latin typeface="Microsoft YaHei"/>
+                        </a:rPr>
+                        <a:t>0.00913 → 0.07260（等权 0.00867 → 0.06753）</a:t>
+                      </a:r>
+                    </a:p>
+                  </a:txBody>
+                  <a:tcPr marL="45720" marR="45720" marT="4572" marB="4572"/>
+                </a:tc>
+              </a:tr>
+              <a:tr h="283464">
+                <a:tc>
+                  <a:txBody>
+                    <a:bodyPr/>
+                    <a:lstStyle/>
+                    <a:p>
+                      <a:r>
+                        <a:rPr sz="1000" b="0">
+                          <a:solidFill>
+                            <a:srgbClr val="1F2A37"/>
+                          </a:solidFill>
+                          <a:latin typeface="Microsoft YaHei"/>
+                        </a:rPr>
+                        <a:t>开放集 AUROC / 未知类召回</a:t>
+                      </a:r>
+                    </a:p>
+                  </a:txBody>
+                  <a:tcPr marL="45720" marR="45720" marT="4572" marB="4572"/>
+                </a:tc>
+                <a:tc>
+                  <a:txBody>
+                    <a:bodyPr/>
+                    <a:lstStyle/>
+                    <a:p>
+                      <a:r>
+                        <a:rPr sz="1000" b="0">
+                          <a:solidFill>
+                            <a:srgbClr val="1F2A37"/>
+                          </a:solidFill>
+                          <a:latin typeface="Microsoft YaHei"/>
+                        </a:rPr>
+                        <a:t>0.644–0.694；0.0015–0.0396</a:t>
+                      </a:r>
+                    </a:p>
+                  </a:txBody>
+                  <a:tcPr marL="45720" marR="45720" marT="4572" marB="4572"/>
+                </a:tc>
+              </a:tr>
+              <a:tr h="283464">
+                <a:tc>
+                  <a:txBody>
+                    <a:bodyPr/>
+                    <a:lstStyle/>
+                    <a:p>
+                      <a:r>
+                        <a:rPr sz="1000" b="0">
+                          <a:solidFill>
+                            <a:srgbClr val="1F2A37"/>
+                          </a:solidFill>
+                          <a:latin typeface="Microsoft YaHei"/>
+                        </a:rPr>
+                        <a:t>外部基准 Macro-F1</a:t>
+                      </a:r>
+                    </a:p>
+                  </a:txBody>
+                  <a:tcPr marL="45720" marR="45720" marT="4572" marB="4572"/>
+                </a:tc>
+                <a:tc>
+                  <a:txBody>
+                    <a:bodyPr/>
+                    <a:lstStyle/>
+                    <a:p>
+                      <a:r>
+                        <a:rPr sz="1000" b="0">
+                          <a:solidFill>
+                            <a:srgbClr val="1F2A37"/>
+                          </a:solidFill>
+                          <a:latin typeface="Microsoft YaHei"/>
+                        </a:rPr>
+                        <a:t>NSL 0.514697；UNSW 0.493310；N-BaIoT 0.999988</a:t>
+                      </a:r>
+                    </a:p>
+                  </a:txBody>
+                  <a:tcPr marL="45720" marR="45720" marT="4572" marB="4572"/>
+                </a:tc>
+              </a:tr>
+              <a:tr h="283464">
+                <a:tc>
+                  <a:txBody>
+                    <a:bodyPr/>
+                    <a:lstStyle/>
+                    <a:p>
+                      <a:r>
+                        <a:rPr sz="1000" b="0">
+                          <a:solidFill>
+                            <a:srgbClr val="1F2A37"/>
+                          </a:solidFill>
+                          <a:latin typeface="Microsoft YaHei"/>
+                        </a:rPr>
+                        <a:t>文件级外推范围</a:t>
+                      </a:r>
+                    </a:p>
+                  </a:txBody>
+                  <a:tcPr marL="45720" marR="45720" marT="4572" marB="4572"/>
+                </a:tc>
+                <a:tc>
+                  <a:txBody>
+                    <a:bodyPr/>
+                    <a:lstStyle/>
+                    <a:p>
+                      <a:r>
+                        <a:rPr sz="1000" b="0">
+                          <a:solidFill>
+                            <a:srgbClr val="1F2A37"/>
+                          </a:solidFill>
+                          <a:latin typeface="Microsoft YaHei"/>
+                        </a:rPr>
+                        <a:t>0.3325–0.9997</a:t>
+                      </a:r>
+                    </a:p>
+                  </a:txBody>
+                  <a:tcPr marL="45720" marR="45720" marT="4572" marB="4572"/>
+                </a:tc>
+              </a:tr>
+            </a:tbl>
+          </a:graphicData>
+        </a:graphic>
+      </p:graphicFrame>
+      <p:sp>
+        <p:nvSpPr>
+          <p:cNvPr id="7" name="TextBox 6"/>
+          <p:cNvSpPr txBox="1"/>
+          <p:nvPr/>
+        </p:nvSpPr>
+        <p:spPr>
+          <a:xfrm>
+            <a:off x="548640" y="6400800"/>
+            <a:ext cx="8229600" cy="274320"/>
+          </a:xfrm>
+          <a:prstGeom prst="rect">
+            <a:avLst/>
+          </a:prstGeom>
+          <a:noFill/>
+        </p:spPr>
+        <p:txBody>
+          <a:bodyPr wrap="square">
+            <a:spAutoFit/>
+          </a:bodyPr>
+          <a:lstStyle/>
+          <a:p>
+            <a:pPr algn="l">
+              <a:lnSpc>
+                <a:spcPct val="115000"/>
+              </a:lnSpc>
+            </a:pPr>
+            <a:r>
+              <a:rPr sz="1000" b="0">
+                <a:solidFill>
+                  <a:srgbClr val="6B7280"/>
+                </a:solidFill>
+                <a:latin typeface="Microsoft YaHei"/>
+              </a:rPr>
+              <a:t>泄漏受控的条件集成加权研究 · v1.11.0 · 数字均取自发布产物</a:t>
+            </a:r>
+          </a:p>
+        </p:txBody>
+      </p:sp>
+      <p:sp>
+        <p:nvSpPr>
+          <p:cNvPr id="8" name="TextBox 7"/>
+          <p:cNvSpPr txBox="1"/>
+          <p:nvPr/>
+        </p:nvSpPr>
+        <p:spPr>
+          <a:xfrm>
+            <a:off x="11155680" y="6400800"/>
+            <a:ext cx="548640" cy="274320"/>
+          </a:xfrm>
+          <a:prstGeom prst="rect">
+            <a:avLst/>
+          </a:prstGeom>
+          <a:noFill/>
+        </p:spPr>
+        <p:txBody>
+          <a:bodyPr wrap="square">
+            <a:spAutoFit/>
+          </a:bodyPr>
+          <a:lstStyle/>
+          <a:p>
+            <a:pPr algn="r">
+              <a:lnSpc>
+                <a:spcPct val="115000"/>
+              </a:lnSpc>
+            </a:pPr>
+            <a:r>
+              <a:rPr sz="1000" b="0">
+                <a:solidFill>
+                  <a:srgbClr val="6B7280"/>
+                </a:solidFill>
+                <a:latin typeface="Microsoft YaHei"/>
+              </a:rPr>
+              <a:t>11</a:t>
+            </a:r>
+          </a:p>
+        </p:txBody>
+      </p:sp>
+    </p:spTree>
+  </p:cSld>
+  <p:clrMapOvr>
+    <a:masterClrMapping/>
+  </p:clrMapOvr>
+</p:sld>
+</file>
+
+<file path=ppt/slides/slide12.xml><?xml version="1.0" encoding="utf-8"?>
+<p:sld xmlns:a="http://schemas.openxmlformats.org/drawingml/2006/main" xmlns:p="http://schemas.openxmlformats.org/presentationml/2006/main" xmlns:r="http://schemas.openxmlformats.org/officeDocument/2006/relationships">
+  <p:cSld>
+    <p:spTree>
+      <p:nvGrpSpPr>
+        <p:cNvPr id="1" name=""/>
+        <p:cNvGrpSpPr/>
+        <p:nvPr/>
+      </p:nvGrpSpPr>
+      <p:grpSpPr/>
+      <p:sp>
+        <p:nvSpPr>
+          <p:cNvPr id="2" name="TextBox 1"/>
+          <p:cNvSpPr txBox="1"/>
+          <p:nvPr/>
+        </p:nvSpPr>
+        <p:spPr>
+          <a:xfrm>
+            <a:off x="548640" y="347472"/>
+            <a:ext cx="10972800" cy="310896"/>
+          </a:xfrm>
+          <a:prstGeom prst="rect">
+            <a:avLst/>
+          </a:prstGeom>
+          <a:noFill/>
+        </p:spPr>
+        <p:txBody>
+          <a:bodyPr wrap="square">
+            <a:spAutoFit/>
+          </a:bodyPr>
+          <a:lstStyle/>
+          <a:p>
+            <a:pPr algn="l">
+              <a:lnSpc>
+                <a:spcPct val="115000"/>
+              </a:lnSpc>
+            </a:pPr>
+            <a:r>
+              <a:rPr sz="1200" b="1">
+                <a:solidFill>
+                  <a:srgbClr val="1F6FEB"/>
+                </a:solidFill>
+                <a:latin typeface="Microsoft YaHei"/>
+              </a:rPr>
+              <a:t>被问「能复现吗」时翻到这页</a:t>
+            </a:r>
+          </a:p>
+        </p:txBody>
+      </p:sp>
+      <p:sp>
+        <p:nvSpPr>
+          <p:cNvPr id="3" name="TextBox 2"/>
+          <p:cNvSpPr txBox="1"/>
+          <p:nvPr/>
+        </p:nvSpPr>
+        <p:spPr>
+          <a:xfrm>
+            <a:off x="548640" y="694944"/>
+            <a:ext cx="11064240" cy="731520"/>
+          </a:xfrm>
+          <a:prstGeom prst="rect">
+            <a:avLst/>
+          </a:prstGeom>
+          <a:noFill/>
+        </p:spPr>
+        <p:txBody>
+          <a:bodyPr wrap="square">
+            <a:spAutoFit/>
+          </a:bodyPr>
+          <a:lstStyle/>
+          <a:p>
+            <a:pPr algn="l">
+              <a:lnSpc>
+                <a:spcPct val="115000"/>
+              </a:lnSpc>
+            </a:pPr>
+            <a:r>
+              <a:rPr sz="2600" b="1">
+                <a:solidFill>
+                  <a:srgbClr val="1F2A37"/>
+                </a:solidFill>
+                <a:latin typeface="Microsoft YaHei"/>
+              </a:rPr>
+              <a:t>复现与验证（备用页）</a:t>
+            </a:r>
+          </a:p>
+        </p:txBody>
+      </p:sp>
+      <p:sp>
+        <p:nvSpPr>
+          <p:cNvPr id="4" name="Rectangle 3"/>
+          <p:cNvSpPr/>
+          <p:nvPr/>
+        </p:nvSpPr>
+        <p:spPr>
+          <a:xfrm>
+            <a:off x="548640" y="1463040"/>
+            <a:ext cx="11064240" cy="15240"/>
+          </a:xfrm>
+          <a:prstGeom prst="rect">
+            <a:avLst/>
+          </a:prstGeom>
+          <a:solidFill>
+            <a:srgbClr val="D1D5DB"/>
+          </a:solidFill>
+          <a:ln>
+            <a:noFill/>
+          </a:ln>
+          <a:effectLst/>
+        </p:spPr>
+        <p:style>
+          <a:lnRef idx="1">
+            <a:schemeClr val="accent1"/>
+          </a:lnRef>
+          <a:fillRef idx="3">
+            <a:schemeClr val="accent1"/>
+          </a:fillRef>
+          <a:effectRef idx="2">
+            <a:schemeClr val="accent1"/>
+          </a:effectRef>
+          <a:fontRef idx="minor">
+            <a:schemeClr val="lt1"/>
+          </a:fontRef>
+        </p:style>
+        <p:txBody>
+          <a:bodyPr rtlCol="0" anchor="ctr"/>
+          <a:lstStyle/>
+          <a:p>
+            <a:pPr algn="ctr"/>
+          </a:p>
+        </p:txBody>
+      </p:sp>
+      <p:sp>
+        <p:nvSpPr>
+          <p:cNvPr id="5" name="Rectangle 4"/>
+          <p:cNvSpPr/>
+          <p:nvPr/>
+        </p:nvSpPr>
+        <p:spPr>
+          <a:xfrm>
+            <a:off x="548640" y="1737360"/>
+            <a:ext cx="7223760" cy="2926080"/>
+          </a:xfrm>
+          <a:prstGeom prst="rect">
+            <a:avLst/>
+          </a:prstGeom>
+          <a:solidFill>
+            <a:srgbClr val="F3F5F7"/>
+          </a:solidFill>
+          <a:ln>
+            <a:solidFill>
+              <a:srgbClr val="F3F5F7"/>
+            </a:solidFill>
+          </a:ln>
+          <a:effectLst/>
+        </p:spPr>
+        <p:style>
+          <a:lnRef idx="1">
+            <a:schemeClr val="accent1"/>
+          </a:lnRef>
+          <a:fillRef idx="3">
+            <a:schemeClr val="accent1"/>
+          </a:fillRef>
+          <a:effectRef idx="2">
+            <a:schemeClr val="accent1"/>
+          </a:effectRef>
+          <a:fontRef idx="minor">
+            <a:schemeClr val="lt1"/>
+          </a:fontRef>
+        </p:style>
+        <p:txBody>
+          <a:bodyPr rtlCol="0" anchor="ctr"/>
+          <a:lstStyle/>
+          <a:p>
+            <a:pPr algn="ctr"/>
+          </a:p>
+        </p:txBody>
+      </p:sp>
+      <p:sp>
+        <p:nvSpPr>
+          <p:cNvPr id="6" name="TextBox 5"/>
+          <p:cNvSpPr txBox="1"/>
+          <p:nvPr/>
+        </p:nvSpPr>
+        <p:spPr>
+          <a:xfrm>
+            <a:off x="822960" y="1920240"/>
+            <a:ext cx="6675120" cy="2651760"/>
+          </a:xfrm>
+          <a:prstGeom prst="rect">
+            <a:avLst/>
+          </a:prstGeom>
+          <a:noFill/>
+        </p:spPr>
+        <p:txBody>
+          <a:bodyPr wrap="square">
+            <a:spAutoFit/>
+          </a:bodyPr>
+          <a:lstStyle/>
+          <a:p>
+            <a:pPr algn="l">
+              <a:lnSpc>
+                <a:spcPct val="135000"/>
+              </a:lnSpc>
+            </a:pPr>
+            <a:r>
+              <a:rPr sz="1300" b="0">
+                <a:solidFill>
+                  <a:srgbClr val="1F2A37"/>
+                </a:solidFill>
+                <a:latin typeface="Microsoft YaHei"/>
+              </a:rPr>
+              <a:t>四条命令即可从原始语料走到投稿包：</a:t>
+            </a:r>
+          </a:p>
+          <a:p>
+            <a:pPr algn="l">
+              <a:lnSpc>
+                <a:spcPct val="135000"/>
+              </a:lnSpc>
+            </a:pPr>
+            <a:r>
+              <a:rPr sz="1300" b="0">
+                <a:solidFill>
+                  <a:srgbClr val="1F2A37"/>
+                </a:solidFill>
+                <a:latin typeface="Microsoft YaHei"/>
+              </a:rPr>
+              <a:t>① scripts/audit_data_processing_v1.py（六阶段计数与产物）</a:t>
+            </a:r>
+          </a:p>
+          <a:p>
+            <a:pPr algn="l">
+              <a:lnSpc>
+                <a:spcPct val="135000"/>
+              </a:lnSpc>
+            </a:pPr>
+            <a:r>
+              <a:rPr sz="1300" b="0">
+                <a:solidFill>
+                  <a:srgbClr val="1F2A37"/>
+                </a:solidFill>
+                <a:latin typeface="Microsoft YaHei"/>
+              </a:rPr>
+              <a:t>② scripts/run_seeds10_v5.py（十种子主实验）</a:t>
+            </a:r>
+          </a:p>
+          <a:p>
+            <a:pPr algn="l">
+              <a:lnSpc>
+                <a:spcPct val="135000"/>
+              </a:lnSpc>
+            </a:pPr>
+            <a:r>
+              <a:rPr sz="1300" b="0">
+                <a:solidFill>
+                  <a:srgbClr val="1F2A37"/>
+                </a:solidFill>
+                <a:latin typeface="Microsoft YaHei"/>
+              </a:rPr>
+              <a:t>③ scripts/audit_released_evidence_v1.py（从逐样本预测重算全部指标）</a:t>
+            </a:r>
+          </a:p>
+          <a:p>
+            <a:pPr algn="l">
+              <a:lnSpc>
+                <a:spcPct val="135000"/>
+              </a:lnSpc>
+            </a:pPr>
+            <a:r>
+              <a:rPr sz="1300" b="0">
+                <a:solidFill>
+                  <a:srgbClr val="1F2A37"/>
+                </a:solidFill>
+                <a:latin typeface="Microsoft YaHei"/>
+              </a:rPr>
+              <a:t>④ scripts/package_submission_bundle_v18.py（重建投稿包）</a:t>
+            </a:r>
+          </a:p>
+          <a:p>
+            <a:pPr algn="l">
+              <a:lnSpc>
+                <a:spcPct val="135000"/>
+              </a:lnSpc>
+            </a:pPr>
+          </a:p>
+          <a:p>
+            <a:pPr algn="l">
+              <a:lnSpc>
+                <a:spcPct val="135000"/>
+              </a:lnSpc>
+            </a:pPr>
+            <a:r>
+              <a:rPr sz="1300" b="0">
+                <a:solidFill>
+                  <a:srgbClr val="1F2A37"/>
+                </a:solidFill>
+                <a:latin typeface="Microsoft YaHei"/>
+              </a:rPr>
+              <a:t>仓库：v1.11.0 标签 · 逐样本预测 722 个 · 补充材料 S01–S30 · 投稿包 154 个文件</a:t>
+            </a:r>
+          </a:p>
+        </p:txBody>
+      </p:sp>
+      <p:sp>
+        <p:nvSpPr>
+          <p:cNvPr id="7" name="Rectangle 6"/>
+          <p:cNvSpPr/>
+          <p:nvPr/>
+        </p:nvSpPr>
+        <p:spPr>
+          <a:xfrm>
+            <a:off x="8092440" y="1737360"/>
+            <a:ext cx="3566160" cy="2926080"/>
+          </a:xfrm>
+          <a:prstGeom prst="rect">
+            <a:avLst/>
+          </a:prstGeom>
+          <a:solidFill>
+            <a:srgbClr val="F3F5F7"/>
+          </a:solidFill>
+          <a:ln>
+            <a:solidFill>
+              <a:srgbClr val="F3F5F7"/>
+            </a:solidFill>
+          </a:ln>
+          <a:effectLst/>
+        </p:spPr>
+        <p:style>
+          <a:lnRef idx="1">
+            <a:schemeClr val="accent1"/>
+          </a:lnRef>
+          <a:fillRef idx="3">
+            <a:schemeClr val="accent1"/>
+          </a:fillRef>
+          <a:effectRef idx="2">
+            <a:schemeClr val="accent1"/>
+          </a:effectRef>
+          <a:fontRef idx="minor">
+            <a:schemeClr val="lt1"/>
+          </a:fontRef>
+        </p:style>
+        <p:txBody>
+          <a:bodyPr rtlCol="0" anchor="ctr"/>
+          <a:lstStyle/>
+          <a:p>
+            <a:pPr algn="ctr"/>
+          </a:p>
+        </p:txBody>
+      </p:sp>
+      <p:sp>
+        <p:nvSpPr>
+          <p:cNvPr id="8" name="TextBox 7"/>
+          <p:cNvSpPr txBox="1"/>
+          <p:nvPr/>
+        </p:nvSpPr>
+        <p:spPr>
+          <a:xfrm>
+            <a:off x="8321040" y="1920240"/>
+            <a:ext cx="3108960" cy="2651760"/>
+          </a:xfrm>
+          <a:prstGeom prst="rect">
+            <a:avLst/>
+          </a:prstGeom>
+          <a:noFill/>
+        </p:spPr>
+        <p:txBody>
+          <a:bodyPr wrap="square">
+            <a:spAutoFit/>
+          </a:bodyPr>
+          <a:lstStyle/>
+          <a:p>
+            <a:pPr algn="l">
+              <a:lnSpc>
+                <a:spcPct val="130000"/>
+              </a:lnSpc>
+            </a:pPr>
+            <a:r>
+              <a:rPr sz="1300" b="0">
+                <a:solidFill>
+                  <a:srgbClr val="1F2A37"/>
+                </a:solidFill>
+                <a:latin typeface="Microsoft YaHei"/>
+              </a:rPr>
+              <a:t>49 项自动检查覆盖四类风险：</a:t>
+            </a:r>
+          </a:p>
+          <a:p>
+            <a:pPr algn="l">
+              <a:lnSpc>
+                <a:spcPct val="130000"/>
+              </a:lnSpc>
+            </a:pPr>
+          </a:p>
+          <a:p>
+            <a:pPr algn="l">
+              <a:lnSpc>
+                <a:spcPct val="130000"/>
+              </a:lnSpc>
+            </a:pPr>
+            <a:r>
+              <a:rPr sz="1300" b="0">
+                <a:solidFill>
+                  <a:srgbClr val="1F2A37"/>
+                </a:solidFill>
+                <a:latin typeface="Microsoft YaHei"/>
+              </a:rPr>
+              <a:t>· 数字是否与产物一致</a:t>
+            </a:r>
+          </a:p>
+          <a:p>
+            <a:pPr algn="l">
+              <a:lnSpc>
+                <a:spcPct val="130000"/>
+              </a:lnSpc>
+            </a:pPr>
+            <a:r>
+              <a:rPr sz="1300" b="0">
+                <a:solidFill>
+                  <a:srgbClr val="1F2A37"/>
+                </a:solidFill>
+                <a:latin typeface="Microsoft YaHei"/>
+              </a:rPr>
+              <a:t>· 结构（章节、图表、公式引用）</a:t>
+            </a:r>
+          </a:p>
+          <a:p>
+            <a:pPr algn="l">
+              <a:lnSpc>
+                <a:spcPct val="130000"/>
+              </a:lnSpc>
+            </a:pPr>
+            <a:r>
+              <a:rPr sz="1300" b="0">
+                <a:solidFill>
+                  <a:srgbClr val="1F2A37"/>
+                </a:solidFill>
+                <a:latin typeface="Microsoft YaHei"/>
+              </a:rPr>
+              <a:t>· 可复现（图逐字节重绘、代码编译）</a:t>
+            </a:r>
+          </a:p>
+          <a:p>
+            <a:pPr algn="l">
+              <a:lnSpc>
+                <a:spcPct val="130000"/>
+              </a:lnSpc>
+            </a:pPr>
+            <a:r>
+              <a:rPr sz="1300" b="0">
+                <a:solidFill>
+                  <a:srgbClr val="1F2A37"/>
+                </a:solidFill>
+                <a:latin typeface="Microsoft YaHei"/>
+              </a:rPr>
+              <a:t>· 真实性（数据集 SHA-256、行数）</a:t>
+            </a:r>
+          </a:p>
+          <a:p>
+            <a:pPr algn="l">
+              <a:lnSpc>
+                <a:spcPct val="130000"/>
+              </a:lnSpc>
+            </a:pPr>
+          </a:p>
+          <a:p>
+            <a:pPr algn="l">
+              <a:lnSpc>
+                <a:spcPct val="130000"/>
+              </a:lnSpc>
+            </a:pPr>
+            <a:r>
+              <a:rPr sz="1300" b="0">
+                <a:solidFill>
+                  <a:srgbClr val="1F2A37"/>
+                </a:solidFill>
+                <a:latin typeface="Microsoft YaHei"/>
+              </a:rPr>
+              <a:t>每次提交前全绿才推送。</a:t>
+            </a:r>
+          </a:p>
+        </p:txBody>
+      </p:sp>
+      <p:sp>
+        <p:nvSpPr>
+          <p:cNvPr id="9" name="TextBox 8"/>
+          <p:cNvSpPr txBox="1"/>
+          <p:nvPr/>
+        </p:nvSpPr>
+        <p:spPr>
+          <a:xfrm>
+            <a:off x="548640" y="4937760"/>
+            <a:ext cx="10972800" cy="1188720"/>
+          </a:xfrm>
+          <a:prstGeom prst="rect">
+            <a:avLst/>
+          </a:prstGeom>
+          <a:noFill/>
+        </p:spPr>
+        <p:txBody>
+          <a:bodyPr wrap="square">
+            <a:spAutoFit/>
+          </a:bodyPr>
+          <a:lstStyle/>
+          <a:p>
+            <a:pPr algn="l">
+              <a:lnSpc>
+                <a:spcPct val="130000"/>
+              </a:lnSpc>
+            </a:pPr>
+            <a:r>
+              <a:rPr sz="1200" b="0">
+                <a:solidFill>
+                  <a:srgbClr val="6B7280"/>
+                </a:solidFill>
+                <a:latin typeface="Microsoft YaHei"/>
+              </a:rPr>
+              <a:t>证据入口：数据与资料来源总表（URL/日期/许可/SHA-256）· 论文自查表（69 项逐条证据位置）· 数据处理代码与流程（六阶段与代码片段）· 公式来源与核验（五个公式的出处与复算）· 项目流程图（六阶段总览）。</a:t>
+            </a:r>
+          </a:p>
+        </p:txBody>
+      </p:sp>
+      <p:sp>
+        <p:nvSpPr>
+          <p:cNvPr id="10" name="TextBox 9"/>
+          <p:cNvSpPr txBox="1"/>
+          <p:nvPr/>
+        </p:nvSpPr>
+        <p:spPr>
+          <a:xfrm>
+            <a:off x="548640" y="6400800"/>
+            <a:ext cx="8229600" cy="274320"/>
+          </a:xfrm>
+          <a:prstGeom prst="rect">
+            <a:avLst/>
+          </a:prstGeom>
+          <a:noFill/>
+        </p:spPr>
+        <p:txBody>
+          <a:bodyPr wrap="square">
+            <a:spAutoFit/>
+          </a:bodyPr>
+          <a:lstStyle/>
+          <a:p>
+            <a:pPr algn="l">
+              <a:lnSpc>
+                <a:spcPct val="115000"/>
+              </a:lnSpc>
+            </a:pPr>
+            <a:r>
+              <a:rPr sz="1000" b="0">
+                <a:solidFill>
+                  <a:srgbClr val="6B7280"/>
+                </a:solidFill>
+                <a:latin typeface="Microsoft YaHei"/>
+              </a:rPr>
+              <a:t>泄漏受控的条件集成加权研究 · v1.11.0 · 数字均取自发布产物</a:t>
+            </a:r>
+          </a:p>
+        </p:txBody>
+      </p:sp>
+      <p:sp>
+        <p:nvSpPr>
+          <p:cNvPr id="11" name="TextBox 10"/>
+          <p:cNvSpPr txBox="1"/>
+          <p:nvPr/>
+        </p:nvSpPr>
+        <p:spPr>
+          <a:xfrm>
+            <a:off x="11155680" y="6400800"/>
+            <a:ext cx="548640" cy="274320"/>
+          </a:xfrm>
+          <a:prstGeom prst="rect">
+            <a:avLst/>
+          </a:prstGeom>
+          <a:noFill/>
+        </p:spPr>
+        <p:txBody>
+          <a:bodyPr wrap="square">
+            <a:spAutoFit/>
+          </a:bodyPr>
+          <a:lstStyle/>
+          <a:p>
+            <a:pPr algn="r">
+              <a:lnSpc>
+                <a:spcPct val="115000"/>
+              </a:lnSpc>
+            </a:pPr>
+            <a:r>
+              <a:rPr sz="1000" b="0">
+                <a:solidFill>
+                  <a:srgbClr val="6B7280"/>
+                </a:solidFill>
+                <a:latin typeface="Microsoft YaHei"/>
+              </a:rPr>
+              <a:t>12</a:t>
             </a:r>
           </a:p>
         </p:txBody>
@@ -7775,7 +10250,7 @@
                 </a:solidFill>
                 <a:latin typeface="Microsoft YaHei"/>
               </a:rPr>
-              <a:t>机制</a:t>
+              <a:t>结果 · 统计判据</a:t>
             </a:r>
           </a:p>
         </p:txBody>
@@ -7814,7 +10289,7 @@
                 </a:solidFill>
                 <a:latin typeface="Microsoft YaHei"/>
               </a:rPr>
-              <a:t>权重动不了预测：三条独立证据</a:t>
+              <a:t>「等价」是检验结论，不是「没拒绝原假设」</a:t>
             </a:r>
           </a:p>
         </p:txBody>
@@ -7871,8 +10346,8 @@
         </p:nvSpPr>
         <p:spPr>
           <a:xfrm>
-            <a:off x="548640" y="1783080"/>
-            <a:ext cx="2194560" cy="365760"/>
+            <a:off x="548640" y="1554480"/>
+            <a:ext cx="3108960" cy="365760"/>
           </a:xfrm>
           <a:prstGeom prst="rect">
             <a:avLst/>
@@ -7891,13 +10366,13 @@
               </a:lnSpc>
             </a:pPr>
             <a:r>
-              <a:rPr sz="1500" b="1">
-                <a:solidFill>
-                  <a:srgbClr val="1F6FEB"/>
-                </a:solidFill>
-                <a:latin typeface="Microsoft YaHei"/>
-              </a:rPr>
-              <a:t>逐行可计算上界</a:t>
+              <a:rPr sz="1300" b="1">
+                <a:solidFill>
+                  <a:srgbClr val="6B7280"/>
+                </a:solidFill>
+                <a:latin typeface="Microsoft YaHei"/>
+              </a:rPr>
+              <a:t>逐种子方向</a:t>
             </a:r>
           </a:p>
         </p:txBody>
@@ -7910,8 +10385,8 @@
         </p:nvSpPr>
         <p:spPr>
           <a:xfrm>
-            <a:off x="2834640" y="1737360"/>
-            <a:ext cx="4754880" cy="411480"/>
+            <a:off x="3840480" y="1527048"/>
+            <a:ext cx="3840480" cy="411480"/>
           </a:xfrm>
           <a:prstGeom prst="rect">
             <a:avLst/>
@@ -7930,13 +10405,13 @@
               </a:lnSpc>
             </a:pPr>
             <a:r>
-              <a:rPr sz="1500" b="1">
+              <a:rPr sz="1600" b="1">
                 <a:solidFill>
                   <a:srgbClr val="1F2A37"/>
                 </a:solidFill>
                 <a:latin typeface="Microsoft YaHei"/>
               </a:rPr>
-              <a:t>99.91% 的测试行可证明不受权重影响</a:t>
+              <a:t>5 : 5</a:t>
             </a:r>
           </a:p>
         </p:txBody>
@@ -7949,8 +10424,8 @@
         </p:nvSpPr>
         <p:spPr>
           <a:xfrm>
-            <a:off x="2834640" y="2103120"/>
-            <a:ext cx="4754880" cy="365760"/>
+            <a:off x="7863840" y="1554480"/>
+            <a:ext cx="3657600" cy="548640"/>
           </a:xfrm>
           <a:prstGeom prst="rect">
             <a:avLst/>
@@ -7975,7 +10450,7 @@
                 </a:solidFill>
                 <a:latin typeface="Microsoft YaHei"/>
               </a:rPr>
-              <a:t>实际改判 0 行</a:t>
+              <a:t>支持条件加权 : 支持等权，无并列</a:t>
             </a:r>
           </a:p>
         </p:txBody>
@@ -7988,8 +10463,8 @@
         </p:nvSpPr>
         <p:spPr>
           <a:xfrm>
-            <a:off x="548640" y="2651760"/>
-            <a:ext cx="2194560" cy="365760"/>
+            <a:off x="548640" y="2286000"/>
+            <a:ext cx="3108960" cy="365760"/>
           </a:xfrm>
           <a:prstGeom prst="rect">
             <a:avLst/>
@@ -8008,13 +10483,13 @@
               </a:lnSpc>
             </a:pPr>
             <a:r>
-              <a:rPr sz="1500" b="1">
-                <a:solidFill>
-                  <a:srgbClr val="1F6FEB"/>
-                </a:solidFill>
-                <a:latin typeface="Microsoft YaHei"/>
-              </a:rPr>
-              <a:t>权重结构</a:t>
+              <a:rPr sz="1300" b="1">
+                <a:solidFill>
+                  <a:srgbClr val="6B7280"/>
+                </a:solidFill>
+                <a:latin typeface="Microsoft YaHei"/>
+              </a:rPr>
+              <a:t>逐种子 TOST 等价</a:t>
             </a:r>
           </a:p>
         </p:txBody>
@@ -8027,8 +10502,8 @@
         </p:nvSpPr>
         <p:spPr>
           <a:xfrm>
-            <a:off x="2834640" y="2606040"/>
-            <a:ext cx="4754880" cy="411480"/>
+            <a:off x="3840480" y="2258568"/>
+            <a:ext cx="3840480" cy="411480"/>
           </a:xfrm>
           <a:prstGeom prst="rect">
             <a:avLst/>
@@ -8047,13 +10522,13 @@
               </a:lnSpc>
             </a:pPr>
             <a:r>
-              <a:rPr sz="1500" b="1">
+              <a:rPr sz="1600" b="1">
                 <a:solidFill>
                   <a:srgbClr val="1F2A37"/>
                 </a:solidFill>
                 <a:latin typeface="Microsoft YaHei"/>
               </a:rPr>
-              <a:t>归一化权重熵 0.99998</a:t>
+              <a:t>9/10（0.005）· 10/10（0.01）</a:t>
             </a:r>
           </a:p>
         </p:txBody>
@@ -8066,8 +10541,8 @@
         </p:nvSpPr>
         <p:spPr>
           <a:xfrm>
-            <a:off x="2834640" y="2971800"/>
-            <a:ext cx="4754880" cy="365760"/>
+            <a:off x="7863840" y="2286000"/>
+            <a:ext cx="3657600" cy="548640"/>
           </a:xfrm>
           <a:prstGeom prst="rect">
             <a:avLst/>
@@ -8092,7 +10567,7 @@
                 </a:solidFill>
                 <a:latin typeface="Microsoft YaHei"/>
               </a:rPr>
-              <a:t>风险模型输出近乎相同，权重退化为均匀</a:t>
+              <a:t>截断总体十个种子逐一看</a:t>
             </a:r>
           </a:p>
         </p:txBody>
@@ -8105,8 +10580,8 @@
         </p:nvSpPr>
         <p:spPr>
           <a:xfrm>
-            <a:off x="548640" y="3520439"/>
-            <a:ext cx="2194560" cy="365760"/>
+            <a:off x="548640" y="3017520"/>
+            <a:ext cx="3108960" cy="365760"/>
           </a:xfrm>
           <a:prstGeom prst="rect">
             <a:avLst/>
@@ -8125,13 +10600,13 @@
               </a:lnSpc>
             </a:pPr>
             <a:r>
-              <a:rPr sz="1500" b="1">
-                <a:solidFill>
-                  <a:srgbClr val="1F6FEB"/>
-                </a:solidFill>
-                <a:latin typeface="Microsoft YaHei"/>
-              </a:rPr>
-              <a:t>门控搜索</a:t>
+              <a:rPr sz="1300" b="1">
+                <a:solidFill>
+                  <a:srgbClr val="6B7280"/>
+                </a:solidFill>
+                <a:latin typeface="Microsoft YaHei"/>
+              </a:rPr>
+              <a:t>测试行不一致</a:t>
             </a:r>
           </a:p>
         </p:txBody>
@@ -8144,8 +10619,8 @@
         </p:nvSpPr>
         <p:spPr>
           <a:xfrm>
-            <a:off x="2834640" y="3474719"/>
-            <a:ext cx="4754880" cy="411480"/>
+            <a:off x="3840480" y="2990088"/>
+            <a:ext cx="3840480" cy="411480"/>
           </a:xfrm>
           <a:prstGeom prst="rect">
             <a:avLst/>
@@ -8164,13 +10639,13 @@
               </a:lnSpc>
             </a:pPr>
             <a:r>
-              <a:rPr sz="1500" b="1">
+              <a:rPr sz="1600" b="1">
                 <a:solidFill>
                   <a:srgbClr val="1F2A37"/>
                 </a:solidFill>
                 <a:latin typeface="Microsoft YaHei"/>
               </a:rPr>
-              <a:t>108 组超参数配置 → 6 个不同验证值</a:t>
+              <a:t>6–21 行 / 7,986</a:t>
             </a:r>
           </a:p>
         </p:txBody>
@@ -8183,8 +10658,8 @@
         </p:nvSpPr>
         <p:spPr>
           <a:xfrm>
-            <a:off x="2834640" y="3840479"/>
-            <a:ext cx="4754880" cy="365760"/>
+            <a:off x="7863840" y="3017520"/>
+            <a:ext cx="3657600" cy="548640"/>
           </a:xfrm>
           <a:prstGeom prst="rect">
             <a:avLst/>
@@ -8209,67 +10684,21 @@
                 </a:solidFill>
                 <a:latin typeface="Microsoft YaHei"/>
               </a:rPr>
-              <a:t>锁定后在测试集上改判 0 行</a:t>
-            </a:r>
-          </a:p>
-        </p:txBody>
-      </p:sp>
-      <p:sp>
-        <p:nvSpPr>
-          <p:cNvPr id="14" name="Rectangle 13"/>
-          <p:cNvSpPr/>
-          <p:nvPr/>
-        </p:nvSpPr>
-        <p:spPr>
-          <a:xfrm>
-            <a:off x="548640" y="4434840"/>
-            <a:ext cx="7040880" cy="1463040"/>
-          </a:xfrm>
-          <a:prstGeom prst="rect">
-            <a:avLst/>
-          </a:prstGeom>
-          <a:solidFill>
-            <a:srgbClr val="F3F5F7"/>
-          </a:solidFill>
-          <a:ln>
-            <a:solidFill>
-              <a:srgbClr val="F3F5F7"/>
-            </a:solidFill>
-          </a:ln>
-          <a:effectLst/>
-        </p:spPr>
-        <p:style>
-          <a:lnRef idx="1">
-            <a:schemeClr val="accent1"/>
-          </a:lnRef>
-          <a:fillRef idx="3">
-            <a:schemeClr val="accent1"/>
-          </a:fillRef>
-          <a:effectRef idx="2">
-            <a:schemeClr val="accent1"/>
-          </a:effectRef>
-          <a:fontRef idx="minor">
-            <a:schemeClr val="lt1"/>
-          </a:fontRef>
-        </p:style>
-        <p:txBody>
-          <a:bodyPr rtlCol="0" anchor="ctr"/>
-          <a:lstStyle/>
-          <a:p>
-            <a:pPr algn="ctr"/>
-          </a:p>
-        </p:txBody>
-      </p:sp>
-      <p:sp>
-        <p:nvSpPr>
-          <p:cNvPr id="15" name="TextBox 14"/>
+              <a:t>占 0.08%–0.26%；McNemar p 0.146–1.000</a:t>
+            </a:r>
+          </a:p>
+        </p:txBody>
+      </p:sp>
+      <p:sp>
+        <p:nvSpPr>
+          <p:cNvPr id="14" name="TextBox 13"/>
           <p:cNvSpPr txBox="1"/>
           <p:nvPr/>
         </p:nvSpPr>
         <p:spPr>
           <a:xfrm>
-            <a:off x="777240" y="4617720"/>
-            <a:ext cx="6583680" cy="1097280"/>
+            <a:off x="548640" y="3749040"/>
+            <a:ext cx="3108960" cy="365760"/>
           </a:xfrm>
           <a:prstGeom prst="rect">
             <a:avLst/>
@@ -8288,51 +10717,27 @@
               </a:lnSpc>
             </a:pPr>
             <a:r>
-              <a:rPr sz="1300" b="0">
-                <a:solidFill>
-                  <a:srgbClr val="1F2A37"/>
-                </a:solidFill>
-                <a:latin typeface="Microsoft YaHei"/>
-              </a:rPr>
-              <a:t>增益由专家多样性支配：分歧率 0.20%–0.36% 的专家集合 6 次运行增益恰好为 0；刻意去相关的三类集合 9 次运行全为正（斜率 0.0646，r = 0.749）。</a:t>
-            </a:r>
-          </a:p>
-        </p:txBody>
-      </p:sp>
-      <p:pic>
-        <p:nvPicPr>
-          <p:cNvPr id="16" name="Picture 15" descr="fig5_gate_diagnostics.png"/>
-          <p:cNvPicPr>
-            <a:picLocks noChangeAspect="1"/>
-          </p:cNvPicPr>
-          <p:nvPr/>
-        </p:nvPicPr>
-        <p:blipFill>
-          <a:blip r:embed="rId2"/>
-          <a:stretch>
-            <a:fillRect/>
-          </a:stretch>
-        </p:blipFill>
-        <p:spPr>
-          <a:xfrm>
-            <a:off x="7772400" y="1783080"/>
-            <a:ext cx="3931920" cy="1395994"/>
-          </a:xfrm>
-          <a:prstGeom prst="rect">
-            <a:avLst/>
-          </a:prstGeom>
-        </p:spPr>
-      </p:pic>
-      <p:sp>
-        <p:nvSpPr>
-          <p:cNvPr id="17" name="TextBox 16"/>
+              <a:rPr sz="1300" b="1">
+                <a:solidFill>
+                  <a:srgbClr val="6B7280"/>
+                </a:solidFill>
+                <a:latin typeface="Microsoft YaHei"/>
+              </a:rPr>
+              <a:t>效应量</a:t>
+            </a:r>
+          </a:p>
+        </p:txBody>
+      </p:sp>
+      <p:sp>
+        <p:nvSpPr>
+          <p:cNvPr id="15" name="TextBox 14"/>
           <p:cNvSpPr txBox="1"/>
           <p:nvPr/>
         </p:nvSpPr>
         <p:spPr>
           <a:xfrm>
-            <a:off x="548640" y="6400800"/>
-            <a:ext cx="8229600" cy="274320"/>
+            <a:off x="3840480" y="3721608"/>
+            <a:ext cx="3840480" cy="411480"/>
           </a:xfrm>
           <a:prstGeom prst="rect">
             <a:avLst/>
@@ -8351,6 +10756,357 @@
               </a:lnSpc>
             </a:pPr>
             <a:r>
+              <a:rPr sz="1600" b="1">
+                <a:solidFill>
+                  <a:srgbClr val="1F2A37"/>
+                </a:solidFill>
+                <a:latin typeface="Microsoft YaHei"/>
+              </a:rPr>
+              <a:t>dz = -0.396</a:t>
+            </a:r>
+          </a:p>
+        </p:txBody>
+      </p:sp>
+      <p:sp>
+        <p:nvSpPr>
+          <p:cNvPr id="16" name="TextBox 15"/>
+          <p:cNvSpPr txBox="1"/>
+          <p:nvPr/>
+        </p:nvSpPr>
+        <p:spPr>
+          <a:xfrm>
+            <a:off x="7863840" y="3749040"/>
+            <a:ext cx="3657600" cy="548640"/>
+          </a:xfrm>
+          <a:prstGeom prst="rect">
+            <a:avLst/>
+          </a:prstGeom>
+          <a:noFill/>
+        </p:spPr>
+        <p:txBody>
+          <a:bodyPr wrap="square">
+            <a:spAutoFit/>
+          </a:bodyPr>
+          <a:lstStyle/>
+          <a:p>
+            <a:pPr algn="l">
+              <a:lnSpc>
+                <a:spcPct val="115000"/>
+              </a:lnSpc>
+            </a:pPr>
+            <a:r>
+              <a:rPr sz="1200" b="0">
+                <a:solidFill>
+                  <a:srgbClr val="6B7280"/>
+                </a:solidFill>
+                <a:latin typeface="Microsoft YaHei"/>
+              </a:rPr>
+              <a:t>相对差 -0.051%</a:t>
+            </a:r>
+          </a:p>
+        </p:txBody>
+      </p:sp>
+      <p:sp>
+        <p:nvSpPr>
+          <p:cNvPr id="17" name="TextBox 16"/>
+          <p:cNvSpPr txBox="1"/>
+          <p:nvPr/>
+        </p:nvSpPr>
+        <p:spPr>
+          <a:xfrm>
+            <a:off x="548640" y="4480560"/>
+            <a:ext cx="3108960" cy="365760"/>
+          </a:xfrm>
+          <a:prstGeom prst="rect">
+            <a:avLst/>
+          </a:prstGeom>
+          <a:noFill/>
+        </p:spPr>
+        <p:txBody>
+          <a:bodyPr wrap="square">
+            <a:spAutoFit/>
+          </a:bodyPr>
+          <a:lstStyle/>
+          <a:p>
+            <a:pPr algn="l">
+              <a:lnSpc>
+                <a:spcPct val="115000"/>
+              </a:lnSpc>
+            </a:pPr>
+            <a:r>
+              <a:rPr sz="1300" b="1">
+                <a:solidFill>
+                  <a:srgbClr val="6B7280"/>
+                </a:solidFill>
+                <a:latin typeface="Microsoft YaHei"/>
+              </a:rPr>
+              <a:t>80% 功效可检出的最小差</a:t>
+            </a:r>
+          </a:p>
+        </p:txBody>
+      </p:sp>
+      <p:sp>
+        <p:nvSpPr>
+          <p:cNvPr id="18" name="TextBox 17"/>
+          <p:cNvSpPr txBox="1"/>
+          <p:nvPr/>
+        </p:nvSpPr>
+        <p:spPr>
+          <a:xfrm>
+            <a:off x="3840480" y="4453128"/>
+            <a:ext cx="3840480" cy="411480"/>
+          </a:xfrm>
+          <a:prstGeom prst="rect">
+            <a:avLst/>
+          </a:prstGeom>
+          <a:noFill/>
+        </p:spPr>
+        <p:txBody>
+          <a:bodyPr wrap="square">
+            <a:spAutoFit/>
+          </a:bodyPr>
+          <a:lstStyle/>
+          <a:p>
+            <a:pPr algn="l">
+              <a:lnSpc>
+                <a:spcPct val="115000"/>
+              </a:lnSpc>
+            </a:pPr>
+            <a:r>
+              <a:rPr sz="1600" b="1">
+                <a:solidFill>
+                  <a:srgbClr val="1F2A37"/>
+                </a:solidFill>
+                <a:latin typeface="Microsoft YaHei"/>
+              </a:rPr>
+              <a:t>0.001146</a:t>
+            </a:r>
+          </a:p>
+        </p:txBody>
+      </p:sp>
+      <p:sp>
+        <p:nvSpPr>
+          <p:cNvPr id="19" name="TextBox 18"/>
+          <p:cNvSpPr txBox="1"/>
+          <p:nvPr/>
+        </p:nvSpPr>
+        <p:spPr>
+          <a:xfrm>
+            <a:off x="7863840" y="4480560"/>
+            <a:ext cx="3657600" cy="548640"/>
+          </a:xfrm>
+          <a:prstGeom prst="rect">
+            <a:avLst/>
+          </a:prstGeom>
+          <a:noFill/>
+        </p:spPr>
+        <p:txBody>
+          <a:bodyPr wrap="square">
+            <a:spAutoFit/>
+          </a:bodyPr>
+          <a:lstStyle/>
+          <a:p>
+            <a:pPr algn="l">
+              <a:lnSpc>
+                <a:spcPct val="115000"/>
+              </a:lnSpc>
+            </a:pPr>
+            <a:r>
+              <a:rPr sz="1200" b="0">
+                <a:solidFill>
+                  <a:srgbClr val="6B7280"/>
+                </a:solidFill>
+                <a:latin typeface="Microsoft YaHei"/>
+              </a:rPr>
+              <a:t>大于观测差 —— 所以必须做等价检验</a:t>
+            </a:r>
+          </a:p>
+        </p:txBody>
+      </p:sp>
+      <p:sp>
+        <p:nvSpPr>
+          <p:cNvPr id="20" name="TextBox 19"/>
+          <p:cNvSpPr txBox="1"/>
+          <p:nvPr/>
+        </p:nvSpPr>
+        <p:spPr>
+          <a:xfrm>
+            <a:off x="548640" y="5212080"/>
+            <a:ext cx="3108960" cy="365760"/>
+          </a:xfrm>
+          <a:prstGeom prst="rect">
+            <a:avLst/>
+          </a:prstGeom>
+          <a:noFill/>
+        </p:spPr>
+        <p:txBody>
+          <a:bodyPr wrap="square">
+            <a:spAutoFit/>
+          </a:bodyPr>
+          <a:lstStyle/>
+          <a:p>
+            <a:pPr algn="l">
+              <a:lnSpc>
+                <a:spcPct val="115000"/>
+              </a:lnSpc>
+            </a:pPr>
+            <a:r>
+              <a:rPr sz="1300" b="1">
+                <a:solidFill>
+                  <a:srgbClr val="6B7280"/>
+                </a:solidFill>
+                <a:latin typeface="Microsoft YaHei"/>
+              </a:rPr>
+              <a:t>全语料逐种子改判行数</a:t>
+            </a:r>
+          </a:p>
+        </p:txBody>
+      </p:sp>
+      <p:sp>
+        <p:nvSpPr>
+          <p:cNvPr id="21" name="TextBox 20"/>
+          <p:cNvSpPr txBox="1"/>
+          <p:nvPr/>
+        </p:nvSpPr>
+        <p:spPr>
+          <a:xfrm>
+            <a:off x="3840480" y="5184648"/>
+            <a:ext cx="3840480" cy="411480"/>
+          </a:xfrm>
+          <a:prstGeom prst="rect">
+            <a:avLst/>
+          </a:prstGeom>
+          <a:noFill/>
+        </p:spPr>
+        <p:txBody>
+          <a:bodyPr wrap="square">
+            <a:spAutoFit/>
+          </a:bodyPr>
+          <a:lstStyle/>
+          <a:p>
+            <a:pPr algn="l">
+              <a:lnSpc>
+                <a:spcPct val="115000"/>
+              </a:lnSpc>
+            </a:pPr>
+            <a:r>
+              <a:rPr sz="1600" b="1">
+                <a:solidFill>
+                  <a:srgbClr val="1F2A37"/>
+                </a:solidFill>
+                <a:latin typeface="Microsoft YaHei"/>
+              </a:rPr>
+              <a:t>均 216 · 最多 392</a:t>
+            </a:r>
+          </a:p>
+        </p:txBody>
+      </p:sp>
+      <p:sp>
+        <p:nvSpPr>
+          <p:cNvPr id="22" name="TextBox 21"/>
+          <p:cNvSpPr txBox="1"/>
+          <p:nvPr/>
+        </p:nvSpPr>
+        <p:spPr>
+          <a:xfrm>
+            <a:off x="7863840" y="5212080"/>
+            <a:ext cx="3657600" cy="548640"/>
+          </a:xfrm>
+          <a:prstGeom prst="rect">
+            <a:avLst/>
+          </a:prstGeom>
+          <a:noFill/>
+        </p:spPr>
+        <p:txBody>
+          <a:bodyPr wrap="square">
+            <a:spAutoFit/>
+          </a:bodyPr>
+          <a:lstStyle/>
+          <a:p>
+            <a:pPr algn="l">
+              <a:lnSpc>
+                <a:spcPct val="115000"/>
+              </a:lnSpc>
+            </a:pPr>
+            <a:r>
+              <a:rPr sz="1200" b="0">
+                <a:solidFill>
+                  <a:srgbClr val="6B7280"/>
+                </a:solidFill>
+                <a:latin typeface="Microsoft YaHei"/>
+              </a:rPr>
+              <a:t>测试 364 426 行，方向十次全负</a:t>
+            </a:r>
+          </a:p>
+        </p:txBody>
+      </p:sp>
+      <p:sp>
+        <p:nvSpPr>
+          <p:cNvPr id="23" name="TextBox 22"/>
+          <p:cNvSpPr txBox="1"/>
+          <p:nvPr/>
+        </p:nvSpPr>
+        <p:spPr>
+          <a:xfrm>
+            <a:off x="548640" y="5897880"/>
+            <a:ext cx="10972800" cy="320040"/>
+          </a:xfrm>
+          <a:prstGeom prst="rect">
+            <a:avLst/>
+          </a:prstGeom>
+          <a:noFill/>
+        </p:spPr>
+        <p:txBody>
+          <a:bodyPr wrap="square">
+            <a:spAutoFit/>
+          </a:bodyPr>
+          <a:lstStyle/>
+          <a:p>
+            <a:pPr algn="l">
+              <a:lnSpc>
+                <a:spcPct val="115000"/>
+              </a:lnSpc>
+            </a:pPr>
+            <a:r>
+              <a:rPr sz="1200" b="1">
+                <a:solidFill>
+                  <a:srgbClr val="1F6FEB"/>
+                </a:solidFill>
+                <a:latin typeface="Microsoft YaHei"/>
+              </a:rPr>
+              <a:t>两个边界（0.005 / 0.01）事先给定并同时报告；种子级区间与配对 Bootstrap 作为独立佐证。</a:t>
+            </a:r>
+          </a:p>
+        </p:txBody>
+      </p:sp>
+      <p:sp>
+        <p:nvSpPr>
+          <p:cNvPr id="24" name="TextBox 23"/>
+          <p:cNvSpPr txBox="1"/>
+          <p:nvPr/>
+        </p:nvSpPr>
+        <p:spPr>
+          <a:xfrm>
+            <a:off x="548640" y="6400800"/>
+            <a:ext cx="8229600" cy="274320"/>
+          </a:xfrm>
+          <a:prstGeom prst="rect">
+            <a:avLst/>
+          </a:prstGeom>
+          <a:noFill/>
+        </p:spPr>
+        <p:txBody>
+          <a:bodyPr wrap="square">
+            <a:spAutoFit/>
+          </a:bodyPr>
+          <a:lstStyle/>
+          <a:p>
+            <a:pPr algn="l">
+              <a:lnSpc>
+                <a:spcPct val="115000"/>
+              </a:lnSpc>
+            </a:pPr>
+            <a:r>
               <a:rPr sz="1000" b="0">
                 <a:solidFill>
                   <a:srgbClr val="6B7280"/>
@@ -8364,7 +11120,7 @@
       </p:sp>
       <p:sp>
         <p:nvSpPr>
-          <p:cNvPr id="18" name="TextBox 17"/>
+          <p:cNvPr id="25" name="TextBox 24"/>
           <p:cNvSpPr txBox="1"/>
           <p:nvPr/>
         </p:nvSpPr>
@@ -8453,7 +11209,7 @@
                 </a:solidFill>
                 <a:latin typeface="Microsoft YaHei"/>
               </a:rPr>
-              <a:t>机制 · 反转的原因</a:t>
+              <a:t>机制</a:t>
             </a:r>
           </a:p>
         </p:txBody>
@@ -8492,7 +11248,7 @@
                 </a:solidFill>
                 <a:latin typeface="Microsoft YaHei"/>
               </a:rPr>
-              <a:t>全语料上的劣势是「稀释」，不是加权</a:t>
+              <a:t>权重动不了预测：三条独立证据</a:t>
             </a:r>
           </a:p>
         </p:txBody>
@@ -8543,14 +11299,365 @@
       </p:sp>
       <p:sp>
         <p:nvSpPr>
-          <p:cNvPr id="5" name="Rectangle 4"/>
+          <p:cNvPr id="5" name="TextBox 4"/>
+          <p:cNvSpPr txBox="1"/>
+          <p:nvPr/>
+        </p:nvSpPr>
+        <p:spPr>
+          <a:xfrm>
+            <a:off x="548640" y="1783080"/>
+            <a:ext cx="2194560" cy="365760"/>
+          </a:xfrm>
+          <a:prstGeom prst="rect">
+            <a:avLst/>
+          </a:prstGeom>
+          <a:noFill/>
+        </p:spPr>
+        <p:txBody>
+          <a:bodyPr wrap="square">
+            <a:spAutoFit/>
+          </a:bodyPr>
+          <a:lstStyle/>
+          <a:p>
+            <a:pPr algn="l">
+              <a:lnSpc>
+                <a:spcPct val="115000"/>
+              </a:lnSpc>
+            </a:pPr>
+            <a:r>
+              <a:rPr sz="1500" b="1">
+                <a:solidFill>
+                  <a:srgbClr val="1F6FEB"/>
+                </a:solidFill>
+                <a:latin typeface="Microsoft YaHei"/>
+              </a:rPr>
+              <a:t>逐行可计算上界</a:t>
+            </a:r>
+          </a:p>
+        </p:txBody>
+      </p:sp>
+      <p:sp>
+        <p:nvSpPr>
+          <p:cNvPr id="6" name="TextBox 5"/>
+          <p:cNvSpPr txBox="1"/>
+          <p:nvPr/>
+        </p:nvSpPr>
+        <p:spPr>
+          <a:xfrm>
+            <a:off x="2834640" y="1737360"/>
+            <a:ext cx="4754880" cy="411480"/>
+          </a:xfrm>
+          <a:prstGeom prst="rect">
+            <a:avLst/>
+          </a:prstGeom>
+          <a:noFill/>
+        </p:spPr>
+        <p:txBody>
+          <a:bodyPr wrap="square">
+            <a:spAutoFit/>
+          </a:bodyPr>
+          <a:lstStyle/>
+          <a:p>
+            <a:pPr algn="l">
+              <a:lnSpc>
+                <a:spcPct val="115000"/>
+              </a:lnSpc>
+            </a:pPr>
+            <a:r>
+              <a:rPr sz="1500" b="1">
+                <a:solidFill>
+                  <a:srgbClr val="1F2A37"/>
+                </a:solidFill>
+                <a:latin typeface="Microsoft YaHei"/>
+              </a:rPr>
+              <a:t>99.91% 的测试行可证明不受权重影响</a:t>
+            </a:r>
+          </a:p>
+        </p:txBody>
+      </p:sp>
+      <p:sp>
+        <p:nvSpPr>
+          <p:cNvPr id="7" name="TextBox 6"/>
+          <p:cNvSpPr txBox="1"/>
+          <p:nvPr/>
+        </p:nvSpPr>
+        <p:spPr>
+          <a:xfrm>
+            <a:off x="2834640" y="2103120"/>
+            <a:ext cx="4754880" cy="365760"/>
+          </a:xfrm>
+          <a:prstGeom prst="rect">
+            <a:avLst/>
+          </a:prstGeom>
+          <a:noFill/>
+        </p:spPr>
+        <p:txBody>
+          <a:bodyPr wrap="square">
+            <a:spAutoFit/>
+          </a:bodyPr>
+          <a:lstStyle/>
+          <a:p>
+            <a:pPr algn="l">
+              <a:lnSpc>
+                <a:spcPct val="115000"/>
+              </a:lnSpc>
+            </a:pPr>
+            <a:r>
+              <a:rPr sz="1200" b="0">
+                <a:solidFill>
+                  <a:srgbClr val="6B7280"/>
+                </a:solidFill>
+                <a:latin typeface="Microsoft YaHei"/>
+              </a:rPr>
+              <a:t>实际改判 0 行</a:t>
+            </a:r>
+          </a:p>
+        </p:txBody>
+      </p:sp>
+      <p:sp>
+        <p:nvSpPr>
+          <p:cNvPr id="8" name="TextBox 7"/>
+          <p:cNvSpPr txBox="1"/>
+          <p:nvPr/>
+        </p:nvSpPr>
+        <p:spPr>
+          <a:xfrm>
+            <a:off x="548640" y="2651760"/>
+            <a:ext cx="2194560" cy="365760"/>
+          </a:xfrm>
+          <a:prstGeom prst="rect">
+            <a:avLst/>
+          </a:prstGeom>
+          <a:noFill/>
+        </p:spPr>
+        <p:txBody>
+          <a:bodyPr wrap="square">
+            <a:spAutoFit/>
+          </a:bodyPr>
+          <a:lstStyle/>
+          <a:p>
+            <a:pPr algn="l">
+              <a:lnSpc>
+                <a:spcPct val="115000"/>
+              </a:lnSpc>
+            </a:pPr>
+            <a:r>
+              <a:rPr sz="1500" b="1">
+                <a:solidFill>
+                  <a:srgbClr val="1F6FEB"/>
+                </a:solidFill>
+                <a:latin typeface="Microsoft YaHei"/>
+              </a:rPr>
+              <a:t>权重结构</a:t>
+            </a:r>
+          </a:p>
+        </p:txBody>
+      </p:sp>
+      <p:sp>
+        <p:nvSpPr>
+          <p:cNvPr id="9" name="TextBox 8"/>
+          <p:cNvSpPr txBox="1"/>
+          <p:nvPr/>
+        </p:nvSpPr>
+        <p:spPr>
+          <a:xfrm>
+            <a:off x="2834640" y="2606040"/>
+            <a:ext cx="4754880" cy="411480"/>
+          </a:xfrm>
+          <a:prstGeom prst="rect">
+            <a:avLst/>
+          </a:prstGeom>
+          <a:noFill/>
+        </p:spPr>
+        <p:txBody>
+          <a:bodyPr wrap="square">
+            <a:spAutoFit/>
+          </a:bodyPr>
+          <a:lstStyle/>
+          <a:p>
+            <a:pPr algn="l">
+              <a:lnSpc>
+                <a:spcPct val="115000"/>
+              </a:lnSpc>
+            </a:pPr>
+            <a:r>
+              <a:rPr sz="1500" b="1">
+                <a:solidFill>
+                  <a:srgbClr val="1F2A37"/>
+                </a:solidFill>
+                <a:latin typeface="Microsoft YaHei"/>
+              </a:rPr>
+              <a:t>归一化权重熵 0.99998</a:t>
+            </a:r>
+          </a:p>
+        </p:txBody>
+      </p:sp>
+      <p:sp>
+        <p:nvSpPr>
+          <p:cNvPr id="10" name="TextBox 9"/>
+          <p:cNvSpPr txBox="1"/>
+          <p:nvPr/>
+        </p:nvSpPr>
+        <p:spPr>
+          <a:xfrm>
+            <a:off x="2834640" y="2971800"/>
+            <a:ext cx="4754880" cy="365760"/>
+          </a:xfrm>
+          <a:prstGeom prst="rect">
+            <a:avLst/>
+          </a:prstGeom>
+          <a:noFill/>
+        </p:spPr>
+        <p:txBody>
+          <a:bodyPr wrap="square">
+            <a:spAutoFit/>
+          </a:bodyPr>
+          <a:lstStyle/>
+          <a:p>
+            <a:pPr algn="l">
+              <a:lnSpc>
+                <a:spcPct val="115000"/>
+              </a:lnSpc>
+            </a:pPr>
+            <a:r>
+              <a:rPr sz="1200" b="0">
+                <a:solidFill>
+                  <a:srgbClr val="6B7280"/>
+                </a:solidFill>
+                <a:latin typeface="Microsoft YaHei"/>
+              </a:rPr>
+              <a:t>风险模型输出近乎相同，权重退化为均匀</a:t>
+            </a:r>
+          </a:p>
+        </p:txBody>
+      </p:sp>
+      <p:sp>
+        <p:nvSpPr>
+          <p:cNvPr id="11" name="TextBox 10"/>
+          <p:cNvSpPr txBox="1"/>
+          <p:nvPr/>
+        </p:nvSpPr>
+        <p:spPr>
+          <a:xfrm>
+            <a:off x="548640" y="3520439"/>
+            <a:ext cx="2194560" cy="365760"/>
+          </a:xfrm>
+          <a:prstGeom prst="rect">
+            <a:avLst/>
+          </a:prstGeom>
+          <a:noFill/>
+        </p:spPr>
+        <p:txBody>
+          <a:bodyPr wrap="square">
+            <a:spAutoFit/>
+          </a:bodyPr>
+          <a:lstStyle/>
+          <a:p>
+            <a:pPr algn="l">
+              <a:lnSpc>
+                <a:spcPct val="115000"/>
+              </a:lnSpc>
+            </a:pPr>
+            <a:r>
+              <a:rPr sz="1500" b="1">
+                <a:solidFill>
+                  <a:srgbClr val="1F6FEB"/>
+                </a:solidFill>
+                <a:latin typeface="Microsoft YaHei"/>
+              </a:rPr>
+              <a:t>门控搜索</a:t>
+            </a:r>
+          </a:p>
+        </p:txBody>
+      </p:sp>
+      <p:sp>
+        <p:nvSpPr>
+          <p:cNvPr id="12" name="TextBox 11"/>
+          <p:cNvSpPr txBox="1"/>
+          <p:nvPr/>
+        </p:nvSpPr>
+        <p:spPr>
+          <a:xfrm>
+            <a:off x="2834640" y="3474719"/>
+            <a:ext cx="4754880" cy="411480"/>
+          </a:xfrm>
+          <a:prstGeom prst="rect">
+            <a:avLst/>
+          </a:prstGeom>
+          <a:noFill/>
+        </p:spPr>
+        <p:txBody>
+          <a:bodyPr wrap="square">
+            <a:spAutoFit/>
+          </a:bodyPr>
+          <a:lstStyle/>
+          <a:p>
+            <a:pPr algn="l">
+              <a:lnSpc>
+                <a:spcPct val="115000"/>
+              </a:lnSpc>
+            </a:pPr>
+            <a:r>
+              <a:rPr sz="1500" b="1">
+                <a:solidFill>
+                  <a:srgbClr val="1F2A37"/>
+                </a:solidFill>
+                <a:latin typeface="Microsoft YaHei"/>
+              </a:rPr>
+              <a:t>108 组超参数配置 → 6 个不同验证值</a:t>
+            </a:r>
+          </a:p>
+        </p:txBody>
+      </p:sp>
+      <p:sp>
+        <p:nvSpPr>
+          <p:cNvPr id="13" name="TextBox 12"/>
+          <p:cNvSpPr txBox="1"/>
+          <p:nvPr/>
+        </p:nvSpPr>
+        <p:spPr>
+          <a:xfrm>
+            <a:off x="2834640" y="3840479"/>
+            <a:ext cx="4754880" cy="365760"/>
+          </a:xfrm>
+          <a:prstGeom prst="rect">
+            <a:avLst/>
+          </a:prstGeom>
+          <a:noFill/>
+        </p:spPr>
+        <p:txBody>
+          <a:bodyPr wrap="square">
+            <a:spAutoFit/>
+          </a:bodyPr>
+          <a:lstStyle/>
+          <a:p>
+            <a:pPr algn="l">
+              <a:lnSpc>
+                <a:spcPct val="115000"/>
+              </a:lnSpc>
+            </a:pPr>
+            <a:r>
+              <a:rPr sz="1200" b="0">
+                <a:solidFill>
+                  <a:srgbClr val="6B7280"/>
+                </a:solidFill>
+                <a:latin typeface="Microsoft YaHei"/>
+              </a:rPr>
+              <a:t>锁定后在测试集上改判 0 行</a:t>
+            </a:r>
+          </a:p>
+        </p:txBody>
+      </p:sp>
+      <p:sp>
+        <p:nvSpPr>
+          <p:cNvPr id="14" name="Rectangle 13"/>
           <p:cNvSpPr/>
           <p:nvPr/>
         </p:nvSpPr>
         <p:spPr>
           <a:xfrm>
-            <a:off x="548640" y="1737360"/>
-            <a:ext cx="7223760" cy="1920240"/>
+            <a:off x="548640" y="4434840"/>
+            <a:ext cx="7040880" cy="1463040"/>
           </a:xfrm>
           <a:prstGeom prst="rect">
             <a:avLst/>
@@ -8589,14 +11696,14 @@
       </p:sp>
       <p:sp>
         <p:nvSpPr>
-          <p:cNvPr id="6" name="TextBox 5"/>
+          <p:cNvPr id="15" name="TextBox 14"/>
           <p:cNvSpPr txBox="1"/>
           <p:nvPr/>
         </p:nvSpPr>
         <p:spPr>
           <a:xfrm>
-            <a:off x="868680" y="1965960"/>
-            <a:ext cx="6583680" cy="1463040"/>
+            <a:off x="777240" y="4617720"/>
+            <a:ext cx="6583680" cy="1097280"/>
           </a:xfrm>
           <a:prstGeom prst="rect">
             <a:avLst/>
@@ -8611,63 +11718,55 @@
           <a:p>
             <a:pPr algn="l">
               <a:lnSpc>
-                <a:spcPct val="140000"/>
-              </a:lnSpc>
-            </a:pPr>
-            <a:r>
-              <a:rPr sz="1500" b="0">
+                <a:spcPct val="115000"/>
+              </a:lnSpc>
+            </a:pPr>
+            <a:r>
+              <a:rPr sz="1300" b="0">
                 <a:solidFill>
                   <a:srgbClr val="1F2A37"/>
                 </a:solidFill>
                 <a:latin typeface="Microsoft YaHei"/>
               </a:rPr>
-              <a:t>全特征视图 0.759540 − 卡方视图 0.780937 = 视图差 0.021397</a:t>
-            </a:r>
-          </a:p>
-          <a:p>
-            <a:pPr algn="l">
-              <a:lnSpc>
-                <a:spcPct val="140000"/>
-              </a:lnSpc>
-            </a:pPr>
-            <a:r>
-              <a:rPr sz="1500" b="0">
-                <a:solidFill>
-                  <a:srgbClr val="1F2A37"/>
-                </a:solidFill>
-                <a:latin typeface="Microsoft YaHei"/>
-              </a:rPr>
-              <a:t>四路平均摊薄四分之一：0.021397 ÷ 4 = 0.005349</a:t>
-            </a:r>
-          </a:p>
-          <a:p>
-            <a:pPr algn="l">
-              <a:lnSpc>
-                <a:spcPct val="140000"/>
-              </a:lnSpc>
-            </a:pPr>
-            <a:r>
-              <a:rPr sz="1500" b="0">
-                <a:solidFill>
-                  <a:srgbClr val="1F2A37"/>
-                </a:solidFill>
-                <a:latin typeface="Microsoft YaHei"/>
-              </a:rPr>
-              <a:t>实测平均差：-0.005533（偏差约 3.4%）</a:t>
-            </a:r>
-          </a:p>
-        </p:txBody>
-      </p:sp>
-      <p:sp>
-        <p:nvSpPr>
-          <p:cNvPr id="7" name="TextBox 6"/>
+              <a:t>增益由专家多样性支配：分歧率 0.20%–0.36% 的专家集合 6 次运行增益恰好为 0；刻意去相关的三类集合 9 次运行全为正（斜率 0.0646，r = 0.749）。</a:t>
+            </a:r>
+          </a:p>
+        </p:txBody>
+      </p:sp>
+      <p:pic>
+        <p:nvPicPr>
+          <p:cNvPr id="16" name="Picture 15" descr="fig5_gate_diagnostics.png"/>
+          <p:cNvPicPr>
+            <a:picLocks noChangeAspect="1"/>
+          </p:cNvPicPr>
+          <p:nvPr/>
+        </p:nvPicPr>
+        <p:blipFill>
+          <a:blip r:embed="rId2"/>
+          <a:stretch>
+            <a:fillRect/>
+          </a:stretch>
+        </p:blipFill>
+        <p:spPr>
+          <a:xfrm>
+            <a:off x="7772400" y="1783080"/>
+            <a:ext cx="3931920" cy="1395994"/>
+          </a:xfrm>
+          <a:prstGeom prst="rect">
+            <a:avLst/>
+          </a:prstGeom>
+        </p:spPr>
+      </p:pic>
+      <p:sp>
+        <p:nvSpPr>
+          <p:cNvPr id="17" name="TextBox 16"/>
           <p:cNvSpPr txBox="1"/>
           <p:nvPr/>
         </p:nvSpPr>
         <p:spPr>
           <a:xfrm>
-            <a:off x="548640" y="3840480"/>
-            <a:ext cx="7223760" cy="1371600"/>
+            <a:off x="548640" y="6400800"/>
+            <a:ext cx="8229600" cy="274320"/>
           </a:xfrm>
           <a:prstGeom prst="rect">
             <a:avLst/>
@@ -8686,237 +11785,12 @@
               </a:lnSpc>
             </a:pPr>
             <a:r>
-              <a:rPr sz="1300" b="0">
+              <a:rPr sz="1000" b="0">
                 <a:solidFill>
                   <a:srgbClr val="6B7280"/>
                 </a:solidFill>
                 <a:latin typeface="Microsoft YaHei"/>
               </a:rPr>
-              <a:t>同一算式在三档总体上成立：53 237 条（0.002068/4 = 0.000517 对 −0.000456）、413 209 条（0.004249/4 = 0.001062 对 −0.001137）、2 429 503 条（上式）。因此随规模变化的是成员质量，不是聚合规则。</a:t>
-            </a:r>
-          </a:p>
-        </p:txBody>
-      </p:sp>
-      <p:sp>
-        <p:nvSpPr>
-          <p:cNvPr id="8" name="Rectangle 7"/>
-          <p:cNvSpPr/>
-          <p:nvPr/>
-        </p:nvSpPr>
-        <p:spPr>
-          <a:xfrm>
-            <a:off x="8092440" y="1737360"/>
-            <a:ext cx="3566160" cy="3474720"/>
-          </a:xfrm>
-          <a:prstGeom prst="rect">
-            <a:avLst/>
-          </a:prstGeom>
-          <a:solidFill>
-            <a:srgbClr val="F3F5F7"/>
-          </a:solidFill>
-          <a:ln>
-            <a:solidFill>
-              <a:srgbClr val="F3F5F7"/>
-            </a:solidFill>
-          </a:ln>
-          <a:effectLst/>
-        </p:spPr>
-        <p:style>
-          <a:lnRef idx="1">
-            <a:schemeClr val="accent1"/>
-          </a:lnRef>
-          <a:fillRef idx="3">
-            <a:schemeClr val="accent1"/>
-          </a:fillRef>
-          <a:effectRef idx="2">
-            <a:schemeClr val="accent1"/>
-          </a:effectRef>
-          <a:fontRef idx="minor">
-            <a:schemeClr val="lt1"/>
-          </a:fontRef>
-        </p:style>
-        <p:txBody>
-          <a:bodyPr rtlCol="0" anchor="ctr"/>
-          <a:lstStyle/>
-          <a:p>
-            <a:pPr algn="ctr"/>
-          </a:p>
-        </p:txBody>
-      </p:sp>
-      <p:sp>
-        <p:nvSpPr>
-          <p:cNvPr id="9" name="TextBox 8"/>
-          <p:cNvSpPr txBox="1"/>
-          <p:nvPr/>
-        </p:nvSpPr>
-        <p:spPr>
-          <a:xfrm>
-            <a:off x="8321040" y="1965960"/>
-            <a:ext cx="3108960" cy="365760"/>
-          </a:xfrm>
-          <a:prstGeom prst="rect">
-            <a:avLst/>
-          </a:prstGeom>
-          <a:noFill/>
-        </p:spPr>
-        <p:txBody>
-          <a:bodyPr wrap="square">
-            <a:spAutoFit/>
-          </a:bodyPr>
-          <a:lstStyle/>
-          <a:p>
-            <a:pPr algn="l">
-              <a:lnSpc>
-                <a:spcPct val="115000"/>
-              </a:lnSpc>
-            </a:pPr>
-            <a:r>
-              <a:rPr sz="1300" b="1">
-                <a:solidFill>
-                  <a:srgbClr val="C2410C"/>
-                </a:solidFill>
-                <a:latin typeface="Microsoft YaHei"/>
-              </a:rPr>
-              <a:t>部署含义</a:t>
-            </a:r>
-          </a:p>
-        </p:txBody>
-      </p:sp>
-      <p:sp>
-        <p:nvSpPr>
-          <p:cNvPr id="10" name="TextBox 9"/>
-          <p:cNvSpPr txBox="1"/>
-          <p:nvPr/>
-        </p:nvSpPr>
-        <p:spPr>
-          <a:xfrm>
-            <a:off x="8321040" y="2423160"/>
-            <a:ext cx="3108960" cy="2560320"/>
-          </a:xfrm>
-          <a:prstGeom prst="rect">
-            <a:avLst/>
-          </a:prstGeom>
-          <a:noFill/>
-        </p:spPr>
-        <p:txBody>
-          <a:bodyPr wrap="square">
-            <a:spAutoFit/>
-          </a:bodyPr>
-          <a:lstStyle/>
-          <a:p>
-            <a:pPr algn="l">
-              <a:lnSpc>
-                <a:spcPct val="125000"/>
-              </a:lnSpc>
-            </a:pPr>
-            <a:r>
-              <a:rPr sz="1300" b="0">
-                <a:solidFill>
-                  <a:srgbClr val="1F2A37"/>
-                </a:solidFill>
-                <a:latin typeface="Microsoft YaHei"/>
-              </a:rPr>
-              <a:t>· 截断总体上用等权投票即可</a:t>
-            </a:r>
-          </a:p>
-          <a:p>
-            <a:pPr algn="l">
-              <a:lnSpc>
-                <a:spcPct val="125000"/>
-              </a:lnSpc>
-            </a:pPr>
-          </a:p>
-          <a:p>
-            <a:pPr algn="l">
-              <a:lnSpc>
-                <a:spcPct val="125000"/>
-              </a:lnSpc>
-            </a:pPr>
-            <a:r>
-              <a:rPr sz="1300" b="0">
-                <a:solidFill>
-                  <a:srgbClr val="1F2A37"/>
-                </a:solidFill>
-                <a:latin typeface="Microsoft YaHei"/>
-              </a:rPr>
-              <a:t>· 强不平衡语料上不要部署条件加权</a:t>
-            </a:r>
-          </a:p>
-          <a:p>
-            <a:pPr algn="l">
-              <a:lnSpc>
-                <a:spcPct val="125000"/>
-              </a:lnSpc>
-            </a:pPr>
-          </a:p>
-          <a:p>
-            <a:pPr algn="l">
-              <a:lnSpc>
-                <a:spcPct val="125000"/>
-              </a:lnSpc>
-            </a:pPr>
-            <a:r>
-              <a:rPr sz="1300" b="0">
-                <a:solidFill>
-                  <a:srgbClr val="1F2A37"/>
-                </a:solidFill>
-                <a:latin typeface="Microsoft YaHei"/>
-              </a:rPr>
-              <a:t>· 融合前先看各成员的分差：</a:t>
-            </a:r>
-          </a:p>
-          <a:p>
-            <a:pPr algn="l">
-              <a:lnSpc>
-                <a:spcPct val="125000"/>
-              </a:lnSpc>
-            </a:pPr>
-            <a:r>
-              <a:rPr sz="1300" b="0">
-                <a:solidFill>
-                  <a:srgbClr val="1F2A37"/>
-                </a:solidFill>
-                <a:latin typeface="Microsoft YaHei"/>
-              </a:rPr>
-              <a:t>  差多少，四路平均就摊多少</a:t>
-            </a:r>
-          </a:p>
-        </p:txBody>
-      </p:sp>
-      <p:sp>
-        <p:nvSpPr>
-          <p:cNvPr id="11" name="TextBox 10"/>
-          <p:cNvSpPr txBox="1"/>
-          <p:nvPr/>
-        </p:nvSpPr>
-        <p:spPr>
-          <a:xfrm>
-            <a:off x="548640" y="6400800"/>
-            <a:ext cx="8229600" cy="274320"/>
-          </a:xfrm>
-          <a:prstGeom prst="rect">
-            <a:avLst/>
-          </a:prstGeom>
-          <a:noFill/>
-        </p:spPr>
-        <p:txBody>
-          <a:bodyPr wrap="square">
-            <a:spAutoFit/>
-          </a:bodyPr>
-          <a:lstStyle/>
-          <a:p>
-            <a:pPr algn="l">
-              <a:lnSpc>
-                <a:spcPct val="115000"/>
-              </a:lnSpc>
-            </a:pPr>
-            <a:r>
-              <a:rPr sz="1000" b="0">
-                <a:solidFill>
-                  <a:srgbClr val="6B7280"/>
-                </a:solidFill>
-                <a:latin typeface="Microsoft YaHei"/>
-              </a:rPr>
               <a:t>泄漏受控的条件集成加权研究 · v1.11.0 · 数字均取自发布产物</a:t>
             </a:r>
           </a:p>
@@ -8924,7 +11798,7 @@
       </p:sp>
       <p:sp>
         <p:nvSpPr>
-          <p:cNvPr id="12" name="TextBox 11"/>
+          <p:cNvPr id="18" name="TextBox 17"/>
           <p:cNvSpPr txBox="1"/>
           <p:nvPr/>
         </p:nvSpPr>
@@ -9013,7 +11887,7 @@
                 </a:solidFill>
                 <a:latin typeface="Microsoft YaHei"/>
               </a:rPr>
-              <a:t>次生指标</a:t>
+              <a:t>机制 · 反转的原因</a:t>
             </a:r>
           </a:p>
         </p:txBody>
@@ -9052,7 +11926,7 @@
                 </a:solidFill>
                 <a:latin typeface="Microsoft YaHei"/>
               </a:rPr>
-              <a:t>代价与开放集：两处不利证据照实说</a:t>
+              <a:t>全语料上的劣势是「稀释」，不是加权</a:t>
             </a:r>
           </a:p>
         </p:txBody>
@@ -9103,14 +11977,60 @@
       </p:sp>
       <p:sp>
         <p:nvSpPr>
-          <p:cNvPr id="5" name="TextBox 4"/>
+          <p:cNvPr id="5" name="Rectangle 4"/>
+          <p:cNvSpPr/>
+          <p:nvPr/>
+        </p:nvSpPr>
+        <p:spPr>
+          <a:xfrm>
+            <a:off x="548640" y="1737360"/>
+            <a:ext cx="7223760" cy="1920240"/>
+          </a:xfrm>
+          <a:prstGeom prst="rect">
+            <a:avLst/>
+          </a:prstGeom>
+          <a:solidFill>
+            <a:srgbClr val="F3F5F7"/>
+          </a:solidFill>
+          <a:ln>
+            <a:solidFill>
+              <a:srgbClr val="F3F5F7"/>
+            </a:solidFill>
+          </a:ln>
+          <a:effectLst/>
+        </p:spPr>
+        <p:style>
+          <a:lnRef idx="1">
+            <a:schemeClr val="accent1"/>
+          </a:lnRef>
+          <a:fillRef idx="3">
+            <a:schemeClr val="accent1"/>
+          </a:fillRef>
+          <a:effectRef idx="2">
+            <a:schemeClr val="accent1"/>
+          </a:effectRef>
+          <a:fontRef idx="minor">
+            <a:schemeClr val="lt1"/>
+          </a:fontRef>
+        </p:style>
+        <p:txBody>
+          <a:bodyPr rtlCol="0" anchor="ctr"/>
+          <a:lstStyle/>
+          <a:p>
+            <a:pPr algn="ctr"/>
+          </a:p>
+        </p:txBody>
+      </p:sp>
+      <p:sp>
+        <p:nvSpPr>
+          <p:cNvPr id="6" name="TextBox 5"/>
           <p:cNvSpPr txBox="1"/>
           <p:nvPr/>
         </p:nvSpPr>
         <p:spPr>
           <a:xfrm>
-            <a:off x="548640" y="1691640"/>
-            <a:ext cx="5120640" cy="365760"/>
+            <a:off x="868680" y="1965960"/>
+            <a:ext cx="6583680" cy="1463040"/>
           </a:xfrm>
           <a:prstGeom prst="rect">
             <a:avLst/>
@@ -9125,31 +12045,63 @@
           <a:p>
             <a:pPr algn="l">
               <a:lnSpc>
-                <a:spcPct val="115000"/>
-              </a:lnSpc>
-            </a:pPr>
-            <a:r>
-              <a:rPr sz="1500" b="1">
-                <a:solidFill>
-                  <a:srgbClr val="1F6FEB"/>
-                </a:solidFill>
-                <a:latin typeface="Microsoft YaHei"/>
-              </a:rPr>
-              <a:t>训练与推理代价</a:t>
-            </a:r>
-          </a:p>
-        </p:txBody>
-      </p:sp>
-      <p:sp>
-        <p:nvSpPr>
-          <p:cNvPr id="6" name="TextBox 5"/>
+                <a:spcPct val="140000"/>
+              </a:lnSpc>
+            </a:pPr>
+            <a:r>
+              <a:rPr sz="1500" b="0">
+                <a:solidFill>
+                  <a:srgbClr val="1F2A37"/>
+                </a:solidFill>
+                <a:latin typeface="Microsoft YaHei"/>
+              </a:rPr>
+              <a:t>全特征视图 0.759540 − 卡方视图 0.780937 = 视图差 0.021397</a:t>
+            </a:r>
+          </a:p>
+          <a:p>
+            <a:pPr algn="l">
+              <a:lnSpc>
+                <a:spcPct val="140000"/>
+              </a:lnSpc>
+            </a:pPr>
+            <a:r>
+              <a:rPr sz="1500" b="0">
+                <a:solidFill>
+                  <a:srgbClr val="1F2A37"/>
+                </a:solidFill>
+                <a:latin typeface="Microsoft YaHei"/>
+              </a:rPr>
+              <a:t>四路平均摊薄四分之一：0.021397 ÷ 4 = 0.005349</a:t>
+            </a:r>
+          </a:p>
+          <a:p>
+            <a:pPr algn="l">
+              <a:lnSpc>
+                <a:spcPct val="140000"/>
+              </a:lnSpc>
+            </a:pPr>
+            <a:r>
+              <a:rPr sz="1500" b="0">
+                <a:solidFill>
+                  <a:srgbClr val="1F2A37"/>
+                </a:solidFill>
+                <a:latin typeface="Microsoft YaHei"/>
+              </a:rPr>
+              <a:t>实测平均差：-0.005533（偏差约 3.4%）</a:t>
+            </a:r>
+          </a:p>
+        </p:txBody>
+      </p:sp>
+      <p:sp>
+        <p:nvSpPr>
+          <p:cNvPr id="7" name="TextBox 6"/>
           <p:cNvSpPr txBox="1"/>
           <p:nvPr/>
         </p:nvSpPr>
         <p:spPr>
           <a:xfrm>
-            <a:off x="548640" y="2103120"/>
-            <a:ext cx="1463040" cy="365760"/>
+            <a:off x="548640" y="3840480"/>
+            <a:ext cx="7223760" cy="1371600"/>
           </a:xfrm>
           <a:prstGeom prst="rect">
             <a:avLst/>
@@ -9168,27 +12120,73 @@
               </a:lnSpc>
             </a:pPr>
             <a:r>
-              <a:rPr sz="1300" b="1">
+              <a:rPr sz="1300" b="0">
                 <a:solidFill>
                   <a:srgbClr val="6B7280"/>
                 </a:solidFill>
                 <a:latin typeface="Microsoft YaHei"/>
               </a:rPr>
-              <a:t>训练耗时</a:t>
-            </a:r>
-          </a:p>
-        </p:txBody>
-      </p:sp>
-      <p:sp>
-        <p:nvSpPr>
-          <p:cNvPr id="7" name="TextBox 6"/>
+              <a:t>同一算式在三档总体上成立：53 237 条（0.002068/4 = 0.000517 对 −0.000456）、413 209 条（0.004249/4 = 0.001062 对 −0.001137）、2 429 503 条（上式）。因此随规模变化的是成员质量，不是聚合规则。</a:t>
+            </a:r>
+          </a:p>
+        </p:txBody>
+      </p:sp>
+      <p:sp>
+        <p:nvSpPr>
+          <p:cNvPr id="8" name="Rectangle 7"/>
+          <p:cNvSpPr/>
+          <p:nvPr/>
+        </p:nvSpPr>
+        <p:spPr>
+          <a:xfrm>
+            <a:off x="8092440" y="1737360"/>
+            <a:ext cx="3566160" cy="3474720"/>
+          </a:xfrm>
+          <a:prstGeom prst="rect">
+            <a:avLst/>
+          </a:prstGeom>
+          <a:solidFill>
+            <a:srgbClr val="F3F5F7"/>
+          </a:solidFill>
+          <a:ln>
+            <a:solidFill>
+              <a:srgbClr val="F3F5F7"/>
+            </a:solidFill>
+          </a:ln>
+          <a:effectLst/>
+        </p:spPr>
+        <p:style>
+          <a:lnRef idx="1">
+            <a:schemeClr val="accent1"/>
+          </a:lnRef>
+          <a:fillRef idx="3">
+            <a:schemeClr val="accent1"/>
+          </a:fillRef>
+          <a:effectRef idx="2">
+            <a:schemeClr val="accent1"/>
+          </a:effectRef>
+          <a:fontRef idx="minor">
+            <a:schemeClr val="lt1"/>
+          </a:fontRef>
+        </p:style>
+        <p:txBody>
+          <a:bodyPr rtlCol="0" anchor="ctr"/>
+          <a:lstStyle/>
+          <a:p>
+            <a:pPr algn="ctr"/>
+          </a:p>
+        </p:txBody>
+      </p:sp>
+      <p:sp>
+        <p:nvSpPr>
+          <p:cNvPr id="9" name="TextBox 8"/>
           <p:cNvSpPr txBox="1"/>
           <p:nvPr/>
         </p:nvSpPr>
         <p:spPr>
           <a:xfrm>
-            <a:off x="2103120" y="2103120"/>
-            <a:ext cx="3840480" cy="457200"/>
+            <a:off x="8321040" y="1965960"/>
+            <a:ext cx="3108960" cy="365760"/>
           </a:xfrm>
           <a:prstGeom prst="rect">
             <a:avLst/>
@@ -9207,27 +12205,27 @@
               </a:lnSpc>
             </a:pPr>
             <a:r>
-              <a:rPr sz="1300" b="0">
-                <a:solidFill>
-                  <a:srgbClr val="1F2A37"/>
-                </a:solidFill>
-                <a:latin typeface="Microsoft YaHei"/>
-              </a:rPr>
-              <a:t>截断约 80 倍，全语料 175 倍</a:t>
-            </a:r>
-          </a:p>
-        </p:txBody>
-      </p:sp>
-      <p:sp>
-        <p:nvSpPr>
-          <p:cNvPr id="8" name="TextBox 7"/>
+              <a:rPr sz="1300" b="1">
+                <a:solidFill>
+                  <a:srgbClr val="C2410C"/>
+                </a:solidFill>
+                <a:latin typeface="Microsoft YaHei"/>
+              </a:rPr>
+              <a:t>部署含义</a:t>
+            </a:r>
+          </a:p>
+        </p:txBody>
+      </p:sp>
+      <p:sp>
+        <p:nvSpPr>
+          <p:cNvPr id="10" name="TextBox 9"/>
           <p:cNvSpPr txBox="1"/>
           <p:nvPr/>
         </p:nvSpPr>
         <p:spPr>
           <a:xfrm>
-            <a:off x="548640" y="2651760"/>
-            <a:ext cx="1463040" cy="365760"/>
+            <a:off x="8321040" y="2423160"/>
+            <a:ext cx="3108960" cy="2560320"/>
           </a:xfrm>
           <a:prstGeom prst="rect">
             <a:avLst/>
@@ -9242,31 +12240,93 @@
           <a:p>
             <a:pPr algn="l">
               <a:lnSpc>
-                <a:spcPct val="115000"/>
-              </a:lnSpc>
-            </a:pPr>
-            <a:r>
-              <a:rPr sz="1300" b="1">
-                <a:solidFill>
-                  <a:srgbClr val="6B7280"/>
-                </a:solidFill>
-                <a:latin typeface="Microsoft YaHei"/>
-              </a:rPr>
-              <a:t>模型体积</a:t>
-            </a:r>
-          </a:p>
-        </p:txBody>
-      </p:sp>
-      <p:sp>
-        <p:nvSpPr>
-          <p:cNvPr id="9" name="TextBox 8"/>
+                <a:spcPct val="125000"/>
+              </a:lnSpc>
+            </a:pPr>
+            <a:r>
+              <a:rPr sz="1300" b="0">
+                <a:solidFill>
+                  <a:srgbClr val="1F2A37"/>
+                </a:solidFill>
+                <a:latin typeface="Microsoft YaHei"/>
+              </a:rPr>
+              <a:t>· 截断总体上用等权投票即可</a:t>
+            </a:r>
+          </a:p>
+          <a:p>
+            <a:pPr algn="l">
+              <a:lnSpc>
+                <a:spcPct val="125000"/>
+              </a:lnSpc>
+            </a:pPr>
+          </a:p>
+          <a:p>
+            <a:pPr algn="l">
+              <a:lnSpc>
+                <a:spcPct val="125000"/>
+              </a:lnSpc>
+            </a:pPr>
+            <a:r>
+              <a:rPr sz="1300" b="0">
+                <a:solidFill>
+                  <a:srgbClr val="1F2A37"/>
+                </a:solidFill>
+                <a:latin typeface="Microsoft YaHei"/>
+              </a:rPr>
+              <a:t>· 强不平衡语料上不要部署条件加权</a:t>
+            </a:r>
+          </a:p>
+          <a:p>
+            <a:pPr algn="l">
+              <a:lnSpc>
+                <a:spcPct val="125000"/>
+              </a:lnSpc>
+            </a:pPr>
+          </a:p>
+          <a:p>
+            <a:pPr algn="l">
+              <a:lnSpc>
+                <a:spcPct val="125000"/>
+              </a:lnSpc>
+            </a:pPr>
+            <a:r>
+              <a:rPr sz="1300" b="0">
+                <a:solidFill>
+                  <a:srgbClr val="1F2A37"/>
+                </a:solidFill>
+                <a:latin typeface="Microsoft YaHei"/>
+              </a:rPr>
+              <a:t>· 融合前先看各成员的分差：</a:t>
+            </a:r>
+          </a:p>
+          <a:p>
+            <a:pPr algn="l">
+              <a:lnSpc>
+                <a:spcPct val="125000"/>
+              </a:lnSpc>
+            </a:pPr>
+            <a:r>
+              <a:rPr sz="1300" b="0">
+                <a:solidFill>
+                  <a:srgbClr val="1F2A37"/>
+                </a:solidFill>
+                <a:latin typeface="Microsoft YaHei"/>
+              </a:rPr>
+              <a:t>  差多少，四路平均就摊多少</a:t>
+            </a:r>
+          </a:p>
+        </p:txBody>
+      </p:sp>
+      <p:sp>
+        <p:nvSpPr>
+          <p:cNvPr id="11" name="TextBox 10"/>
           <p:cNvSpPr txBox="1"/>
           <p:nvPr/>
         </p:nvSpPr>
         <p:spPr>
           <a:xfrm>
-            <a:off x="2103120" y="2651760"/>
-            <a:ext cx="3840480" cy="457200"/>
+            <a:off x="548640" y="6400800"/>
+            <a:ext cx="8229600" cy="274320"/>
           </a:xfrm>
           <a:prstGeom prst="rect">
             <a:avLst/>
@@ -9285,91 +12345,13 @@
               </a:lnSpc>
             </a:pPr>
             <a:r>
-              <a:rPr sz="1300" b="0">
-                <a:solidFill>
-                  <a:srgbClr val="1F2A37"/>
-                </a:solidFill>
-                <a:latin typeface="Microsoft YaHei"/>
-              </a:rPr>
-              <a:t>4.1 倍（9.09 MB vs 2.21 MB）</a:t>
-            </a:r>
-          </a:p>
-        </p:txBody>
-      </p:sp>
-      <p:sp>
-        <p:nvSpPr>
-          <p:cNvPr id="10" name="TextBox 9"/>
-          <p:cNvSpPr txBox="1"/>
-          <p:nvPr/>
-        </p:nvSpPr>
-        <p:spPr>
-          <a:xfrm>
-            <a:off x="548640" y="3200400"/>
-            <a:ext cx="1463040" cy="365760"/>
-          </a:xfrm>
-          <a:prstGeom prst="rect">
-            <a:avLst/>
-          </a:prstGeom>
-          <a:noFill/>
-        </p:spPr>
-        <p:txBody>
-          <a:bodyPr wrap="square">
-            <a:spAutoFit/>
-          </a:bodyPr>
-          <a:lstStyle/>
-          <a:p>
-            <a:pPr algn="l">
-              <a:lnSpc>
-                <a:spcPct val="115000"/>
-              </a:lnSpc>
-            </a:pPr>
-            <a:r>
-              <a:rPr sz="1300" b="1">
+              <a:rPr sz="1000" b="0">
                 <a:solidFill>
                   <a:srgbClr val="6B7280"/>
                 </a:solidFill>
                 <a:latin typeface="Microsoft YaHei"/>
               </a:rPr>
-              <a:t>代价敏感</a:t>
-            </a:r>
-          </a:p>
-        </p:txBody>
-      </p:sp>
-      <p:sp>
-        <p:nvSpPr>
-          <p:cNvPr id="11" name="TextBox 10"/>
-          <p:cNvSpPr txBox="1"/>
-          <p:nvPr/>
-        </p:nvSpPr>
-        <p:spPr>
-          <a:xfrm>
-            <a:off x="2103120" y="3200400"/>
-            <a:ext cx="3840480" cy="457200"/>
-          </a:xfrm>
-          <a:prstGeom prst="rect">
-            <a:avLst/>
-          </a:prstGeom>
-          <a:noFill/>
-        </p:spPr>
-        <p:txBody>
-          <a:bodyPr wrap="square">
-            <a:spAutoFit/>
-          </a:bodyPr>
-          <a:lstStyle/>
-          <a:p>
-            <a:pPr algn="l">
-              <a:lnSpc>
-                <a:spcPct val="115000"/>
-              </a:lnSpc>
-            </a:pPr>
-            <a:r>
-              <a:rPr sz="1300" b="0">
-                <a:solidFill>
-                  <a:srgbClr val="1F2A37"/>
-                </a:solidFill>
-                <a:latin typeface="Microsoft YaHei"/>
-              </a:rPr>
-              <a:t>误报漏报代价比 1–100 内没有优势</a:t>
+              <a:t>泄漏受控的条件集成加权研究 · v1.11.0 · 数字均取自发布产物</a:t>
             </a:r>
           </a:p>
         </p:txBody>
@@ -9377,281 +12359,6 @@
       <p:sp>
         <p:nvSpPr>
           <p:cNvPr id="12" name="TextBox 11"/>
-          <p:cNvSpPr txBox="1"/>
-          <p:nvPr/>
-        </p:nvSpPr>
-        <p:spPr>
-          <a:xfrm>
-            <a:off x="548640" y="3931920"/>
-            <a:ext cx="5394960" cy="411480"/>
-          </a:xfrm>
-          <a:prstGeom prst="rect">
-            <a:avLst/>
-          </a:prstGeom>
-          <a:noFill/>
-        </p:spPr>
-        <p:txBody>
-          <a:bodyPr wrap="square">
-            <a:spAutoFit/>
-          </a:bodyPr>
-          <a:lstStyle/>
-          <a:p>
-            <a:pPr algn="l">
-              <a:lnSpc>
-                <a:spcPct val="115000"/>
-              </a:lnSpc>
-            </a:pPr>
-            <a:r>
-              <a:rPr sz="1500" b="1">
-                <a:solidFill>
-                  <a:srgbClr val="C2410C"/>
-                </a:solidFill>
-                <a:latin typeface="Microsoft YaHei"/>
-              </a:rPr>
-              <a:t>开放集：三个未知族留出</a:t>
-            </a:r>
-          </a:p>
-        </p:txBody>
-      </p:sp>
-      <p:sp>
-        <p:nvSpPr>
-          <p:cNvPr id="13" name="TextBox 12"/>
-          <p:cNvSpPr txBox="1"/>
-          <p:nvPr/>
-        </p:nvSpPr>
-        <p:spPr>
-          <a:xfrm>
-            <a:off x="548640" y="4315968"/>
-            <a:ext cx="5394960" cy="320040"/>
-          </a:xfrm>
-          <a:prstGeom prst="rect">
-            <a:avLst/>
-          </a:prstGeom>
-          <a:noFill/>
-        </p:spPr>
-        <p:txBody>
-          <a:bodyPr wrap="square">
-            <a:spAutoFit/>
-          </a:bodyPr>
-          <a:lstStyle/>
-          <a:p>
-            <a:pPr algn="l">
-              <a:lnSpc>
-                <a:spcPct val="115000"/>
-              </a:lnSpc>
-            </a:pPr>
-            <a:r>
-              <a:rPr sz="1100" b="0">
-                <a:solidFill>
-                  <a:srgbClr val="6B7280"/>
-                </a:solidFill>
-                <a:latin typeface="Microsoft YaHei"/>
-              </a:rPr>
-              <a:t>PortScan / Infiltration / Heartbleed 作未知族</a:t>
-            </a:r>
-          </a:p>
-        </p:txBody>
-      </p:sp>
-      <p:sp>
-        <p:nvSpPr>
-          <p:cNvPr id="14" name="TextBox 13"/>
-          <p:cNvSpPr txBox="1"/>
-          <p:nvPr/>
-        </p:nvSpPr>
-        <p:spPr>
-          <a:xfrm>
-            <a:off x="548640" y="4617720"/>
-            <a:ext cx="5394960" cy="1371600"/>
-          </a:xfrm>
-          <a:prstGeom prst="rect">
-            <a:avLst/>
-          </a:prstGeom>
-          <a:noFill/>
-        </p:spPr>
-        <p:txBody>
-          <a:bodyPr wrap="square">
-            <a:spAutoFit/>
-          </a:bodyPr>
-          <a:lstStyle/>
-          <a:p>
-            <a:pPr algn="l">
-              <a:lnSpc>
-                <a:spcPct val="130000"/>
-              </a:lnSpc>
-            </a:pPr>
-            <a:r>
-              <a:rPr sz="1300" b="0">
-                <a:solidFill>
-                  <a:srgbClr val="1F2A37"/>
-                </a:solidFill>
-                <a:latin typeface="Microsoft YaHei"/>
-              </a:rPr>
-              <a:t>条件加权 AUROC 0.644–0.694，未知类召回 0.0015–0.0396</a:t>
-            </a:r>
-          </a:p>
-          <a:p>
-            <a:pPr algn="l">
-              <a:lnSpc>
-                <a:spcPct val="130000"/>
-              </a:lnSpc>
-            </a:pPr>
-            <a:r>
-              <a:rPr sz="1300" b="0">
-                <a:solidFill>
-                  <a:srgbClr val="1F2A37"/>
-                </a:solidFill>
-                <a:latin typeface="Microsoft YaHei"/>
-              </a:rPr>
-              <a:t>等权森林 AUROC 0.919–0.948，未知类召回 0.057–0.374</a:t>
-            </a:r>
-          </a:p>
-          <a:p>
-            <a:pPr algn="l">
-              <a:lnSpc>
-                <a:spcPct val="130000"/>
-              </a:lnSpc>
-            </a:pPr>
-            <a:r>
-              <a:rPr sz="1300" b="0">
-                <a:solidFill>
-                  <a:srgbClr val="1F2A37"/>
-                </a:solidFill>
-                <a:latin typeface="Microsoft YaHei"/>
-              </a:rPr>
-              <a:t>风险门控把概率推向高置信区，削弱了拒绝所需的不确定性信号。</a:t>
-            </a:r>
-          </a:p>
-        </p:txBody>
-      </p:sp>
-      <p:pic>
-        <p:nvPicPr>
-          <p:cNvPr id="15" name="Picture 14" descr="fig10_calibration_robustness.png"/>
-          <p:cNvPicPr>
-            <a:picLocks noChangeAspect="1"/>
-          </p:cNvPicPr>
-          <p:nvPr/>
-        </p:nvPicPr>
-        <p:blipFill>
-          <a:blip r:embed="rId2"/>
-          <a:stretch>
-            <a:fillRect/>
-          </a:stretch>
-        </p:blipFill>
-        <p:spPr>
-          <a:xfrm>
-            <a:off x="6172200" y="1737360"/>
-            <a:ext cx="2651760" cy="1023429"/>
-          </a:xfrm>
-          <a:prstGeom prst="rect">
-            <a:avLst/>
-          </a:prstGeom>
-        </p:spPr>
-      </p:pic>
-      <p:pic>
-        <p:nvPicPr>
-          <p:cNvPr id="16" name="Picture 15" descr="fig11_latency.png"/>
-          <p:cNvPicPr>
-            <a:picLocks noChangeAspect="1"/>
-          </p:cNvPicPr>
-          <p:nvPr/>
-        </p:nvPicPr>
-        <p:blipFill>
-          <a:blip r:embed="rId3"/>
-          <a:stretch>
-            <a:fillRect/>
-          </a:stretch>
-        </p:blipFill>
-        <p:spPr>
-          <a:xfrm>
-            <a:off x="9006840" y="1737360"/>
-            <a:ext cx="2651760" cy="1168528"/>
-          </a:xfrm>
-          <a:prstGeom prst="rect">
-            <a:avLst/>
-          </a:prstGeom>
-        </p:spPr>
-      </p:pic>
-      <p:sp>
-        <p:nvSpPr>
-          <p:cNvPr id="17" name="TextBox 16"/>
-          <p:cNvSpPr txBox="1"/>
-          <p:nvPr/>
-        </p:nvSpPr>
-        <p:spPr>
-          <a:xfrm>
-            <a:off x="6172200" y="4343400"/>
-            <a:ext cx="5486400" cy="1280160"/>
-          </a:xfrm>
-          <a:prstGeom prst="rect">
-            <a:avLst/>
-          </a:prstGeom>
-          <a:noFill/>
-        </p:spPr>
-        <p:txBody>
-          <a:bodyPr wrap="square">
-            <a:spAutoFit/>
-          </a:bodyPr>
-          <a:lstStyle/>
-          <a:p>
-            <a:pPr algn="l">
-              <a:lnSpc>
-                <a:spcPct val="115000"/>
-              </a:lnSpc>
-            </a:pPr>
-            <a:r>
-              <a:rPr sz="1200" b="0">
-                <a:solidFill>
-                  <a:srgbClr val="6B7280"/>
-                </a:solidFill>
-                <a:latin typeface="Microsoft YaHei"/>
-              </a:rPr>
-              <a:t>49 项自动检查持续复核这些数字；开放集与代价的每一项都能从公开的逐样本预测重算。</a:t>
-            </a:r>
-          </a:p>
-        </p:txBody>
-      </p:sp>
-      <p:sp>
-        <p:nvSpPr>
-          <p:cNvPr id="18" name="TextBox 17"/>
-          <p:cNvSpPr txBox="1"/>
-          <p:nvPr/>
-        </p:nvSpPr>
-        <p:spPr>
-          <a:xfrm>
-            <a:off x="548640" y="6400800"/>
-            <a:ext cx="8229600" cy="274320"/>
-          </a:xfrm>
-          <a:prstGeom prst="rect">
-            <a:avLst/>
-          </a:prstGeom>
-          <a:noFill/>
-        </p:spPr>
-        <p:txBody>
-          <a:bodyPr wrap="square">
-            <a:spAutoFit/>
-          </a:bodyPr>
-          <a:lstStyle/>
-          <a:p>
-            <a:pPr algn="l">
-              <a:lnSpc>
-                <a:spcPct val="115000"/>
-              </a:lnSpc>
-            </a:pPr>
-            <a:r>
-              <a:rPr sz="1000" b="0">
-                <a:solidFill>
-                  <a:srgbClr val="6B7280"/>
-                </a:solidFill>
-                <a:latin typeface="Microsoft YaHei"/>
-              </a:rPr>
-              <a:t>泄漏受控的条件集成加权研究 · v1.11.0 · 数字均取自发布产物</a:t>
-            </a:r>
-          </a:p>
-        </p:txBody>
-      </p:sp>
-      <p:sp>
-        <p:nvSpPr>
-          <p:cNvPr id="19" name="TextBox 18"/>
           <p:cNvSpPr txBox="1"/>
           <p:nvPr/>
         </p:nvSpPr>
@@ -9740,7 +12447,7 @@
                 </a:solidFill>
                 <a:latin typeface="Microsoft YaHei"/>
               </a:rPr>
-              <a:t>收尾</a:t>
+              <a:t>次生指标</a:t>
             </a:r>
           </a:p>
         </p:txBody>
@@ -9779,7 +12486,7 @@
                 </a:solidFill>
                 <a:latin typeface="Microsoft YaHei"/>
               </a:rPr>
-              <a:t>结论、边界与下一步</a:t>
+              <a:t>代价与开放集：两处不利证据照实说</a:t>
             </a:r>
           </a:p>
         </p:txBody>
@@ -9830,25 +12537,706 @@
       </p:sp>
       <p:sp>
         <p:nvSpPr>
-          <p:cNvPr id="5" name="Rectangle 4"/>
+          <p:cNvPr id="5" name="TextBox 4"/>
+          <p:cNvSpPr txBox="1"/>
+          <p:nvPr/>
+        </p:nvSpPr>
+        <p:spPr>
+          <a:xfrm>
+            <a:off x="548640" y="1691640"/>
+            <a:ext cx="5120640" cy="365760"/>
+          </a:xfrm>
+          <a:prstGeom prst="rect">
+            <a:avLst/>
+          </a:prstGeom>
+          <a:noFill/>
+        </p:spPr>
+        <p:txBody>
+          <a:bodyPr wrap="square">
+            <a:spAutoFit/>
+          </a:bodyPr>
+          <a:lstStyle/>
+          <a:p>
+            <a:pPr algn="l">
+              <a:lnSpc>
+                <a:spcPct val="115000"/>
+              </a:lnSpc>
+            </a:pPr>
+            <a:r>
+              <a:rPr sz="1500" b="1">
+                <a:solidFill>
+                  <a:srgbClr val="1F6FEB"/>
+                </a:solidFill>
+                <a:latin typeface="Microsoft YaHei"/>
+              </a:rPr>
+              <a:t>训练与推理代价</a:t>
+            </a:r>
+          </a:p>
+        </p:txBody>
+      </p:sp>
+      <p:sp>
+        <p:nvSpPr>
+          <p:cNvPr id="6" name="TextBox 5"/>
+          <p:cNvSpPr txBox="1"/>
+          <p:nvPr/>
+        </p:nvSpPr>
+        <p:spPr>
+          <a:xfrm>
+            <a:off x="548640" y="2103120"/>
+            <a:ext cx="1463040" cy="365760"/>
+          </a:xfrm>
+          <a:prstGeom prst="rect">
+            <a:avLst/>
+          </a:prstGeom>
+          <a:noFill/>
+        </p:spPr>
+        <p:txBody>
+          <a:bodyPr wrap="square">
+            <a:spAutoFit/>
+          </a:bodyPr>
+          <a:lstStyle/>
+          <a:p>
+            <a:pPr algn="l">
+              <a:lnSpc>
+                <a:spcPct val="115000"/>
+              </a:lnSpc>
+            </a:pPr>
+            <a:r>
+              <a:rPr sz="1300" b="1">
+                <a:solidFill>
+                  <a:srgbClr val="6B7280"/>
+                </a:solidFill>
+                <a:latin typeface="Microsoft YaHei"/>
+              </a:rPr>
+              <a:t>训练耗时</a:t>
+            </a:r>
+          </a:p>
+        </p:txBody>
+      </p:sp>
+      <p:sp>
+        <p:nvSpPr>
+          <p:cNvPr id="7" name="TextBox 6"/>
+          <p:cNvSpPr txBox="1"/>
+          <p:nvPr/>
+        </p:nvSpPr>
+        <p:spPr>
+          <a:xfrm>
+            <a:off x="2103120" y="2103120"/>
+            <a:ext cx="3840480" cy="457200"/>
+          </a:xfrm>
+          <a:prstGeom prst="rect">
+            <a:avLst/>
+          </a:prstGeom>
+          <a:noFill/>
+        </p:spPr>
+        <p:txBody>
+          <a:bodyPr wrap="square">
+            <a:spAutoFit/>
+          </a:bodyPr>
+          <a:lstStyle/>
+          <a:p>
+            <a:pPr algn="l">
+              <a:lnSpc>
+                <a:spcPct val="115000"/>
+              </a:lnSpc>
+            </a:pPr>
+            <a:r>
+              <a:rPr sz="1300" b="0">
+                <a:solidFill>
+                  <a:srgbClr val="1F2A37"/>
+                </a:solidFill>
+                <a:latin typeface="Microsoft YaHei"/>
+              </a:rPr>
+              <a:t>截断约 80 倍，全语料 175 倍</a:t>
+            </a:r>
+          </a:p>
+        </p:txBody>
+      </p:sp>
+      <p:sp>
+        <p:nvSpPr>
+          <p:cNvPr id="8" name="TextBox 7"/>
+          <p:cNvSpPr txBox="1"/>
+          <p:nvPr/>
+        </p:nvSpPr>
+        <p:spPr>
+          <a:xfrm>
+            <a:off x="548640" y="2651760"/>
+            <a:ext cx="1463040" cy="365760"/>
+          </a:xfrm>
+          <a:prstGeom prst="rect">
+            <a:avLst/>
+          </a:prstGeom>
+          <a:noFill/>
+        </p:spPr>
+        <p:txBody>
+          <a:bodyPr wrap="square">
+            <a:spAutoFit/>
+          </a:bodyPr>
+          <a:lstStyle/>
+          <a:p>
+            <a:pPr algn="l">
+              <a:lnSpc>
+                <a:spcPct val="115000"/>
+              </a:lnSpc>
+            </a:pPr>
+            <a:r>
+              <a:rPr sz="1300" b="1">
+                <a:solidFill>
+                  <a:srgbClr val="6B7280"/>
+                </a:solidFill>
+                <a:latin typeface="Microsoft YaHei"/>
+              </a:rPr>
+              <a:t>模型体积</a:t>
+            </a:r>
+          </a:p>
+        </p:txBody>
+      </p:sp>
+      <p:sp>
+        <p:nvSpPr>
+          <p:cNvPr id="9" name="TextBox 8"/>
+          <p:cNvSpPr txBox="1"/>
+          <p:nvPr/>
+        </p:nvSpPr>
+        <p:spPr>
+          <a:xfrm>
+            <a:off x="2103120" y="2651760"/>
+            <a:ext cx="3840480" cy="457200"/>
+          </a:xfrm>
+          <a:prstGeom prst="rect">
+            <a:avLst/>
+          </a:prstGeom>
+          <a:noFill/>
+        </p:spPr>
+        <p:txBody>
+          <a:bodyPr wrap="square">
+            <a:spAutoFit/>
+          </a:bodyPr>
+          <a:lstStyle/>
+          <a:p>
+            <a:pPr algn="l">
+              <a:lnSpc>
+                <a:spcPct val="115000"/>
+              </a:lnSpc>
+            </a:pPr>
+            <a:r>
+              <a:rPr sz="1300" b="0">
+                <a:solidFill>
+                  <a:srgbClr val="1F2A37"/>
+                </a:solidFill>
+                <a:latin typeface="Microsoft YaHei"/>
+              </a:rPr>
+              <a:t>4.1 倍（9.09 MB vs 2.21 MB）</a:t>
+            </a:r>
+          </a:p>
+        </p:txBody>
+      </p:sp>
+      <p:sp>
+        <p:nvSpPr>
+          <p:cNvPr id="10" name="TextBox 9"/>
+          <p:cNvSpPr txBox="1"/>
+          <p:nvPr/>
+        </p:nvSpPr>
+        <p:spPr>
+          <a:xfrm>
+            <a:off x="548640" y="3200400"/>
+            <a:ext cx="1463040" cy="365760"/>
+          </a:xfrm>
+          <a:prstGeom prst="rect">
+            <a:avLst/>
+          </a:prstGeom>
+          <a:noFill/>
+        </p:spPr>
+        <p:txBody>
+          <a:bodyPr wrap="square">
+            <a:spAutoFit/>
+          </a:bodyPr>
+          <a:lstStyle/>
+          <a:p>
+            <a:pPr algn="l">
+              <a:lnSpc>
+                <a:spcPct val="115000"/>
+              </a:lnSpc>
+            </a:pPr>
+            <a:r>
+              <a:rPr sz="1300" b="1">
+                <a:solidFill>
+                  <a:srgbClr val="6B7280"/>
+                </a:solidFill>
+                <a:latin typeface="Microsoft YaHei"/>
+              </a:rPr>
+              <a:t>代价敏感</a:t>
+            </a:r>
+          </a:p>
+        </p:txBody>
+      </p:sp>
+      <p:sp>
+        <p:nvSpPr>
+          <p:cNvPr id="11" name="TextBox 10"/>
+          <p:cNvSpPr txBox="1"/>
+          <p:nvPr/>
+        </p:nvSpPr>
+        <p:spPr>
+          <a:xfrm>
+            <a:off x="2103120" y="3200400"/>
+            <a:ext cx="3840480" cy="457200"/>
+          </a:xfrm>
+          <a:prstGeom prst="rect">
+            <a:avLst/>
+          </a:prstGeom>
+          <a:noFill/>
+        </p:spPr>
+        <p:txBody>
+          <a:bodyPr wrap="square">
+            <a:spAutoFit/>
+          </a:bodyPr>
+          <a:lstStyle/>
+          <a:p>
+            <a:pPr algn="l">
+              <a:lnSpc>
+                <a:spcPct val="115000"/>
+              </a:lnSpc>
+            </a:pPr>
+            <a:r>
+              <a:rPr sz="1300" b="0">
+                <a:solidFill>
+                  <a:srgbClr val="1F2A37"/>
+                </a:solidFill>
+                <a:latin typeface="Microsoft YaHei"/>
+              </a:rPr>
+              <a:t>误报漏报代价比 1–100 内没有优势</a:t>
+            </a:r>
+          </a:p>
+        </p:txBody>
+      </p:sp>
+      <p:sp>
+        <p:nvSpPr>
+          <p:cNvPr id="12" name="TextBox 11"/>
+          <p:cNvSpPr txBox="1"/>
+          <p:nvPr/>
+        </p:nvSpPr>
+        <p:spPr>
+          <a:xfrm>
+            <a:off x="548640" y="3931920"/>
+            <a:ext cx="5394960" cy="411480"/>
+          </a:xfrm>
+          <a:prstGeom prst="rect">
+            <a:avLst/>
+          </a:prstGeom>
+          <a:noFill/>
+        </p:spPr>
+        <p:txBody>
+          <a:bodyPr wrap="square">
+            <a:spAutoFit/>
+          </a:bodyPr>
+          <a:lstStyle/>
+          <a:p>
+            <a:pPr algn="l">
+              <a:lnSpc>
+                <a:spcPct val="115000"/>
+              </a:lnSpc>
+            </a:pPr>
+            <a:r>
+              <a:rPr sz="1500" b="1">
+                <a:solidFill>
+                  <a:srgbClr val="C2410C"/>
+                </a:solidFill>
+                <a:latin typeface="Microsoft YaHei"/>
+              </a:rPr>
+              <a:t>开放集：三个未知族留出</a:t>
+            </a:r>
+          </a:p>
+        </p:txBody>
+      </p:sp>
+      <p:sp>
+        <p:nvSpPr>
+          <p:cNvPr id="13" name="TextBox 12"/>
+          <p:cNvSpPr txBox="1"/>
+          <p:nvPr/>
+        </p:nvSpPr>
+        <p:spPr>
+          <a:xfrm>
+            <a:off x="548640" y="4315968"/>
+            <a:ext cx="5394960" cy="320040"/>
+          </a:xfrm>
+          <a:prstGeom prst="rect">
+            <a:avLst/>
+          </a:prstGeom>
+          <a:noFill/>
+        </p:spPr>
+        <p:txBody>
+          <a:bodyPr wrap="square">
+            <a:spAutoFit/>
+          </a:bodyPr>
+          <a:lstStyle/>
+          <a:p>
+            <a:pPr algn="l">
+              <a:lnSpc>
+                <a:spcPct val="115000"/>
+              </a:lnSpc>
+            </a:pPr>
+            <a:r>
+              <a:rPr sz="1100" b="0">
+                <a:solidFill>
+                  <a:srgbClr val="6B7280"/>
+                </a:solidFill>
+                <a:latin typeface="Microsoft YaHei"/>
+              </a:rPr>
+              <a:t>PortScan / Infiltration / Heartbleed 作未知族</a:t>
+            </a:r>
+          </a:p>
+        </p:txBody>
+      </p:sp>
+      <p:sp>
+        <p:nvSpPr>
+          <p:cNvPr id="14" name="TextBox 13"/>
+          <p:cNvSpPr txBox="1"/>
+          <p:nvPr/>
+        </p:nvSpPr>
+        <p:spPr>
+          <a:xfrm>
+            <a:off x="548640" y="4617720"/>
+            <a:ext cx="5394960" cy="1371600"/>
+          </a:xfrm>
+          <a:prstGeom prst="rect">
+            <a:avLst/>
+          </a:prstGeom>
+          <a:noFill/>
+        </p:spPr>
+        <p:txBody>
+          <a:bodyPr wrap="square">
+            <a:spAutoFit/>
+          </a:bodyPr>
+          <a:lstStyle/>
+          <a:p>
+            <a:pPr algn="l">
+              <a:lnSpc>
+                <a:spcPct val="130000"/>
+              </a:lnSpc>
+            </a:pPr>
+            <a:r>
+              <a:rPr sz="1300" b="0">
+                <a:solidFill>
+                  <a:srgbClr val="1F2A37"/>
+                </a:solidFill>
+                <a:latin typeface="Microsoft YaHei"/>
+              </a:rPr>
+              <a:t>条件加权 AUROC 0.644–0.694，未知类召回 0.0015–0.0396</a:t>
+            </a:r>
+          </a:p>
+          <a:p>
+            <a:pPr algn="l">
+              <a:lnSpc>
+                <a:spcPct val="130000"/>
+              </a:lnSpc>
+            </a:pPr>
+            <a:r>
+              <a:rPr sz="1300" b="0">
+                <a:solidFill>
+                  <a:srgbClr val="1F2A37"/>
+                </a:solidFill>
+                <a:latin typeface="Microsoft YaHei"/>
+              </a:rPr>
+              <a:t>等权森林 AUROC 0.919–0.948，未知类召回 0.057–0.374</a:t>
+            </a:r>
+          </a:p>
+          <a:p>
+            <a:pPr algn="l">
+              <a:lnSpc>
+                <a:spcPct val="130000"/>
+              </a:lnSpc>
+            </a:pPr>
+            <a:r>
+              <a:rPr sz="1300" b="0">
+                <a:solidFill>
+                  <a:srgbClr val="1F2A37"/>
+                </a:solidFill>
+                <a:latin typeface="Microsoft YaHei"/>
+              </a:rPr>
+              <a:t>风险门控把概率推向高置信区，削弱了拒绝所需的不确定性信号。</a:t>
+            </a:r>
+          </a:p>
+        </p:txBody>
+      </p:sp>
+      <p:pic>
+        <p:nvPicPr>
+          <p:cNvPr id="15" name="Picture 14" descr="fig10_calibration_robustness.png"/>
+          <p:cNvPicPr>
+            <a:picLocks noChangeAspect="1"/>
+          </p:cNvPicPr>
+          <p:nvPr/>
+        </p:nvPicPr>
+        <p:blipFill>
+          <a:blip r:embed="rId2"/>
+          <a:stretch>
+            <a:fillRect/>
+          </a:stretch>
+        </p:blipFill>
+        <p:spPr>
+          <a:xfrm>
+            <a:off x="6172200" y="1737360"/>
+            <a:ext cx="2651760" cy="1023429"/>
+          </a:xfrm>
+          <a:prstGeom prst="rect">
+            <a:avLst/>
+          </a:prstGeom>
+        </p:spPr>
+      </p:pic>
+      <p:pic>
+        <p:nvPicPr>
+          <p:cNvPr id="16" name="Picture 15" descr="fig11_latency.png"/>
+          <p:cNvPicPr>
+            <a:picLocks noChangeAspect="1"/>
+          </p:cNvPicPr>
+          <p:nvPr/>
+        </p:nvPicPr>
+        <p:blipFill>
+          <a:blip r:embed="rId3"/>
+          <a:stretch>
+            <a:fillRect/>
+          </a:stretch>
+        </p:blipFill>
+        <p:spPr>
+          <a:xfrm>
+            <a:off x="9006840" y="1737360"/>
+            <a:ext cx="2651760" cy="1168528"/>
+          </a:xfrm>
+          <a:prstGeom prst="rect">
+            <a:avLst/>
+          </a:prstGeom>
+        </p:spPr>
+      </p:pic>
+      <p:sp>
+        <p:nvSpPr>
+          <p:cNvPr id="17" name="TextBox 16"/>
+          <p:cNvSpPr txBox="1"/>
+          <p:nvPr/>
+        </p:nvSpPr>
+        <p:spPr>
+          <a:xfrm>
+            <a:off x="6172200" y="4343400"/>
+            <a:ext cx="5486400" cy="1280160"/>
+          </a:xfrm>
+          <a:prstGeom prst="rect">
+            <a:avLst/>
+          </a:prstGeom>
+          <a:noFill/>
+        </p:spPr>
+        <p:txBody>
+          <a:bodyPr wrap="square">
+            <a:spAutoFit/>
+          </a:bodyPr>
+          <a:lstStyle/>
+          <a:p>
+            <a:pPr algn="l">
+              <a:lnSpc>
+                <a:spcPct val="115000"/>
+              </a:lnSpc>
+            </a:pPr>
+            <a:r>
+              <a:rPr sz="1200" b="0">
+                <a:solidFill>
+                  <a:srgbClr val="6B7280"/>
+                </a:solidFill>
+                <a:latin typeface="Microsoft YaHei"/>
+              </a:rPr>
+              <a:t>49 项自动检查持续复核这些数字；开放集与代价的每一项都能从公开的逐样本预测重算。</a:t>
+            </a:r>
+          </a:p>
+        </p:txBody>
+      </p:sp>
+      <p:sp>
+        <p:nvSpPr>
+          <p:cNvPr id="18" name="TextBox 17"/>
+          <p:cNvSpPr txBox="1"/>
+          <p:nvPr/>
+        </p:nvSpPr>
+        <p:spPr>
+          <a:xfrm>
+            <a:off x="548640" y="6400800"/>
+            <a:ext cx="8229600" cy="274320"/>
+          </a:xfrm>
+          <a:prstGeom prst="rect">
+            <a:avLst/>
+          </a:prstGeom>
+          <a:noFill/>
+        </p:spPr>
+        <p:txBody>
+          <a:bodyPr wrap="square">
+            <a:spAutoFit/>
+          </a:bodyPr>
+          <a:lstStyle/>
+          <a:p>
+            <a:pPr algn="l">
+              <a:lnSpc>
+                <a:spcPct val="115000"/>
+              </a:lnSpc>
+            </a:pPr>
+            <a:r>
+              <a:rPr sz="1000" b="0">
+                <a:solidFill>
+                  <a:srgbClr val="6B7280"/>
+                </a:solidFill>
+                <a:latin typeface="Microsoft YaHei"/>
+              </a:rPr>
+              <a:t>泄漏受控的条件集成加权研究 · v1.11.0 · 数字均取自发布产物</a:t>
+            </a:r>
+          </a:p>
+        </p:txBody>
+      </p:sp>
+      <p:sp>
+        <p:nvSpPr>
+          <p:cNvPr id="19" name="TextBox 18"/>
+          <p:cNvSpPr txBox="1"/>
+          <p:nvPr/>
+        </p:nvSpPr>
+        <p:spPr>
+          <a:xfrm>
+            <a:off x="11155680" y="6400800"/>
+            <a:ext cx="548640" cy="274320"/>
+          </a:xfrm>
+          <a:prstGeom prst="rect">
+            <a:avLst/>
+          </a:prstGeom>
+          <a:noFill/>
+        </p:spPr>
+        <p:txBody>
+          <a:bodyPr wrap="square">
+            <a:spAutoFit/>
+          </a:bodyPr>
+          <a:lstStyle/>
+          <a:p>
+            <a:pPr algn="r">
+              <a:lnSpc>
+                <a:spcPct val="115000"/>
+              </a:lnSpc>
+            </a:pPr>
+            <a:r>
+              <a:rPr sz="1000" b="0">
+                <a:solidFill>
+                  <a:srgbClr val="6B7280"/>
+                </a:solidFill>
+                <a:latin typeface="Microsoft YaHei"/>
+              </a:rPr>
+              <a:t>8</a:t>
+            </a:r>
+          </a:p>
+        </p:txBody>
+      </p:sp>
+    </p:spTree>
+  </p:cSld>
+  <p:clrMapOvr>
+    <a:masterClrMapping/>
+  </p:clrMapOvr>
+</p:sld>
+</file>
+
+<file path=ppt/slides/slide9.xml><?xml version="1.0" encoding="utf-8"?>
+<p:sld xmlns:a="http://schemas.openxmlformats.org/drawingml/2006/main" xmlns:p="http://schemas.openxmlformats.org/presentationml/2006/main" xmlns:r="http://schemas.openxmlformats.org/officeDocument/2006/relationships">
+  <p:cSld>
+    <p:spTree>
+      <p:nvGrpSpPr>
+        <p:cNvPr id="1" name=""/>
+        <p:cNvGrpSpPr/>
+        <p:nvPr/>
+      </p:nvGrpSpPr>
+      <p:grpSpPr/>
+      <p:sp>
+        <p:nvSpPr>
+          <p:cNvPr id="2" name="TextBox 1"/>
+          <p:cNvSpPr txBox="1"/>
+          <p:nvPr/>
+        </p:nvSpPr>
+        <p:spPr>
+          <a:xfrm>
+            <a:off x="548640" y="347472"/>
+            <a:ext cx="10972800" cy="310896"/>
+          </a:xfrm>
+          <a:prstGeom prst="rect">
+            <a:avLst/>
+          </a:prstGeom>
+          <a:noFill/>
+        </p:spPr>
+        <p:txBody>
+          <a:bodyPr wrap="square">
+            <a:spAutoFit/>
+          </a:bodyPr>
+          <a:lstStyle/>
+          <a:p>
+            <a:pPr algn="l">
+              <a:lnSpc>
+                <a:spcPct val="115000"/>
+              </a:lnSpc>
+            </a:pPr>
+            <a:r>
+              <a:rPr sz="1200" b="1">
+                <a:solidFill>
+                  <a:srgbClr val="1F6FEB"/>
+                </a:solidFill>
+                <a:latin typeface="Microsoft YaHei"/>
+              </a:rPr>
+              <a:t>稳健性</a:t>
+            </a:r>
+          </a:p>
+        </p:txBody>
+      </p:sp>
+      <p:sp>
+        <p:nvSpPr>
+          <p:cNvPr id="3" name="TextBox 2"/>
+          <p:cNvSpPr txBox="1"/>
+          <p:nvPr/>
+        </p:nvSpPr>
+        <p:spPr>
+          <a:xfrm>
+            <a:off x="548640" y="694944"/>
+            <a:ext cx="11064240" cy="731520"/>
+          </a:xfrm>
+          <a:prstGeom prst="rect">
+            <a:avLst/>
+          </a:prstGeom>
+          <a:noFill/>
+        </p:spPr>
+        <p:txBody>
+          <a:bodyPr wrap="square">
+            <a:spAutoFit/>
+          </a:bodyPr>
+          <a:lstStyle/>
+          <a:p>
+            <a:pPr algn="l">
+              <a:lnSpc>
+                <a:spcPct val="115000"/>
+              </a:lnSpc>
+            </a:pPr>
+            <a:r>
+              <a:rPr sz="2600" b="1">
+                <a:solidFill>
+                  <a:srgbClr val="1F2A37"/>
+                </a:solidFill>
+                <a:latin typeface="Microsoft YaHei"/>
+              </a:rPr>
+              <a:t>先验与语料换一遍，结论方向不变</a:t>
+            </a:r>
+          </a:p>
+        </p:txBody>
+      </p:sp>
+      <p:sp>
+        <p:nvSpPr>
+          <p:cNvPr id="4" name="Rectangle 3"/>
           <p:cNvSpPr/>
           <p:nvPr/>
         </p:nvSpPr>
         <p:spPr>
           <a:xfrm>
-            <a:off x="548640" y="1737360"/>
-            <a:ext cx="7223760" cy="2194560"/>
+            <a:off x="548640" y="1463040"/>
+            <a:ext cx="11064240" cy="15240"/>
           </a:xfrm>
           <a:prstGeom prst="rect">
             <a:avLst/>
           </a:prstGeom>
           <a:solidFill>
-            <a:srgbClr val="F3F5F7"/>
+            <a:srgbClr val="D1D5DB"/>
           </a:solidFill>
           <a:ln>
-            <a:solidFill>
-              <a:srgbClr val="F3F5F7"/>
-            </a:solidFill>
+            <a:noFill/>
           </a:ln>
           <a:effectLst/>
         </p:spPr>
@@ -9874,6 +13262,616 @@
           </a:p>
         </p:txBody>
       </p:sp>
+      <p:graphicFrame>
+        <p:nvGraphicFramePr>
+          <p:cNvPr id="5" name="Table 4"/>
+          <p:cNvGraphicFramePr>
+            <a:graphicFrameLocks noGrp="1"/>
+          </p:cNvGraphicFramePr>
+          <p:nvPr/>
+        </p:nvGraphicFramePr>
+        <p:xfrm>
+          <a:off x="548640" y="1691640"/>
+          <a:ext cx="11064240" cy="2103120"/>
+        </p:xfrm>
+        <a:graphic>
+          <a:graphicData uri="http://schemas.openxmlformats.org/drawingml/2006/table">
+            <a:tbl>
+              <a:tblPr firstRow="1" bandRow="1">
+                <a:tableStyleId>{5C22544A-7EE6-4342-B048-85BDC9FD1C3A}</a:tableStyleId>
+              </a:tblPr>
+              <a:tblGrid>
+                <a:gridCol w="2651760"/>
+                <a:gridCol w="1188720"/>
+                <a:gridCol w="1463040"/>
+                <a:gridCol w="1371600"/>
+                <a:gridCol w="1463040"/>
+                <a:gridCol w="2926080"/>
+              </a:tblGrid>
+              <a:tr h="420624">
+                <a:tc>
+                  <a:txBody>
+                    <a:bodyPr/>
+                    <a:lstStyle/>
+                    <a:p>
+                      <a:pPr algn="l"/>
+                      <a:r>
+                        <a:rPr sz="1100" b="1">
+                          <a:solidFill>
+                            <a:srgbClr val="1F2A37"/>
+                          </a:solidFill>
+                          <a:latin typeface="Microsoft YaHei"/>
+                        </a:rPr>
+                        <a:t>总体 / 基准</a:t>
+                      </a:r>
+                    </a:p>
+                  </a:txBody>
+                  <a:tcPr marL="45720" marR="45720"/>
+                </a:tc>
+                <a:tc>
+                  <a:txBody>
+                    <a:bodyPr/>
+                    <a:lstStyle/>
+                    <a:p>
+                      <a:pPr algn="r"/>
+                      <a:r>
+                        <a:rPr sz="1100" b="1">
+                          <a:solidFill>
+                            <a:srgbClr val="1F2A37"/>
+                          </a:solidFill>
+                          <a:latin typeface="Microsoft YaHei"/>
+                        </a:rPr>
+                        <a:t>测试行</a:t>
+                      </a:r>
+                    </a:p>
+                  </a:txBody>
+                  <a:tcPr marL="45720" marR="45720"/>
+                </a:tc>
+                <a:tc>
+                  <a:txBody>
+                    <a:bodyPr/>
+                    <a:lstStyle/>
+                    <a:p>
+                      <a:pPr algn="r"/>
+                      <a:r>
+                        <a:rPr sz="1100" b="1">
+                          <a:solidFill>
+                            <a:srgbClr val="1F2A37"/>
+                          </a:solidFill>
+                          <a:latin typeface="Microsoft YaHei"/>
+                        </a:rPr>
+                        <a:t>Macro-F1</a:t>
+                      </a:r>
+                    </a:p>
+                  </a:txBody>
+                  <a:tcPr marL="45720" marR="45720"/>
+                </a:tc>
+                <a:tc>
+                  <a:txBody>
+                    <a:bodyPr/>
+                    <a:lstStyle/>
+                    <a:p>
+                      <a:pPr algn="r"/>
+                      <a:r>
+                        <a:rPr sz="1100" b="1">
+                          <a:solidFill>
+                            <a:srgbClr val="1F2A37"/>
+                          </a:solidFill>
+                          <a:latin typeface="Microsoft YaHei"/>
+                        </a:rPr>
+                        <a:t>准确率</a:t>
+                      </a:r>
+                    </a:p>
+                  </a:txBody>
+                  <a:tcPr marL="45720" marR="45720"/>
+                </a:tc>
+                <a:tc>
+                  <a:txBody>
+                    <a:bodyPr/>
+                    <a:lstStyle/>
+                    <a:p>
+                      <a:pPr algn="r"/>
+                      <a:r>
+                        <a:rPr sz="1100" b="1">
+                          <a:solidFill>
+                            <a:srgbClr val="1F2A37"/>
+                          </a:solidFill>
+                          <a:latin typeface="Microsoft YaHei"/>
+                        </a:rPr>
+                        <a:t>平衡准确率</a:t>
+                      </a:r>
+                    </a:p>
+                  </a:txBody>
+                  <a:tcPr marL="45720" marR="45720"/>
+                </a:tc>
+                <a:tc>
+                  <a:txBody>
+                    <a:bodyPr/>
+                    <a:lstStyle/>
+                    <a:p>
+                      <a:pPr algn="l"/>
+                      <a:r>
+                        <a:rPr sz="1100" b="1">
+                          <a:solidFill>
+                            <a:srgbClr val="1F2A37"/>
+                          </a:solidFill>
+                          <a:latin typeface="Microsoft YaHei"/>
+                        </a:rPr>
+                        <a:t>读法</a:t>
+                      </a:r>
+                    </a:p>
+                  </a:txBody>
+                  <a:tcPr marL="45720" marR="45720"/>
+                </a:tc>
+              </a:tr>
+              <a:tr h="420624">
+                <a:tc>
+                  <a:txBody>
+                    <a:bodyPr/>
+                    <a:lstStyle/>
+                    <a:p>
+                      <a:pPr algn="l"/>
+                      <a:r>
+                        <a:rPr sz="1100" b="0">
+                          <a:solidFill>
+                            <a:srgbClr val="1F2A37"/>
+                          </a:solidFill>
+                          <a:latin typeface="Microsoft YaHei"/>
+                        </a:rPr>
+                        <a:t>平衡控制总体</a:t>
+                      </a:r>
+                    </a:p>
+                  </a:txBody>
+                  <a:tcPr marL="45720" marR="45720"/>
+                </a:tc>
+                <a:tc>
+                  <a:txBody>
+                    <a:bodyPr/>
+                    <a:lstStyle/>
+                    <a:p>
+                      <a:pPr algn="r"/>
+                      <a:r>
+                        <a:rPr sz="1100" b="0">
+                          <a:solidFill>
+                            <a:srgbClr val="1F2A37"/>
+                          </a:solidFill>
+                          <a:latin typeface="Microsoft YaHei"/>
+                        </a:rPr>
+                        <a:t>505</a:t>
+                      </a:r>
+                    </a:p>
+                  </a:txBody>
+                  <a:tcPr marL="45720" marR="45720"/>
+                </a:tc>
+                <a:tc>
+                  <a:txBody>
+                    <a:bodyPr/>
+                    <a:lstStyle/>
+                    <a:p>
+                      <a:pPr algn="r"/>
+                      <a:r>
+                        <a:rPr sz="1100" b="0">
+                          <a:solidFill>
+                            <a:srgbClr val="1F2A37"/>
+                          </a:solidFill>
+                          <a:latin typeface="Microsoft YaHei"/>
+                        </a:rPr>
+                        <a:t>0.961807</a:t>
+                      </a:r>
+                    </a:p>
+                  </a:txBody>
+                  <a:tcPr marL="45720" marR="45720"/>
+                </a:tc>
+                <a:tc>
+                  <a:txBody>
+                    <a:bodyPr/>
+                    <a:lstStyle/>
+                    <a:p>
+                      <a:pPr algn="r"/>
+                      <a:r>
+                        <a:rPr sz="1100" b="0">
+                          <a:solidFill>
+                            <a:srgbClr val="1F2A37"/>
+                          </a:solidFill>
+                          <a:latin typeface="Microsoft YaHei"/>
+                        </a:rPr>
+                        <a:t>—</a:t>
+                      </a:r>
+                    </a:p>
+                  </a:txBody>
+                  <a:tcPr marL="45720" marR="45720"/>
+                </a:tc>
+                <a:tc>
+                  <a:txBody>
+                    <a:bodyPr/>
+                    <a:lstStyle/>
+                    <a:p>
+                      <a:pPr algn="r"/>
+                      <a:r>
+                        <a:rPr sz="1100" b="0">
+                          <a:solidFill>
+                            <a:srgbClr val="1F2A37"/>
+                          </a:solidFill>
+                          <a:latin typeface="Microsoft YaHei"/>
+                        </a:rPr>
+                        <a:t>—</a:t>
+                      </a:r>
+                    </a:p>
+                  </a:txBody>
+                  <a:tcPr marL="45720" marR="45720"/>
+                </a:tc>
+                <a:tc>
+                  <a:txBody>
+                    <a:bodyPr/>
+                    <a:lstStyle/>
+                    <a:p>
+                      <a:pPr algn="l"/>
+                      <a:r>
+                        <a:rPr sz="1100" b="0">
+                          <a:solidFill>
+                            <a:srgbClr val="1F2A37"/>
+                          </a:solidFill>
+                          <a:latin typeface="Microsoft YaHei"/>
+                        </a:rPr>
+                        <a:t>比自然先验高 0.0725</a:t>
+                      </a:r>
+                    </a:p>
+                  </a:txBody>
+                  <a:tcPr marL="45720" marR="45720"/>
+                </a:tc>
+              </a:tr>
+              <a:tr h="420624">
+                <a:tc>
+                  <a:txBody>
+                    <a:bodyPr/>
+                    <a:lstStyle/>
+                    <a:p>
+                      <a:pPr algn="l"/>
+                      <a:r>
+                        <a:rPr sz="1100" b="0">
+                          <a:solidFill>
+                            <a:srgbClr val="1F2A37"/>
+                          </a:solidFill>
+                          <a:latin typeface="Microsoft YaHei"/>
+                        </a:rPr>
+                        <a:t>NSL-KDD（原生标签）</a:t>
+                      </a:r>
+                    </a:p>
+                  </a:txBody>
+                  <a:tcPr marL="45720" marR="45720"/>
+                </a:tc>
+                <a:tc>
+                  <a:txBody>
+                    <a:bodyPr/>
+                    <a:lstStyle/>
+                    <a:p>
+                      <a:pPr algn="r"/>
+                      <a:r>
+                        <a:rPr sz="1100" b="0">
+                          <a:solidFill>
+                            <a:srgbClr val="1F2A37"/>
+                          </a:solidFill>
+                          <a:latin typeface="Microsoft YaHei"/>
+                        </a:rPr>
+                        <a:t>22 544</a:t>
+                      </a:r>
+                    </a:p>
+                  </a:txBody>
+                  <a:tcPr marL="45720" marR="45720"/>
+                </a:tc>
+                <a:tc>
+                  <a:txBody>
+                    <a:bodyPr/>
+                    <a:lstStyle/>
+                    <a:p>
+                      <a:pPr algn="r"/>
+                      <a:r>
+                        <a:rPr sz="1100" b="0">
+                          <a:solidFill>
+                            <a:srgbClr val="1F2A37"/>
+                          </a:solidFill>
+                          <a:latin typeface="Microsoft YaHei"/>
+                        </a:rPr>
+                        <a:t>0.514697</a:t>
+                      </a:r>
+                    </a:p>
+                  </a:txBody>
+                  <a:tcPr marL="45720" marR="45720"/>
+                </a:tc>
+                <a:tc>
+                  <a:txBody>
+                    <a:bodyPr/>
+                    <a:lstStyle/>
+                    <a:p>
+                      <a:pPr algn="r"/>
+                      <a:r>
+                        <a:rPr sz="1100" b="0">
+                          <a:solidFill>
+                            <a:srgbClr val="1F2A37"/>
+                          </a:solidFill>
+                          <a:latin typeface="Microsoft YaHei"/>
+                        </a:rPr>
+                        <a:t>0.748</a:t>
+                      </a:r>
+                    </a:p>
+                  </a:txBody>
+                  <a:tcPr marL="45720" marR="45720"/>
+                </a:tc>
+                <a:tc>
+                  <a:txBody>
+                    <a:bodyPr/>
+                    <a:lstStyle/>
+                    <a:p>
+                      <a:pPr algn="r"/>
+                      <a:r>
+                        <a:rPr sz="1100" b="0">
+                          <a:solidFill>
+                            <a:srgbClr val="1F2A37"/>
+                          </a:solidFill>
+                          <a:latin typeface="Microsoft YaHei"/>
+                        </a:rPr>
+                        <a:t>0.493</a:t>
+                      </a:r>
+                    </a:p>
+                  </a:txBody>
+                  <a:tcPr marL="45720" marR="45720"/>
+                </a:tc>
+                <a:tc>
+                  <a:txBody>
+                    <a:bodyPr/>
+                    <a:lstStyle/>
+                    <a:p>
+                      <a:pPr algn="l"/>
+                      <a:r>
+                        <a:rPr sz="1100" b="0">
+                          <a:solidFill>
+                            <a:srgbClr val="1F2A37"/>
+                          </a:solidFill>
+                          <a:latin typeface="Microsoft YaHei"/>
+                        </a:rPr>
+                        <a:t>准确率靠多数类</a:t>
+                      </a:r>
+                    </a:p>
+                  </a:txBody>
+                  <a:tcPr marL="45720" marR="45720"/>
+                </a:tc>
+              </a:tr>
+              <a:tr h="420624">
+                <a:tc>
+                  <a:txBody>
+                    <a:bodyPr/>
+                    <a:lstStyle/>
+                    <a:p>
+                      <a:pPr algn="l"/>
+                      <a:r>
+                        <a:rPr sz="1100" b="0">
+                          <a:solidFill>
+                            <a:srgbClr val="1F2A37"/>
+                          </a:solidFill>
+                          <a:latin typeface="Microsoft YaHei"/>
+                        </a:rPr>
+                        <a:t>UNSW-NB15（原生标签）</a:t>
+                      </a:r>
+                    </a:p>
+                  </a:txBody>
+                  <a:tcPr marL="45720" marR="45720"/>
+                </a:tc>
+                <a:tc>
+                  <a:txBody>
+                    <a:bodyPr/>
+                    <a:lstStyle/>
+                    <a:p>
+                      <a:pPr algn="r"/>
+                      <a:r>
+                        <a:rPr sz="1100" b="0">
+                          <a:solidFill>
+                            <a:srgbClr val="1F2A37"/>
+                          </a:solidFill>
+                          <a:latin typeface="Microsoft YaHei"/>
+                        </a:rPr>
+                        <a:t>82 332</a:t>
+                      </a:r>
+                    </a:p>
+                  </a:txBody>
+                  <a:tcPr marL="45720" marR="45720"/>
+                </a:tc>
+                <a:tc>
+                  <a:txBody>
+                    <a:bodyPr/>
+                    <a:lstStyle/>
+                    <a:p>
+                      <a:pPr algn="r"/>
+                      <a:r>
+                        <a:rPr sz="1100" b="0">
+                          <a:solidFill>
+                            <a:srgbClr val="1F2A37"/>
+                          </a:solidFill>
+                          <a:latin typeface="Microsoft YaHei"/>
+                        </a:rPr>
+                        <a:t>0.493310</a:t>
+                      </a:r>
+                    </a:p>
+                  </a:txBody>
+                  <a:tcPr marL="45720" marR="45720"/>
+                </a:tc>
+                <a:tc>
+                  <a:txBody>
+                    <a:bodyPr/>
+                    <a:lstStyle/>
+                    <a:p>
+                      <a:pPr algn="r"/>
+                      <a:r>
+                        <a:rPr sz="1100" b="0">
+                          <a:solidFill>
+                            <a:srgbClr val="1F2A37"/>
+                          </a:solidFill>
+                          <a:latin typeface="Microsoft YaHei"/>
+                        </a:rPr>
+                        <a:t>0.715</a:t>
+                      </a:r>
+                    </a:p>
+                  </a:txBody>
+                  <a:tcPr marL="45720" marR="45720"/>
+                </a:tc>
+                <a:tc>
+                  <a:txBody>
+                    <a:bodyPr/>
+                    <a:lstStyle/>
+                    <a:p>
+                      <a:pPr algn="r"/>
+                      <a:r>
+                        <a:rPr sz="1100" b="0">
+                          <a:solidFill>
+                            <a:srgbClr val="1F2A37"/>
+                          </a:solidFill>
+                          <a:latin typeface="Microsoft YaHei"/>
+                        </a:rPr>
+                        <a:t>0.567</a:t>
+                      </a:r>
+                    </a:p>
+                  </a:txBody>
+                  <a:tcPr marL="45720" marR="45720"/>
+                </a:tc>
+                <a:tc>
+                  <a:txBody>
+                    <a:bodyPr/>
+                    <a:lstStyle/>
+                    <a:p>
+                      <a:pPr algn="l"/>
+                      <a:r>
+                        <a:rPr sz="1100" b="0">
+                          <a:solidFill>
+                            <a:srgbClr val="1F2A37"/>
+                          </a:solidFill>
+                          <a:latin typeface="Microsoft YaHei"/>
+                        </a:rPr>
+                        <a:t>独立语料、独立划分</a:t>
+                      </a:r>
+                    </a:p>
+                  </a:txBody>
+                  <a:tcPr marL="45720" marR="45720"/>
+                </a:tc>
+              </a:tr>
+              <a:tr h="420624">
+                <a:tc>
+                  <a:txBody>
+                    <a:bodyPr/>
+                    <a:lstStyle/>
+                    <a:p>
+                      <a:pPr algn="l"/>
+                      <a:r>
+                        <a:rPr sz="1100" b="0">
+                          <a:solidFill>
+                            <a:srgbClr val="1F2A37"/>
+                          </a:solidFill>
+                          <a:latin typeface="Microsoft YaHei"/>
+                        </a:rPr>
+                        <a:t>N-BaIoT（IoT 僵尸网络）</a:t>
+                      </a:r>
+                    </a:p>
+                  </a:txBody>
+                  <a:tcPr marL="45720" marR="45720"/>
+                </a:tc>
+                <a:tc>
+                  <a:txBody>
+                    <a:bodyPr/>
+                    <a:lstStyle/>
+                    <a:p>
+                      <a:pPr algn="r"/>
+                      <a:r>
+                        <a:rPr sz="1100" b="0">
+                          <a:solidFill>
+                            <a:srgbClr val="1F2A37"/>
+                          </a:solidFill>
+                          <a:latin typeface="Microsoft YaHei"/>
+                        </a:rPr>
+                        <a:t>27 000</a:t>
+                      </a:r>
+                    </a:p>
+                  </a:txBody>
+                  <a:tcPr marL="45720" marR="45720"/>
+                </a:tc>
+                <a:tc>
+                  <a:txBody>
+                    <a:bodyPr/>
+                    <a:lstStyle/>
+                    <a:p>
+                      <a:pPr algn="r"/>
+                      <a:r>
+                        <a:rPr sz="1100" b="0">
+                          <a:solidFill>
+                            <a:srgbClr val="1F2A37"/>
+                          </a:solidFill>
+                          <a:latin typeface="Microsoft YaHei"/>
+                        </a:rPr>
+                        <a:t>0.999988</a:t>
+                      </a:r>
+                    </a:p>
+                  </a:txBody>
+                  <a:tcPr marL="45720" marR="45720"/>
+                </a:tc>
+                <a:tc>
+                  <a:txBody>
+                    <a:bodyPr/>
+                    <a:lstStyle/>
+                    <a:p>
+                      <a:pPr algn="r"/>
+                      <a:r>
+                        <a:rPr sz="1100" b="0">
+                          <a:solidFill>
+                            <a:srgbClr val="1F2A37"/>
+                          </a:solidFill>
+                          <a:latin typeface="Microsoft YaHei"/>
+                        </a:rPr>
+                        <a:t>1.000</a:t>
+                      </a:r>
+                    </a:p>
+                  </a:txBody>
+                  <a:tcPr marL="45720" marR="45720"/>
+                </a:tc>
+                <a:tc>
+                  <a:txBody>
+                    <a:bodyPr/>
+                    <a:lstStyle/>
+                    <a:p>
+                      <a:pPr algn="r"/>
+                      <a:r>
+                        <a:rPr sz="1100" b="0">
+                          <a:solidFill>
+                            <a:srgbClr val="1F2A37"/>
+                          </a:solidFill>
+                          <a:latin typeface="Microsoft YaHei"/>
+                        </a:rPr>
+                        <a:t>1.000</a:t>
+                      </a:r>
+                    </a:p>
+                  </a:txBody>
+                  <a:tcPr marL="45720" marR="45720"/>
+                </a:tc>
+                <a:tc>
+                  <a:txBody>
+                    <a:bodyPr/>
+                    <a:lstStyle/>
+                    <a:p>
+                      <a:pPr algn="l"/>
+                      <a:r>
+                        <a:rPr sz="1100" b="0">
+                          <a:solidFill>
+                            <a:srgbClr val="1F2A37"/>
+                          </a:solidFill>
+                          <a:latin typeface="Microsoft YaHei"/>
+                        </a:rPr>
+                        <a:t>已饱和：检验机制惰性</a:t>
+                      </a:r>
+                    </a:p>
+                  </a:txBody>
+                  <a:tcPr marL="45720" marR="45720"/>
+                </a:tc>
+              </a:tr>
+            </a:tbl>
+          </a:graphicData>
+        </a:graphic>
+      </p:graphicFrame>
       <p:sp>
         <p:nvSpPr>
           <p:cNvPr id="6" name="TextBox 5"/>
@@ -9882,8 +13880,8 @@
         </p:nvSpPr>
         <p:spPr>
           <a:xfrm>
-            <a:off x="822960" y="1965960"/>
-            <a:ext cx="6675120" cy="1828800"/>
+            <a:off x="548640" y="3977639"/>
+            <a:ext cx="10972800" cy="2194560"/>
           </a:xfrm>
           <a:prstGeom prst="rect">
             <a:avLst/>
@@ -9898,49 +13896,49 @@
           <a:p>
             <a:pPr algn="l">
               <a:lnSpc>
-                <a:spcPct val="140000"/>
-              </a:lnSpc>
-            </a:pPr>
-            <a:r>
-              <a:rPr sz="1500" b="0">
+                <a:spcPct val="135000"/>
+              </a:lnSpc>
+            </a:pPr>
+            <a:r>
+              <a:rPr sz="1300" b="0">
                 <a:solidFill>
                   <a:srgbClr val="1F2A37"/>
                 </a:solidFill>
                 <a:latin typeface="Microsoft YaHei"/>
               </a:rPr>
-              <a:t>1. 在流特征公开数据上，条件加权相对等权投票**未观测到判别增益**；</a:t>
-            </a:r>
-          </a:p>
-          <a:p>
-            <a:pPr algn="l">
-              <a:lnSpc>
-                <a:spcPct val="140000"/>
-              </a:lnSpc>
-            </a:pPr>
-            <a:r>
-              <a:rPr sz="1500" b="0">
+              <a:t>· 类别先验是最大的单一效应：平衡控制 0.961807 对自然先验 0.889278，差 0.0725；</a:t>
+            </a:r>
+          </a:p>
+          <a:p>
+            <a:pPr algn="l">
+              <a:lnSpc>
+                <a:spcPct val="135000"/>
+              </a:lnSpc>
+            </a:pPr>
+            <a:r>
+              <a:rPr sz="1300" b="0">
                 <a:solidFill>
                   <a:srgbClr val="1F2A37"/>
                 </a:solidFill>
                 <a:latin typeface="Microsoft YaHei"/>
               </a:rPr>
-              <a:t>2. 全语料上的劣势来自成员稀释，可由成员分差直接算出；</a:t>
-            </a:r>
-          </a:p>
-          <a:p>
-            <a:pPr algn="l">
-              <a:lnSpc>
-                <a:spcPct val="140000"/>
-              </a:lnSpc>
-            </a:pPr>
-            <a:r>
-              <a:rPr sz="1500" b="0">
+              <a:t>· 文件级外推：把周一到周五的每个原始文件当留出集，已知类 Macro-F1 覆盖 0.3325–0.9997，文件之间的差异比聚合规则差异大两到三个数量级；</a:t>
+            </a:r>
+          </a:p>
+          <a:p>
+            <a:pPr algn="l">
+              <a:lnSpc>
+                <a:spcPct val="135000"/>
+              </a:lnSpc>
+            </a:pPr>
+            <a:r>
+              <a:rPr sz="1300" b="0">
                 <a:solidFill>
                   <a:srgbClr val="1F2A37"/>
                 </a:solidFill>
                 <a:latin typeface="Microsoft YaHei"/>
               </a:rPr>
-              <a:t>3. 协议选择（先验 +0.0725、去重顺序 ≤0.0060）比聚合规则差异（0.0005 量级）大一个数量级，模型族差异更大（MLP 落后 0.0916）。</a:t>
+              <a:t>· 三个外部语料用各自原生标签，不重采样、不跨语料迁移，因此只能作为「结论方向不随语料改变」的旁证，不能当作迁移实验。</a:t>
             </a:r>
           </a:p>
         </p:txBody>
@@ -9953,8 +13951,8 @@
         </p:nvSpPr>
         <p:spPr>
           <a:xfrm>
-            <a:off x="548640" y="4114800"/>
-            <a:ext cx="7223760" cy="1645920"/>
+            <a:off x="548640" y="6400800"/>
+            <a:ext cx="8229600" cy="274320"/>
           </a:xfrm>
           <a:prstGeom prst="rect">
             <a:avLst/>
@@ -9969,77 +13967,31 @@
           <a:p>
             <a:pPr algn="l">
               <a:lnSpc>
-                <a:spcPct val="130000"/>
-              </a:lnSpc>
-            </a:pPr>
-            <a:r>
-              <a:rPr sz="1300" b="0">
+                <a:spcPct val="115000"/>
+              </a:lnSpc>
+            </a:pPr>
+            <a:r>
+              <a:rPr sz="1000" b="0">
                 <a:solidFill>
                   <a:srgbClr val="6B7280"/>
                 </a:solidFill>
                 <a:latin typeface="Microsoft YaHei"/>
               </a:rPr>
-              <a:t>边界：四个语料都不是生产流量；文件级实验不是时间外推；开放集只覆盖三个未知族与一个显著性水平；对抗性规避未评估。</a:t>
-            </a:r>
-          </a:p>
-        </p:txBody>
-      </p:sp>
-      <p:sp>
-        <p:nvSpPr>
-          <p:cNvPr id="8" name="Rectangle 7"/>
-          <p:cNvSpPr/>
-          <p:nvPr/>
-        </p:nvSpPr>
-        <p:spPr>
-          <a:xfrm>
-            <a:off x="8092440" y="1737360"/>
-            <a:ext cx="3566160" cy="2194560"/>
-          </a:xfrm>
-          <a:prstGeom prst="rect">
-            <a:avLst/>
-          </a:prstGeom>
-          <a:solidFill>
-            <a:srgbClr val="F3F5F7"/>
-          </a:solidFill>
-          <a:ln>
-            <a:solidFill>
-              <a:srgbClr val="F3F5F7"/>
-            </a:solidFill>
-          </a:ln>
-          <a:effectLst/>
-        </p:spPr>
-        <p:style>
-          <a:lnRef idx="1">
-            <a:schemeClr val="accent1"/>
-          </a:lnRef>
-          <a:fillRef idx="3">
-            <a:schemeClr val="accent1"/>
-          </a:fillRef>
-          <a:effectRef idx="2">
-            <a:schemeClr val="accent1"/>
-          </a:effectRef>
-          <a:fontRef idx="minor">
-            <a:schemeClr val="lt1"/>
-          </a:fontRef>
-        </p:style>
-        <p:txBody>
-          <a:bodyPr rtlCol="0" anchor="ctr"/>
-          <a:lstStyle/>
-          <a:p>
-            <a:pPr algn="ctr"/>
-          </a:p>
-        </p:txBody>
-      </p:sp>
-      <p:sp>
-        <p:nvSpPr>
-          <p:cNvPr id="9" name="TextBox 8"/>
+              <a:t>泄漏受控的条件集成加权研究 · v1.11.0 · 数字均取自发布产物</a:t>
+            </a:r>
+          </a:p>
+        </p:txBody>
+      </p:sp>
+      <p:sp>
+        <p:nvSpPr>
+          <p:cNvPr id="8" name="TextBox 7"/>
           <p:cNvSpPr txBox="1"/>
           <p:nvPr/>
         </p:nvSpPr>
         <p:spPr>
           <a:xfrm>
-            <a:off x="8321040" y="1965960"/>
-            <a:ext cx="3108960" cy="1828800"/>
+            <a:off x="11155680" y="6400800"/>
+            <a:ext cx="548640" cy="274320"/>
           </a:xfrm>
           <a:prstGeom prst="rect">
             <a:avLst/>
@@ -10052,191 +14004,19 @@
           </a:bodyPr>
           <a:lstStyle/>
           <a:p>
-            <a:pPr algn="l">
-              <a:lnSpc>
-                <a:spcPct val="130000"/>
-              </a:lnSpc>
-            </a:pPr>
-            <a:r>
-              <a:rPr sz="1300" b="0">
-                <a:solidFill>
-                  <a:srgbClr val="1F2A37"/>
-                </a:solidFill>
-                <a:latin typeface="Microsoft YaHei"/>
-              </a:rPr>
-              <a:t>下一步</a:t>
-            </a:r>
-          </a:p>
-          <a:p>
-            <a:pPr algn="l">
-              <a:lnSpc>
-                <a:spcPct val="130000"/>
-              </a:lnSpc>
-            </a:pPr>
-          </a:p>
-          <a:p>
-            <a:pPr algn="l">
-              <a:lnSpc>
-                <a:spcPct val="130000"/>
-              </a:lnSpc>
-            </a:pPr>
-            <a:r>
-              <a:rPr sz="1300" b="0">
-                <a:solidFill>
-                  <a:srgbClr val="1F2A37"/>
-                </a:solidFill>
-                <a:latin typeface="Microsoft YaHei"/>
-              </a:rPr>
-              <a:t>① 显式强制专家去相关的加权机制</a:t>
-            </a:r>
-          </a:p>
-          <a:p>
-            <a:pPr algn="l">
-              <a:lnSpc>
-                <a:spcPct val="130000"/>
-              </a:lnSpc>
-            </a:pPr>
-            <a:r>
-              <a:rPr sz="1300" b="0">
-                <a:solidFill>
-                  <a:srgbClr val="1F2A37"/>
-                </a:solidFill>
-                <a:latin typeface="Microsoft YaHei"/>
-              </a:rPr>
-              <a:t>② 跨时段/跨场景的完整类别协议</a:t>
-            </a:r>
-          </a:p>
-          <a:p>
-            <a:pPr algn="l">
-              <a:lnSpc>
-                <a:spcPct val="130000"/>
-              </a:lnSpc>
-            </a:pPr>
-            <a:r>
-              <a:rPr sz="1300" b="0">
-                <a:solidFill>
-                  <a:srgbClr val="1F2A37"/>
-                </a:solidFill>
-                <a:latin typeface="Microsoft YaHei"/>
-              </a:rPr>
-              <a:t>③ 把报告建议做成可自动检查的清单</a:t>
-            </a:r>
-          </a:p>
-        </p:txBody>
-      </p:sp>
-      <p:sp>
-        <p:nvSpPr>
-          <p:cNvPr id="10" name="TextBox 9"/>
-          <p:cNvSpPr txBox="1"/>
-          <p:nvPr/>
-        </p:nvSpPr>
-        <p:spPr>
-          <a:xfrm>
-            <a:off x="8092440" y="4114800"/>
-            <a:ext cx="3566160" cy="1645920"/>
-          </a:xfrm>
-          <a:prstGeom prst="rect">
-            <a:avLst/>
-          </a:prstGeom>
-          <a:noFill/>
-        </p:spPr>
-        <p:txBody>
-          <a:bodyPr wrap="square">
-            <a:spAutoFit/>
-          </a:bodyPr>
-          <a:lstStyle/>
-          <a:p>
-            <a:pPr algn="l">
+            <a:pPr algn="r">
               <a:lnSpc>
                 <a:spcPct val="115000"/>
               </a:lnSpc>
             </a:pPr>
             <a:r>
-              <a:rPr sz="1200" b="0">
+              <a:rPr sz="1000" b="0">
                 <a:solidFill>
                   <a:srgbClr val="6B7280"/>
                 </a:solidFill>
                 <a:latin typeface="Microsoft YaHei"/>
               </a:rPr>
-              <a:t>材料：论文介绍（两页）· 汇报要点 · 正式稿件（中英）· 补充材料 S01–S30 · 公开仓库 tag v1.11.0</a:t>
-            </a:r>
-          </a:p>
-        </p:txBody>
-      </p:sp>
-      <p:sp>
-        <p:nvSpPr>
-          <p:cNvPr id="11" name="TextBox 10"/>
-          <p:cNvSpPr txBox="1"/>
-          <p:nvPr/>
-        </p:nvSpPr>
-        <p:spPr>
-          <a:xfrm>
-            <a:off x="548640" y="6400800"/>
-            <a:ext cx="8229600" cy="274320"/>
-          </a:xfrm>
-          <a:prstGeom prst="rect">
-            <a:avLst/>
-          </a:prstGeom>
-          <a:noFill/>
-        </p:spPr>
-        <p:txBody>
-          <a:bodyPr wrap="square">
-            <a:spAutoFit/>
-          </a:bodyPr>
-          <a:lstStyle/>
-          <a:p>
-            <a:pPr algn="l">
-              <a:lnSpc>
-                <a:spcPct val="115000"/>
-              </a:lnSpc>
-            </a:pPr>
-            <a:r>
-              <a:rPr sz="1000" b="0">
-                <a:solidFill>
-                  <a:srgbClr val="6B7280"/>
-                </a:solidFill>
-                <a:latin typeface="Microsoft YaHei"/>
-              </a:rPr>
-              <a:t>泄漏受控的条件集成加权研究 · v1.11.0 · 数字均取自发布产物</a:t>
-            </a:r>
-          </a:p>
-        </p:txBody>
-      </p:sp>
-      <p:sp>
-        <p:nvSpPr>
-          <p:cNvPr id="12" name="TextBox 11"/>
-          <p:cNvSpPr txBox="1"/>
-          <p:nvPr/>
-        </p:nvSpPr>
-        <p:spPr>
-          <a:xfrm>
-            <a:off x="11155680" y="6400800"/>
-            <a:ext cx="548640" cy="274320"/>
-          </a:xfrm>
-          <a:prstGeom prst="rect">
-            <a:avLst/>
-          </a:prstGeom>
-          <a:noFill/>
-        </p:spPr>
-        <p:txBody>
-          <a:bodyPr wrap="square">
-            <a:spAutoFit/>
-          </a:bodyPr>
-          <a:lstStyle/>
-          <a:p>
-            <a:pPr algn="r">
-              <a:lnSpc>
-                <a:spcPct val="115000"/>
-              </a:lnSpc>
-            </a:pPr>
-            <a:r>
-              <a:rPr sz="1000" b="0">
-                <a:solidFill>
-                  <a:srgbClr val="6B7280"/>
-                </a:solidFill>
-                <a:latin typeface="Microsoft YaHei"/>
-              </a:rPr>
-              <a:t>8</a:t>
+              <a:t>9</a:t>
             </a:r>
           </a:p>
         </p:txBody>

--- a/重构版论文_v4_20260915/汇报用_论文介绍.pptx
+++ b/重构版论文_v4_20260915/汇报用_论文介绍.pptx
@@ -863,7 +863,7 @@
           <a:lstStyle/>
           <a:p>
             <a:r>
-              <a:t>六阶段审计的每一步都有计数与产物记录；外部三个语料是独立原生标签基准；主实验十个种子。特别强调：49 项检查与逐样本预测都公开，审稿时可直接重算。</a:t>
+              <a:t>六阶段审计的每一步都有计数与产物记录；外部三个语料是独立原生标签基准；主实验十个种子。特别强调：50 项检查与逐样本预测都公开，审稿时可直接重算。</a:t>
             </a:r>
           </a:p>
         </p:txBody>
@@ -6863,7 +6863,7 @@
                 </a:solidFill>
                 <a:latin typeface="Microsoft YaHei"/>
               </a:rPr>
-              <a:t>仓库：v1.11.0 标签 · 逐样本预测 722 个 · 补充材料 S01–S30 · 投稿包 154 个文件</a:t>
+              <a:t>仓库：v1.11.0 标签 · 逐样本预测 722 个 · 补充材料 S01–S30 · 投稿包 213 个文件</a:t>
             </a:r>
           </a:p>
         </p:txBody>
@@ -6948,7 +6948,7 @@
                 </a:solidFill>
                 <a:latin typeface="Microsoft YaHei"/>
               </a:rPr>
-              <a:t>49 项自动检查覆盖四类风险：</a:t>
+              <a:t>50 项自动检查覆盖四类风险：</a:t>
             </a:r>
           </a:p>
           <a:p>
@@ -9147,7 +9147,7 @@
                 </a:solidFill>
                 <a:latin typeface="Microsoft YaHei"/>
               </a:rPr>
-              <a:t>49 项自动检查全绿；722 个逐样本预测公开；仓库带 tag v1.11.0</a:t>
+              <a:t>50 项自动检查全绿；722 个逐样本预测公开；仓库带 tag v1.11.0</a:t>
             </a:r>
           </a:p>
         </p:txBody>
@@ -13039,7 +13039,7 @@
                 </a:solidFill>
                 <a:latin typeface="Microsoft YaHei"/>
               </a:rPr>
-              <a:t>49 项自动检查持续复核这些数字；开放集与代价的每一项都能从公开的逐样本预测重算。</a:t>
+              <a:t>50 项自动检查持续复核这些数字；开放集与代价的每一项都能从公开的逐样本预测重算。</a:t>
             </a:r>
           </a:p>
         </p:txBody>

--- a/重构版论文_v4_20260915/汇报用_论文介绍.pptx
+++ b/重构版论文_v4_20260915/汇报用_论文介绍.pptx
@@ -863,7 +863,7 @@
           <a:lstStyle/>
           <a:p>
             <a:r>
-              <a:t>六阶段审计的每一步都有计数与产物记录；外部三个语料是独立原生标签基准；主实验十个种子。特别强调：50 项检查与逐样本预测都公开，审稿时可直接重算。</a:t>
+              <a:t>六阶段审计的每一步都有计数与产物记录；外部三个语料是独立原生标签基准；主实验十个种子。特别强调：51 项检查与逐样本预测都公开，审稿时可直接重算。</a:t>
             </a:r>
           </a:p>
         </p:txBody>
@@ -6863,7 +6863,7 @@
                 </a:solidFill>
                 <a:latin typeface="Microsoft YaHei"/>
               </a:rPr>
-              <a:t>仓库：v1.11.0 标签 · 逐样本预测 722 个 · 补充材料 S01–S30 · 投稿包 213 个文件</a:t>
+              <a:t>仓库：v1.11.0 标签 · 逐样本预测 722 个 · 补充材料 S01–S30 · 投稿包 781 个文件</a:t>
             </a:r>
           </a:p>
         </p:txBody>
@@ -6948,7 +6948,7 @@
                 </a:solidFill>
                 <a:latin typeface="Microsoft YaHei"/>
               </a:rPr>
-              <a:t>50 项自动检查覆盖四类风险：</a:t>
+              <a:t>51 项自动检查覆盖四类风险：</a:t>
             </a:r>
           </a:p>
           <a:p>
@@ -9147,7 +9147,7 @@
                 </a:solidFill>
                 <a:latin typeface="Microsoft YaHei"/>
               </a:rPr>
-              <a:t>50 项自动检查全绿；722 个逐样本预测公开；仓库带 tag v1.11.0</a:t>
+              <a:t>51 项自动检查全绿；722 个逐样本预测公开；仓库带 tag v1.11.0</a:t>
             </a:r>
           </a:p>
         </p:txBody>
@@ -13039,7 +13039,7 @@
                 </a:solidFill>
                 <a:latin typeface="Microsoft YaHei"/>
               </a:rPr>
-              <a:t>50 项自动检查持续复核这些数字；开放集与代价的每一项都能从公开的逐样本预测重算。</a:t>
+              <a:t>51 项自动检查持续复核这些数字；开放集与代价的每一项都能从公开的逐样本预测重算。</a:t>
             </a:r>
           </a:p>
         </p:txBody>

--- a/重构版论文_v4_20260915/汇报用_论文介绍.pptx
+++ b/重构版论文_v4_20260915/汇报用_论文介绍.pptx
@@ -863,7 +863,7 @@
           <a:lstStyle/>
           <a:p>
             <a:r>
-              <a:t>六阶段审计的每一步都有计数与产物记录；外部三个语料是独立原生标签基准；主实验十个种子。特别强调：51 项检查与逐样本预测都公开，审稿时可直接重算。</a:t>
+              <a:t>六阶段审计的每一步都有计数与产物记录；外部三个语料是独立原生标签基准；主实验十个种子。特别强调：52 项检查与逐样本预测都公开，审稿时可直接重算。</a:t>
             </a:r>
           </a:p>
         </p:txBody>
@@ -6863,7 +6863,7 @@
                 </a:solidFill>
                 <a:latin typeface="Microsoft YaHei"/>
               </a:rPr>
-              <a:t>仓库：v1.11.0 标签 · 逐样本预测 722 个 · 补充材料 S01–S30 · 投稿包 781 个文件</a:t>
+              <a:t>仓库：v1.11.0 标签 · 逐样本预测 722 个 · 补充材料 S01–S30 · 投稿包 787 个文件</a:t>
             </a:r>
           </a:p>
         </p:txBody>
@@ -6948,7 +6948,7 @@
                 </a:solidFill>
                 <a:latin typeface="Microsoft YaHei"/>
               </a:rPr>
-              <a:t>51 项自动检查覆盖四类风险：</a:t>
+              <a:t>52 项自动检查覆盖四类风险：</a:t>
             </a:r>
           </a:p>
           <a:p>
@@ -9147,7 +9147,7 @@
                 </a:solidFill>
                 <a:latin typeface="Microsoft YaHei"/>
               </a:rPr>
-              <a:t>51 项自动检查全绿；722 个逐样本预测公开；仓库带 tag v1.11.0</a:t>
+              <a:t>52 项自动检查全绿；722 个逐样本预测公开；仓库带 tag v1.11.0</a:t>
             </a:r>
           </a:p>
         </p:txBody>
@@ -13039,7 +13039,7 @@
                 </a:solidFill>
                 <a:latin typeface="Microsoft YaHei"/>
               </a:rPr>
-              <a:t>51 项自动检查持续复核这些数字；开放集与代价的每一项都能从公开的逐样本预测重算。</a:t>
+              <a:t>52 项自动检查持续复核这些数字；开放集与代价的每一项都能从公开的逐样本预测重算。</a:t>
             </a:r>
           </a:p>
         </p:txBody>

--- a/重构版论文_v4_20260915/汇报用_论文介绍.pptx
+++ b/重构版论文_v4_20260915/汇报用_论文介绍.pptx
@@ -6863,7 +6863,7 @@
                 </a:solidFill>
                 <a:latin typeface="Microsoft YaHei"/>
               </a:rPr>
-              <a:t>仓库：v1.11.0 标签 · 逐样本预测 722 个 · 补充材料 S01–S30 · 投稿包 787 个文件</a:t>
+              <a:t>仓库：v1.11.0 标签 · 逐样本预测 722 个 · 补充材料 S01–S30 · 投稿包 793 个文件</a:t>
             </a:r>
           </a:p>
         </p:txBody>
@@ -11728,7 +11728,7 @@
                 </a:solidFill>
                 <a:latin typeface="Microsoft YaHei"/>
               </a:rPr>
-              <a:t>增益由专家多样性支配：分歧率 0.20%–0.36% 的专家集合 6 次运行增益恰好为 0；刻意去相关的三类集合 9 次运行全为正（斜率 0.0646，r = 0.749）。</a:t>
+              <a:t>增益与专家多样性同步变化（十五个配置的剂量—反应，属相关性证据）：分歧率 0.20%–0.36% 的专家集合 6 次运行增益恰好为 0；刻意去相关的三类集合 9 次运行全为正（斜率 0.0646，r = 0.749）。</a:t>
             </a:r>
           </a:p>
         </p:txBody>
@@ -12647,7 +12647,7 @@
                 </a:solidFill>
                 <a:latin typeface="Microsoft YaHei"/>
               </a:rPr>
-              <a:t>截断约 80 倍，全语料 175 倍</a:t>
+              <a:t>截断约 80 倍，全语料 175 倍（十种子均值）</a:t>
             </a:r>
           </a:p>
         </p:txBody>
@@ -12725,7 +12725,7 @@
                 </a:solidFill>
                 <a:latin typeface="Microsoft YaHei"/>
               </a:rPr>
-              <a:t>4.1 倍（9.09 MB vs 2.21 MB）</a:t>
+              <a:t>4.1 倍（9.09 MB vs 2.21 MB，单种子画像）</a:t>
             </a:r>
           </a:p>
         </p:txBody>

--- a/重构版论文_v4_20260915/汇报用_论文介绍.pptx
+++ b/重构版论文_v4_20260915/汇报用_论文介绍.pptx
@@ -863,7 +863,7 @@
           <a:lstStyle/>
           <a:p>
             <a:r>
-              <a:t>六阶段审计的每一步都有计数与产物记录；外部三个语料是独立原生标签基准；主实验十个种子。特别强调：52 项检查与逐样本预测都公开，审稿时可直接重算。</a:t>
+              <a:t>六阶段审计的每一步都有计数与产物记录；外部三个语料是独立原生标签基准；主实验十个种子。特别强调：53 项检查与逐样本预测都公开，审稿时可直接重算。</a:t>
             </a:r>
           </a:p>
         </p:txBody>
@@ -6863,7 +6863,7 @@
                 </a:solidFill>
                 <a:latin typeface="Microsoft YaHei"/>
               </a:rPr>
-              <a:t>仓库：v1.11.0 标签 · 逐样本预测 722 个 · 补充材料 S01–S30 · 投稿包 793 个文件</a:t>
+              <a:t>仓库：v1.11.0 标签 · 逐样本预测 722 个 · 补充材料 S01–S30 · 投稿包 829 个文件</a:t>
             </a:r>
           </a:p>
         </p:txBody>
@@ -6948,7 +6948,7 @@
                 </a:solidFill>
                 <a:latin typeface="Microsoft YaHei"/>
               </a:rPr>
-              <a:t>52 项自动检查覆盖四类风险：</a:t>
+              <a:t>53 项自动检查覆盖四类风险：</a:t>
             </a:r>
           </a:p>
           <a:p>
@@ -9147,7 +9147,7 @@
                 </a:solidFill>
                 <a:latin typeface="Microsoft YaHei"/>
               </a:rPr>
-              <a:t>52 项自动检查全绿；722 个逐样本预测公开；仓库带 tag v1.11.0</a:t>
+              <a:t>53 项自动检查全绿；722 个逐样本预测公开；仓库带 tag v1.11.0</a:t>
             </a:r>
           </a:p>
         </p:txBody>
@@ -13039,7 +13039,7 @@
                 </a:solidFill>
                 <a:latin typeface="Microsoft YaHei"/>
               </a:rPr>
-              <a:t>52 项自动检查持续复核这些数字；开放集与代价的每一项都能从公开的逐样本预测重算。</a:t>
+              <a:t>53 项自动检查持续复核这些数字；开放集与代价的每一项都能从公开的逐样本预测重算。</a:t>
             </a:r>
           </a:p>
         </p:txBody>

--- a/重构版论文_v4_20260915/汇报用_论文介绍.pptx
+++ b/重构版论文_v4_20260915/汇报用_论文介绍.pptx
@@ -6863,7 +6863,7 @@
                 </a:solidFill>
                 <a:latin typeface="Microsoft YaHei"/>
               </a:rPr>
-              <a:t>仓库：v1.11.0 标签 · 逐样本预测 722 个 · 补充材料 S01–S30 · 投稿包 829 个文件</a:t>
+              <a:t>仓库：v1.11.0 标签 · 逐样本预测 722 个 · 补充材料 S01–S30 · 投稿包 854 个文件</a:t>
             </a:r>
           </a:p>
         </p:txBody>

--- a/重构版论文_v4_20260915/汇报用_论文介绍.pptx
+++ b/重构版论文_v4_20260915/汇报用_论文介绍.pptx
@@ -6863,7 +6863,7 @@
                 </a:solidFill>
                 <a:latin typeface="Microsoft YaHei"/>
               </a:rPr>
-              <a:t>仓库：v1.11.0 标签 · 逐样本预测 722 个 · 补充材料 S01–S30 · 投稿包 854 个文件</a:t>
+              <a:t>仓库：v1.11.0 标签 · 逐样本预测 722 个 · 补充材料 S01–S30 · 投稿包 873 个文件</a:t>
             </a:r>
           </a:p>
         </p:txBody>
@@ -8008,7 +8008,7 @@
                 </a:solidFill>
                 <a:latin typeface="Microsoft YaHei"/>
               </a:rPr>
-              <a:t>六阶段审计 + 四个语料 + 十个种子</a:t>
+              <a:t>六阶段审计 + 13 个语料 + 十个种子</a:t>
             </a:r>
           </a:p>
         </p:txBody>
@@ -13938,7 +13938,23 @@
                 </a:solidFill>
                 <a:latin typeface="Microsoft YaHei"/>
               </a:rPr>
-              <a:t>· 三个外部语料用各自原生标签，不重采样、不跨语料迁移，因此只能作为「结论方向不随语料改变」的旁证，不能当作迁移实验。</a:t>
+              <a:t>· 三个外部语料用各自原生标签，不重采样、不跨语料迁移，因此只能作为「结论方向不随语料改变」的旁证，不能当作迁移实验；</a:t>
+            </a:r>
+          </a:p>
+          <a:p>
+            <a:pPr algn="l">
+              <a:lnSpc>
+                <a:spcPct val="135000"/>
+              </a:lnSpc>
+            </a:pPr>
+            <a:r>
+              <a:rPr sz="1300" b="0">
+                <a:solidFill>
+                  <a:srgbClr val="1F2A37"/>
+                </a:solidFill>
+                <a:latin typeface="Microsoft YaHei"/>
+              </a:rPr>
+              <a:t>· 语料年代：13 个语料里八个发布于 2020 年及以后，其中三份发布于 2025 年，差值与上表同量级（见《向老师汇报要点》Q5）。</a:t>
             </a:r>
           </a:p>
         </p:txBody>

--- a/重构版论文_v4_20260915/汇报用_论文介绍.pptx
+++ b/重构版论文_v4_20260915/汇报用_论文介绍.pptx
@@ -6863,7 +6863,7 @@
                 </a:solidFill>
                 <a:latin typeface="Microsoft YaHei"/>
               </a:rPr>
-              <a:t>仓库：v1.11.0 标签 · 逐样本预测 722 个 · 补充材料 S01–S30 · 投稿包 873 个文件</a:t>
+              <a:t>仓库：v1.11.0 标签 · 逐样本预测 722 个 · 补充材料 S01–S30 · 投稿包 884 个文件</a:t>
             </a:r>
           </a:p>
         </p:txBody>
@@ -8008,7 +8008,7 @@
                 </a:solidFill>
                 <a:latin typeface="Microsoft YaHei"/>
               </a:rPr>
-              <a:t>六阶段审计 + 13 个语料 + 十个种子</a:t>
+              <a:t>六阶段审计 + 14 个语料 + 十个种子</a:t>
             </a:r>
           </a:p>
         </p:txBody>
@@ -13954,7 +13954,23 @@
                 </a:solidFill>
                 <a:latin typeface="Microsoft YaHei"/>
               </a:rPr>
-              <a:t>· 语料年代：13 个语料里八个发布于 2020 年及以后，其中三份发布于 2025 年，差值与上表同量级（见《向老师汇报要点》Q5）。</a:t>
+              <a:t>· 语料年代：14 个语料里八个发布于 2020 年及以后，其中四份发布于 2025 年，差值与上表同量级（见《向老师汇报要点》Q5）；</a:t>
+            </a:r>
+          </a:p>
+          <a:p>
+            <a:pPr algn="l">
+              <a:lnSpc>
+                <a:spcPct val="135000"/>
+              </a:lnSpc>
+            </a:pPr>
+            <a:r>
+              <a:rPr sz="1300" b="0">
+                <a:solidFill>
+                  <a:srgbClr val="1F2A37"/>
+                </a:solidFill>
+                <a:latin typeface="Microsoft YaHei"/>
+              </a:rPr>
+              <a:t>· 门控并非永远无效：2025 年 Gotham-2025 语料上视图重合时差值恰为 0.000000，把 16 列压到 8 列、视图分化后增益 +0.0063（十个种子方向一致）。</a:t>
             </a:r>
           </a:p>
         </p:txBody>

--- a/重构版论文_v4_20260915/汇报用_论文介绍.pptx
+++ b/重构版论文_v4_20260915/汇报用_论文介绍.pptx
@@ -6863,7 +6863,7 @@
                 </a:solidFill>
                 <a:latin typeface="Microsoft YaHei"/>
               </a:rPr>
-              <a:t>仓库：v1.11.0 标签 · 逐样本预测 722 个 · 补充材料 S01–S30 · 投稿包 884 个文件</a:t>
+              <a:t>仓库：v1.11.0 标签 · 逐样本预测 722 个 · 补充材料 S01–S30 · 投稿包 894 个文件</a:t>
             </a:r>
           </a:p>
         </p:txBody>
@@ -8008,7 +8008,7 @@
                 </a:solidFill>
                 <a:latin typeface="Microsoft YaHei"/>
               </a:rPr>
-              <a:t>六阶段审计 + 14 个语料 + 十个种子</a:t>
+              <a:t>六阶段审计 + 17 个语料 + 十个种子</a:t>
             </a:r>
           </a:p>
         </p:txBody>
@@ -13954,7 +13954,7 @@
                 </a:solidFill>
                 <a:latin typeface="Microsoft YaHei"/>
               </a:rPr>
-              <a:t>· 语料年代：14 个语料里八个发布于 2020 年及以后，其中四份发布于 2025 年，差值与上表同量级（见《向老师汇报要点》Q5）；</a:t>
+              <a:t>· 语料年代：17 个语料里八个发布于 2020 年及以后，其中四份发布于 2025 年，差值与上表同量级（见《向老师汇报要点》Q5）；</a:t>
             </a:r>
           </a:p>
           <a:p>

--- a/重构版论文_v4_20260915/汇报用_论文介绍.pptx
+++ b/重构版论文_v4_20260915/汇报用_论文介绍.pptx
@@ -17,6 +17,7 @@
     <p:sldId id="265" r:id="rId17"/>
     <p:sldId id="266" r:id="rId18"/>
     <p:sldId id="267" r:id="rId19"/>
+    <p:sldId id="268" r:id="rId20"/>
   </p:sldIdLst>
   <p:sldSz cx="12191695" cy="6858000" type="screen4x3"/>
   <p:notesSz cx="6858000" cy="9144000"/>
@@ -724,6 +725,76 @@
           <a:p>
             <a:r>
               <a:t>这一页只在被问到复现性时使用：四条命令、检查覆盖的四类风险、以及五份可以当场打开的证据文档。</a:t>
+            </a:r>
+          </a:p>
+        </p:txBody>
+      </p:sp>
+      <p:sp>
+        <p:nvSpPr>
+          <p:cNvPr id="4" name="Slide Number Placeholder 3"/>
+          <p:cNvSpPr>
+            <a:spLocks noGrp="1"/>
+          </p:cNvSpPr>
+          <p:nvPr>
+            <p:ph type="sldNum" idx="5" sz="quarter"/>
+          </p:nvPr>
+        </p:nvSpPr>
+        <p:spPr/>
+      </p:sp>
+    </p:spTree>
+  </p:cSld>
+  <p:clrMapOvr>
+    <a:masterClrMapping/>
+  </p:clrMapOvr>
+</p:notes>
+</file>
+
+<file path=ppt/notesSlides/notesSlide13.xml><?xml version="1.0" encoding="utf-8"?>
+<p:notes xmlns:a="http://schemas.openxmlformats.org/drawingml/2006/main" xmlns:p="http://schemas.openxmlformats.org/presentationml/2006/main" xmlns:r="http://schemas.openxmlformats.org/officeDocument/2006/relationships">
+  <p:cSld>
+    <p:spTree>
+      <p:nvGrpSpPr>
+        <p:cNvPr id="1" name=""/>
+        <p:cNvGrpSpPr/>
+        <p:nvPr/>
+      </p:nvGrpSpPr>
+      <p:grpSpPr>
+        <a:xfrm>
+          <a:off x="0" y="0"/>
+          <a:ext cx="0" cy="0"/>
+          <a:chOff x="0" y="0"/>
+          <a:chExt cx="0" cy="0"/>
+        </a:xfrm>
+      </p:grpSpPr>
+      <p:sp>
+        <p:nvSpPr>
+          <p:cNvPr id="2" name="Slide Image Placeholder 1"/>
+          <p:cNvSpPr>
+            <a:spLocks noGrp="1"/>
+          </p:cNvSpPr>
+          <p:nvPr>
+            <p:ph type="sldImg" idx="2"/>
+          </p:nvPr>
+        </p:nvSpPr>
+        <p:spPr/>
+      </p:sp>
+      <p:sp>
+        <p:nvSpPr>
+          <p:cNvPr id="3" name="Notes Placeholder 2"/>
+          <p:cNvSpPr>
+            <a:spLocks noGrp="1"/>
+          </p:cNvSpPr>
+          <p:nvPr>
+            <p:ph type="body" idx="3" sz="quarter"/>
+          </p:nvPr>
+        </p:nvSpPr>
+        <p:spPr/>
+        <p:txBody>
+          <a:bodyPr/>
+          <a:lstStyle/>
+          <a:p>
+            <a:r>
+              <a:t>被问到「语料太老」时先讲这一页：规模、留出、预算扫描、机制四条证据，再把 k=8 的正例与「成员可互换性」连起来。</a:t>
             </a:r>
           </a:p>
         </p:txBody>
@@ -6863,7 +6934,7 @@
                 </a:solidFill>
                 <a:latin typeface="Microsoft YaHei"/>
               </a:rPr>
-              <a:t>仓库：v1.11.0 标签 · 逐样本预测 722 个 · 补充材料 S01–S30 · 投稿包 894 个文件</a:t>
+              <a:t>仓库：v1.11.0 标签 · 逐样本预测 722 个 · 补充材料 S01–S30 · 投稿包 916 个文件</a:t>
             </a:r>
           </a:p>
         </p:txBody>
@@ -7160,6 +7231,396 @@
                 <a:latin typeface="Microsoft YaHei"/>
               </a:rPr>
               <a:t>12</a:t>
+            </a:r>
+          </a:p>
+        </p:txBody>
+      </p:sp>
+    </p:spTree>
+  </p:cSld>
+  <p:clrMapOvr>
+    <a:masterClrMapping/>
+  </p:clrMapOvr>
+</p:sld>
+</file>
+
+<file path=ppt/slides/slide13.xml><?xml version="1.0" encoding="utf-8"?>
+<p:sld xmlns:a="http://schemas.openxmlformats.org/drawingml/2006/main" xmlns:p="http://schemas.openxmlformats.org/presentationml/2006/main" xmlns:r="http://schemas.openxmlformats.org/officeDocument/2006/relationships">
+  <p:cSld>
+    <p:spTree>
+      <p:nvGrpSpPr>
+        <p:cNvPr id="1" name=""/>
+        <p:cNvGrpSpPr/>
+        <p:nvPr/>
+      </p:nvGrpSpPr>
+      <p:grpSpPr/>
+      <p:sp>
+        <p:nvSpPr>
+          <p:cNvPr id="2" name="TextBox 1"/>
+          <p:cNvSpPr txBox="1"/>
+          <p:nvPr/>
+        </p:nvSpPr>
+        <p:spPr>
+          <a:xfrm>
+            <a:off x="548640" y="347472"/>
+            <a:ext cx="10972800" cy="310896"/>
+          </a:xfrm>
+          <a:prstGeom prst="rect">
+            <a:avLst/>
+          </a:prstGeom>
+          <a:noFill/>
+        </p:spPr>
+        <p:txBody>
+          <a:bodyPr wrap="square">
+            <a:spAutoFit/>
+          </a:bodyPr>
+          <a:lstStyle/>
+          <a:p>
+            <a:pPr algn="l">
+              <a:lnSpc>
+                <a:spcPct val="115000"/>
+              </a:lnSpc>
+            </a:pPr>
+            <a:r>
+              <a:rPr sz="1200" b="1">
+                <a:solidFill>
+                  <a:srgbClr val="1F6FEB"/>
+                </a:solidFill>
+                <a:latin typeface="Microsoft YaHei"/>
+              </a:rPr>
+              <a:t>附加页 · 2026-10-03 批次</a:t>
+            </a:r>
+          </a:p>
+        </p:txBody>
+      </p:sp>
+      <p:sp>
+        <p:nvSpPr>
+          <p:cNvPr id="3" name="TextBox 2"/>
+          <p:cNvSpPr txBox="1"/>
+          <p:nvPr/>
+        </p:nvSpPr>
+        <p:spPr>
+          <a:xfrm>
+            <a:off x="548640" y="694944"/>
+            <a:ext cx="11064240" cy="731520"/>
+          </a:xfrm>
+          <a:prstGeom prst="rect">
+            <a:avLst/>
+          </a:prstGeom>
+          <a:noFill/>
+        </p:spPr>
+        <p:txBody>
+          <a:bodyPr wrap="square">
+            <a:spAutoFit/>
+          </a:bodyPr>
+          <a:lstStyle/>
+          <a:p>
+            <a:pPr algn="l">
+              <a:lnSpc>
+                <a:spcPct val="115000"/>
+              </a:lnSpc>
+            </a:pPr>
+            <a:r>
+              <a:rPr sz="2600" b="1">
+                <a:solidFill>
+                  <a:srgbClr val="1F2A37"/>
+                </a:solidFill>
+                <a:latin typeface="Microsoft YaHei"/>
+              </a:rPr>
+              <a:t>现代语料阶梯：规模、分布位移与机制</a:t>
+            </a:r>
+          </a:p>
+        </p:txBody>
+      </p:sp>
+      <p:sp>
+        <p:nvSpPr>
+          <p:cNvPr id="4" name="Rectangle 3"/>
+          <p:cNvSpPr/>
+          <p:nvPr/>
+        </p:nvSpPr>
+        <p:spPr>
+          <a:xfrm>
+            <a:off x="548640" y="1463040"/>
+            <a:ext cx="11064240" cy="15240"/>
+          </a:xfrm>
+          <a:prstGeom prst="rect">
+            <a:avLst/>
+          </a:prstGeom>
+          <a:solidFill>
+            <a:srgbClr val="D1D5DB"/>
+          </a:solidFill>
+          <a:ln>
+            <a:noFill/>
+          </a:ln>
+          <a:effectLst/>
+        </p:spPr>
+        <p:style>
+          <a:lnRef idx="1">
+            <a:schemeClr val="accent1"/>
+          </a:lnRef>
+          <a:fillRef idx="3">
+            <a:schemeClr val="accent1"/>
+          </a:fillRef>
+          <a:effectRef idx="2">
+            <a:schemeClr val="accent1"/>
+          </a:effectRef>
+          <a:fontRef idx="minor">
+            <a:schemeClr val="lt1"/>
+          </a:fontRef>
+        </p:style>
+        <p:txBody>
+          <a:bodyPr rtlCol="0" anchor="ctr"/>
+          <a:lstStyle/>
+          <a:p>
+            <a:pPr algn="ctr"/>
+          </a:p>
+        </p:txBody>
+      </p:sp>
+      <p:sp>
+        <p:nvSpPr>
+          <p:cNvPr id="5" name="Rectangle 4"/>
+          <p:cNvSpPr/>
+          <p:nvPr/>
+        </p:nvSpPr>
+        <p:spPr>
+          <a:xfrm>
+            <a:off x="548640" y="1737360"/>
+            <a:ext cx="11064240" cy="3108960"/>
+          </a:xfrm>
+          <a:prstGeom prst="rect">
+            <a:avLst/>
+          </a:prstGeom>
+          <a:solidFill>
+            <a:srgbClr val="F3F5F7"/>
+          </a:solidFill>
+          <a:ln>
+            <a:solidFill>
+              <a:srgbClr val="F3F5F7"/>
+            </a:solidFill>
+          </a:ln>
+          <a:effectLst/>
+        </p:spPr>
+        <p:style>
+          <a:lnRef idx="1">
+            <a:schemeClr val="accent1"/>
+          </a:lnRef>
+          <a:fillRef idx="3">
+            <a:schemeClr val="accent1"/>
+          </a:fillRef>
+          <a:effectRef idx="2">
+            <a:schemeClr val="accent1"/>
+          </a:effectRef>
+          <a:fontRef idx="minor">
+            <a:schemeClr val="lt1"/>
+          </a:fontRef>
+        </p:style>
+        <p:txBody>
+          <a:bodyPr rtlCol="0" anchor="ctr"/>
+          <a:lstStyle/>
+          <a:p>
+            <a:pPr algn="ctr"/>
+          </a:p>
+        </p:txBody>
+      </p:sp>
+      <p:sp>
+        <p:nvSpPr>
+          <p:cNvPr id="6" name="TextBox 5"/>
+          <p:cNvSpPr txBox="1"/>
+          <p:nvPr/>
+        </p:nvSpPr>
+        <p:spPr>
+          <a:xfrm>
+            <a:off x="822960" y="1920240"/>
+            <a:ext cx="10515600" cy="2743200"/>
+          </a:xfrm>
+          <a:prstGeom prst="rect">
+            <a:avLst/>
+          </a:prstGeom>
+          <a:noFill/>
+        </p:spPr>
+        <p:txBody>
+          <a:bodyPr wrap="square">
+            <a:spAutoFit/>
+          </a:bodyPr>
+          <a:lstStyle/>
+          <a:p>
+            <a:pPr algn="l">
+              <a:lnSpc>
+                <a:spcPct val="135000"/>
+              </a:lnSpc>
+            </a:pPr>
+            <a:r>
+              <a:rPr sz="1400" b="0">
+                <a:solidFill>
+                  <a:srgbClr val="1F2A37"/>
+                </a:solidFill>
+                <a:latin typeface="Microsoft YaHei"/>
+              </a:rPr>
+              <a:t>规模：CIC-IoT-2023 每类 20 万 −0.000021 / 每类 50 万 −0.000004；Gotham-2025 每类 20 万 +0.000011 / 不限上限（7 189 693 行）+0.000009。</a:t>
+            </a:r>
+          </a:p>
+          <a:p>
+            <a:pPr algn="l">
+              <a:lnSpc>
+                <a:spcPct val="135000"/>
+              </a:lnSpc>
+            </a:pPr>
+            <a:r>
+              <a:rPr sz="1400" b="0">
+                <a:solidFill>
+                  <a:srgbClr val="1F2A37"/>
+                </a:solidFill>
+                <a:latin typeface="Microsoft YaHei"/>
+              </a:rPr>
+              <a:t>分布位移：Gotham 逐设备留出 12/78 台，RCCF 均值 0.9671，两臂差 +0.000000；6TiSCHSet 逐运行留出 12/122 次，均值 0.5223，两臂差 +0.000123。</a:t>
+            </a:r>
+          </a:p>
+          <a:p>
+            <a:pPr algn="l">
+              <a:lnSpc>
+                <a:spcPct val="135000"/>
+              </a:lnSpc>
+            </a:pPr>
+            <a:r>
+              <a:rPr sz="1400" b="0">
+                <a:solidFill>
+                  <a:srgbClr val="1F2A37"/>
+                </a:solidFill>
+                <a:latin typeface="Microsoft YaHei"/>
+              </a:rPr>
+              <a:t>剂量—反应：特征预算 k=8 +0.001663 → k=16 +0.000402 → k=32 −0.000002 → k=60 −0.000004。</a:t>
+            </a:r>
+          </a:p>
+          <a:p>
+            <a:pPr algn="l">
+              <a:lnSpc>
+                <a:spcPct val="135000"/>
+              </a:lnSpc>
+            </a:pPr>
+            <a:r>
+              <a:rPr sz="1400" b="0">
+                <a:solidFill>
+                  <a:srgbClr val="1F2A37"/>
+                </a:solidFill>
+                <a:latin typeface="Microsoft YaHei"/>
+              </a:rPr>
+              <a:t>机制：Gotham 全档改判 0/297 180 行；CIC-IoT-2023 改判 12/375 160 行（理论界可证 99.45%）；树权重落在 0.0091–0.0102 之间；增益与分歧回归 r = 0.744。</a:t>
+            </a:r>
+          </a:p>
+        </p:txBody>
+      </p:sp>
+      <p:sp>
+        <p:nvSpPr>
+          <p:cNvPr id="7" name="TextBox 6"/>
+          <p:cNvSpPr txBox="1"/>
+          <p:nvPr/>
+        </p:nvSpPr>
+        <p:spPr>
+          <a:xfrm>
+            <a:off x="822960" y="5029200"/>
+            <a:ext cx="10515600" cy="1097280"/>
+          </a:xfrm>
+          <a:prstGeom prst="rect">
+            <a:avLst/>
+          </a:prstGeom>
+          <a:noFill/>
+        </p:spPr>
+        <p:txBody>
+          <a:bodyPr wrap="square">
+            <a:spAutoFit/>
+          </a:bodyPr>
+          <a:lstStyle/>
+          <a:p>
+            <a:pPr algn="l">
+              <a:lnSpc>
+                <a:spcPct val="130000"/>
+              </a:lnSpc>
+            </a:pPr>
+            <a:r>
+              <a:rPr sz="1300" b="0">
+                <a:solidFill>
+                  <a:srgbClr val="6B7280"/>
+                </a:solidFill>
+                <a:latin typeface="Microsoft YaHei"/>
+              </a:rPr>
+              <a:t>一句话：2017 语料上那个 −0.005533 的规模性劣势没有在现代语料上复现；决定等价性的是成员可互换性，而不是语料年代或训练规模。</a:t>
+            </a:r>
+          </a:p>
+        </p:txBody>
+      </p:sp>
+      <p:sp>
+        <p:nvSpPr>
+          <p:cNvPr id="8" name="TextBox 7"/>
+          <p:cNvSpPr txBox="1"/>
+          <p:nvPr/>
+        </p:nvSpPr>
+        <p:spPr>
+          <a:xfrm>
+            <a:off x="548640" y="6400800"/>
+            <a:ext cx="8229600" cy="274320"/>
+          </a:xfrm>
+          <a:prstGeom prst="rect">
+            <a:avLst/>
+          </a:prstGeom>
+          <a:noFill/>
+        </p:spPr>
+        <p:txBody>
+          <a:bodyPr wrap="square">
+            <a:spAutoFit/>
+          </a:bodyPr>
+          <a:lstStyle/>
+          <a:p>
+            <a:pPr algn="l">
+              <a:lnSpc>
+                <a:spcPct val="115000"/>
+              </a:lnSpc>
+            </a:pPr>
+            <a:r>
+              <a:rPr sz="1000" b="0">
+                <a:solidFill>
+                  <a:srgbClr val="6B7280"/>
+                </a:solidFill>
+                <a:latin typeface="Microsoft YaHei"/>
+              </a:rPr>
+              <a:t>泄漏受控的条件集成加权研究 · v1.11.0 · 数字均取自发布产物</a:t>
+            </a:r>
+          </a:p>
+        </p:txBody>
+      </p:sp>
+      <p:sp>
+        <p:nvSpPr>
+          <p:cNvPr id="9" name="TextBox 8"/>
+          <p:cNvSpPr txBox="1"/>
+          <p:nvPr/>
+        </p:nvSpPr>
+        <p:spPr>
+          <a:xfrm>
+            <a:off x="11155680" y="6400800"/>
+            <a:ext cx="548640" cy="274320"/>
+          </a:xfrm>
+          <a:prstGeom prst="rect">
+            <a:avLst/>
+          </a:prstGeom>
+          <a:noFill/>
+        </p:spPr>
+        <p:txBody>
+          <a:bodyPr wrap="square">
+            <a:spAutoFit/>
+          </a:bodyPr>
+          <a:lstStyle/>
+          <a:p>
+            <a:pPr algn="r">
+              <a:lnSpc>
+                <a:spcPct val="115000"/>
+              </a:lnSpc>
+            </a:pPr>
+            <a:r>
+              <a:rPr sz="1000" b="0">
+                <a:solidFill>
+                  <a:srgbClr val="6B7280"/>
+                </a:solidFill>
+                <a:latin typeface="Microsoft YaHei"/>
+              </a:rPr>
+              <a:t>13</a:t>
             </a:r>
           </a:p>
         </p:txBody>
